--- a/Week-3/Day-3/AI_Governance_Lineage_Metadata_Automation.pptx
+++ b/Week-3/Day-3/AI_Governance_Lineage_Metadata_Automation.pptx
@@ -7,36 +7,58 @@
   <p:sldIdLst>
     <p:sldId id="256" r:id="rId2"/>
     <p:sldId id="257" r:id="rId3"/>
-    <p:sldId id="258" r:id="rId4"/>
-    <p:sldId id="259" r:id="rId5"/>
-    <p:sldId id="260" r:id="rId6"/>
-    <p:sldId id="261" r:id="rId7"/>
-    <p:sldId id="262" r:id="rId8"/>
-    <p:sldId id="263" r:id="rId9"/>
-    <p:sldId id="264" r:id="rId10"/>
-    <p:sldId id="265" r:id="rId11"/>
-    <p:sldId id="266" r:id="rId12"/>
-    <p:sldId id="267" r:id="rId13"/>
-    <p:sldId id="268" r:id="rId14"/>
-    <p:sldId id="269" r:id="rId15"/>
-    <p:sldId id="270" r:id="rId16"/>
-    <p:sldId id="271" r:id="rId17"/>
-    <p:sldId id="272" r:id="rId18"/>
-    <p:sldId id="273" r:id="rId19"/>
-    <p:sldId id="274" r:id="rId20"/>
-    <p:sldId id="275" r:id="rId21"/>
-    <p:sldId id="276" r:id="rId22"/>
-    <p:sldId id="277" r:id="rId23"/>
-    <p:sldId id="278" r:id="rId24"/>
-    <p:sldId id="279" r:id="rId25"/>
-    <p:sldId id="280" r:id="rId26"/>
-    <p:sldId id="281" r:id="rId27"/>
-    <p:sldId id="282" r:id="rId28"/>
-    <p:sldId id="283" r:id="rId29"/>
-    <p:sldId id="284" r:id="rId30"/>
-    <p:sldId id="285" r:id="rId31"/>
-    <p:sldId id="286" r:id="rId32"/>
-    <p:sldId id="287" r:id="rId33"/>
+    <p:sldId id="288" r:id="rId4"/>
+    <p:sldId id="289" r:id="rId5"/>
+    <p:sldId id="258" r:id="rId6"/>
+    <p:sldId id="259" r:id="rId7"/>
+    <p:sldId id="290" r:id="rId8"/>
+    <p:sldId id="300" r:id="rId9"/>
+    <p:sldId id="260" r:id="rId10"/>
+    <p:sldId id="291" r:id="rId11"/>
+    <p:sldId id="301" r:id="rId12"/>
+    <p:sldId id="261" r:id="rId13"/>
+    <p:sldId id="292" r:id="rId14"/>
+    <p:sldId id="262" r:id="rId15"/>
+    <p:sldId id="293" r:id="rId16"/>
+    <p:sldId id="263" r:id="rId17"/>
+    <p:sldId id="294" r:id="rId18"/>
+    <p:sldId id="302" r:id="rId19"/>
+    <p:sldId id="264" r:id="rId20"/>
+    <p:sldId id="295" r:id="rId21"/>
+    <p:sldId id="303" r:id="rId22"/>
+    <p:sldId id="265" r:id="rId23"/>
+    <p:sldId id="296" r:id="rId24"/>
+    <p:sldId id="266" r:id="rId25"/>
+    <p:sldId id="297" r:id="rId26"/>
+    <p:sldId id="304" r:id="rId27"/>
+    <p:sldId id="267" r:id="rId28"/>
+    <p:sldId id="298" r:id="rId29"/>
+    <p:sldId id="268" r:id="rId30"/>
+    <p:sldId id="299" r:id="rId31"/>
+    <p:sldId id="305" r:id="rId32"/>
+    <p:sldId id="269" r:id="rId33"/>
+    <p:sldId id="270" r:id="rId34"/>
+    <p:sldId id="306" r:id="rId35"/>
+    <p:sldId id="271" r:id="rId36"/>
+    <p:sldId id="272" r:id="rId37"/>
+    <p:sldId id="273" r:id="rId38"/>
+    <p:sldId id="274" r:id="rId39"/>
+    <p:sldId id="275" r:id="rId40"/>
+    <p:sldId id="276" r:id="rId41"/>
+    <p:sldId id="307" r:id="rId42"/>
+    <p:sldId id="277" r:id="rId43"/>
+    <p:sldId id="278" r:id="rId44"/>
+    <p:sldId id="279" r:id="rId45"/>
+    <p:sldId id="308" r:id="rId46"/>
+    <p:sldId id="280" r:id="rId47"/>
+    <p:sldId id="309" r:id="rId48"/>
+    <p:sldId id="281" r:id="rId49"/>
+    <p:sldId id="282" r:id="rId50"/>
+    <p:sldId id="283" r:id="rId51"/>
+    <p:sldId id="284" r:id="rId52"/>
+    <p:sldId id="285" r:id="rId53"/>
+    <p:sldId id="286" r:id="rId54"/>
+    <p:sldId id="287" r:id="rId55"/>
   </p:sldIdLst>
   <p:sldSz cx="9144000" cy="6858000" type="screen4x3"/>
   <p:notesSz cx="6858000" cy="9144000"/>
@@ -210,6 +232,13 @@
             <a:schemeClr val="lt1"/>
           </a:fontRef>
         </p:style>
+        <p:txBody>
+          <a:bodyPr/>
+          <a:lstStyle/>
+          <a:p>
+            <a:endParaRPr lang="en-IN"/>
+          </a:p>
+        </p:txBody>
       </p:sp>
       <p:sp>
         <p:nvSpPr>
@@ -6651,6 +6680,13 @@
             <a:schemeClr val="lt1"/>
           </a:fontRef>
         </p:style>
+        <p:txBody>
+          <a:bodyPr/>
+          <a:lstStyle/>
+          <a:p>
+            <a:endParaRPr lang="en-IN"/>
+          </a:p>
+        </p:txBody>
       </p:sp>
       <p:sp>
         <p:nvSpPr>
@@ -6787,7 +6823,7 @@
           <a:p>
             <a:fld id="{5BCAD085-E8A6-8845-BD4E-CB4CCA059FC4}" type="datetimeFigureOut">
               <a:rPr lang="en-US" smtClean="0"/>
-              <a:t>5/11/2026</a:t>
+              <a:t>5/13/2026</a:t>
             </a:fld>
             <a:endParaRPr lang="en-US"/>
           </a:p>
@@ -6994,7 +7030,7 @@
           <a:p>
             <a:fld id="{5BCAD085-E8A6-8845-BD4E-CB4CCA059FC4}" type="datetimeFigureOut">
               <a:rPr lang="en-US" smtClean="0"/>
-              <a:t>5/11/2026</a:t>
+              <a:t>5/13/2026</a:t>
             </a:fld>
             <a:endParaRPr lang="en-US"/>
           </a:p>
@@ -7174,7 +7210,7 @@
           <a:p>
             <a:fld id="{5BCAD085-E8A6-8845-BD4E-CB4CCA059FC4}" type="datetimeFigureOut">
               <a:rPr lang="en-US" smtClean="0"/>
-              <a:t>5/11/2026</a:t>
+              <a:t>5/13/2026</a:t>
             </a:fld>
             <a:endParaRPr lang="en-US"/>
           </a:p>
@@ -7379,7 +7415,7 @@
           <a:p>
             <a:fld id="{5BCAD085-E8A6-8845-BD4E-CB4CCA059FC4}" type="datetimeFigureOut">
               <a:rPr lang="en-US" smtClean="0"/>
-              <a:t>5/11/2026</a:t>
+              <a:t>5/13/2026</a:t>
             </a:fld>
             <a:endParaRPr lang="en-US"/>
           </a:p>
@@ -14117,7 +14153,7 @@
           <a:p>
             <a:fld id="{5BCAD085-E8A6-8845-BD4E-CB4CCA059FC4}" type="datetimeFigureOut">
               <a:rPr lang="en-US" smtClean="0"/>
-              <a:t>5/11/2026</a:t>
+              <a:t>5/13/2026</a:t>
             </a:fld>
             <a:endParaRPr lang="en-US"/>
           </a:p>
@@ -14391,7 +14427,7 @@
           <a:p>
             <a:fld id="{5BCAD085-E8A6-8845-BD4E-CB4CCA059FC4}" type="datetimeFigureOut">
               <a:rPr lang="en-US" smtClean="0"/>
-              <a:t>5/11/2026</a:t>
+              <a:t>5/13/2026</a:t>
             </a:fld>
             <a:endParaRPr lang="en-US"/>
           </a:p>
@@ -14794,7 +14830,7 @@
           <a:p>
             <a:fld id="{5BCAD085-E8A6-8845-BD4E-CB4CCA059FC4}" type="datetimeFigureOut">
               <a:rPr lang="en-US" smtClean="0"/>
-              <a:t>5/11/2026</a:t>
+              <a:t>5/13/2026</a:t>
             </a:fld>
             <a:endParaRPr lang="en-US"/>
           </a:p>
@@ -14912,7 +14948,7 @@
           <a:p>
             <a:fld id="{5BCAD085-E8A6-8845-BD4E-CB4CCA059FC4}" type="datetimeFigureOut">
               <a:rPr lang="en-US" smtClean="0"/>
-              <a:t>5/11/2026</a:t>
+              <a:t>5/13/2026</a:t>
             </a:fld>
             <a:endParaRPr lang="en-US"/>
           </a:p>
@@ -15007,7 +15043,7 @@
           <a:p>
             <a:fld id="{5BCAD085-E8A6-8845-BD4E-CB4CCA059FC4}" type="datetimeFigureOut">
               <a:rPr lang="en-US" smtClean="0"/>
-              <a:t>5/11/2026</a:t>
+              <a:t>5/13/2026</a:t>
             </a:fld>
             <a:endParaRPr lang="en-US"/>
           </a:p>
@@ -15299,7 +15335,7 @@
           <a:p>
             <a:fld id="{5BCAD085-E8A6-8845-BD4E-CB4CCA059FC4}" type="datetimeFigureOut">
               <a:rPr lang="en-US" smtClean="0"/>
-              <a:t>5/11/2026</a:t>
+              <a:t>5/13/2026</a:t>
             </a:fld>
             <a:endParaRPr lang="en-US"/>
           </a:p>
@@ -15579,7 +15615,7 @@
           <a:p>
             <a:fld id="{5BCAD085-E8A6-8845-BD4E-CB4CCA059FC4}" type="datetimeFigureOut">
               <a:rPr lang="en-US" smtClean="0"/>
-              <a:t>5/11/2026</a:t>
+              <a:t>5/13/2026</a:t>
             </a:fld>
             <a:endParaRPr lang="en-US"/>
           </a:p>
@@ -15829,7 +15865,7 @@
           <a:p>
             <a:fld id="{5BCAD085-E8A6-8845-BD4E-CB4CCA059FC4}" type="datetimeFigureOut">
               <a:rPr lang="en-US" smtClean="0"/>
-              <a:t>5/11/2026</a:t>
+              <a:t>5/13/2026</a:t>
             </a:fld>
             <a:endParaRPr lang="en-US"/>
           </a:p>
@@ -16404,7 +16440,13 @@
       </p:grpSpPr>
       <p:sp>
         <p:nvSpPr>
-          <p:cNvPr id="2" name="Title 1"/>
+          <p:cNvPr id="2" name="Title 1">
+            <a:extLst>
+              <a:ext uri="{FF2B5EF4-FFF2-40B4-BE49-F238E27FC236}">
+                <a16:creationId xmlns:a16="http://schemas.microsoft.com/office/drawing/2014/main" id="{DF314FDC-9E94-1C14-E6A3-46586AF5EDFE}"/>
+              </a:ext>
+            </a:extLst>
+          </p:cNvPr>
           <p:cNvSpPr>
             <a:spLocks noGrp="1"/>
           </p:cNvSpPr>
@@ -16418,14 +16460,25 @@
           <a:lstStyle/>
           <a:p>
             <a:r>
-              <a:t>PII and Sensitive Data Discovery</a:t>
+              <a:rPr lang="en-IN" dirty="0" err="1"/>
+              <a:t>dbt</a:t>
+            </a:r>
+            <a:r>
+              <a:rPr lang="en-IN" dirty="0"/>
+              <a:t> Lineage Extraction</a:t>
             </a:r>
           </a:p>
         </p:txBody>
       </p:sp>
       <p:sp>
         <p:nvSpPr>
-          <p:cNvPr id="3" name="Content Placeholder 2"/>
+          <p:cNvPr id="3" name="Content Placeholder 2">
+            <a:extLst>
+              <a:ext uri="{FF2B5EF4-FFF2-40B4-BE49-F238E27FC236}">
+                <a16:creationId xmlns:a16="http://schemas.microsoft.com/office/drawing/2014/main" id="{17ED47A3-E73B-486E-9192-FC16089208C4}"/>
+              </a:ext>
+            </a:extLst>
+          </p:cNvPr>
           <p:cNvSpPr>
             <a:spLocks noGrp="1"/>
           </p:cNvSpPr>
@@ -16433,33 +16486,134 @@
             <p:ph idx="1"/>
           </p:nvPr>
         </p:nvSpPr>
-        <p:spPr/>
+        <p:spPr>
+          <a:xfrm>
+            <a:off x="768096" y="1857375"/>
+            <a:ext cx="7290055" cy="4451985"/>
+          </a:xfrm>
+        </p:spPr>
         <p:txBody>
-          <a:bodyPr/>
+          <a:bodyPr>
+            <a:normAutofit fontScale="70000" lnSpcReduction="20000"/>
+          </a:bodyPr>
           <a:lstStyle/>
           <a:p>
             <a:r>
-              <a:t>Detect personal data</a:t>
-            </a:r>
-          </a:p>
-          <a:p>
-            <a:r>
-              <a:t>Classify sensitive records</a:t>
-            </a:r>
-          </a:p>
-          <a:p>
-            <a:r>
-              <a:t>Monitor confidential information</a:t>
-            </a:r>
-          </a:p>
-          <a:p>
-            <a:r>
-              <a:t>Apply governance policies</a:t>
-            </a:r>
+              <a:rPr lang="en-IN" b="1" dirty="0"/>
+              <a:t>What is </a:t>
+            </a:r>
+            <a:r>
+              <a:rPr lang="en-IN" b="1" dirty="0" err="1"/>
+              <a:t>dbt</a:t>
+            </a:r>
+            <a:r>
+              <a:rPr lang="en-IN" b="1" dirty="0"/>
+              <a:t>?</a:t>
+            </a:r>
+          </a:p>
+          <a:p>
+            <a:r>
+              <a:rPr lang="en-IN" dirty="0" err="1"/>
+              <a:t>dbt</a:t>
+            </a:r>
+            <a:r>
+              <a:rPr lang="en-IN" dirty="0"/>
+              <a:t> is a transformation framework used in analytics engineering.</a:t>
+            </a:r>
+          </a:p>
+          <a:p>
+            <a:r>
+              <a:rPr lang="en-IN" b="1" dirty="0" err="1"/>
+              <a:t>dbt</a:t>
+            </a:r>
+            <a:r>
+              <a:rPr lang="en-IN" b="1" dirty="0"/>
+              <a:t> DAG</a:t>
+            </a:r>
+          </a:p>
+          <a:p>
+            <a:r>
+              <a:rPr lang="en-IN" dirty="0" err="1"/>
+              <a:t>dbt</a:t>
+            </a:r>
+            <a:r>
+              <a:rPr lang="en-IN" dirty="0"/>
+              <a:t> creates Directed Acyclic Graphs (DAGs):</a:t>
+            </a:r>
+          </a:p>
+          <a:p>
+            <a:r>
+              <a:rPr lang="en-IN" dirty="0"/>
+              <a:t>Model dependencies </a:t>
+            </a:r>
+          </a:p>
+          <a:p>
+            <a:r>
+              <a:rPr lang="en-IN" dirty="0"/>
+              <a:t>Transformation chains </a:t>
+            </a:r>
+          </a:p>
+          <a:p>
+            <a:r>
+              <a:rPr lang="en-IN" dirty="0"/>
+              <a:t>Execution order </a:t>
+            </a:r>
+          </a:p>
+          <a:p>
+            <a:r>
+              <a:rPr lang="en-IN" b="1" dirty="0"/>
+              <a:t>AI Usage</a:t>
+            </a:r>
+          </a:p>
+          <a:p>
+            <a:r>
+              <a:rPr lang="en-IN" dirty="0"/>
+              <a:t>AI can:</a:t>
+            </a:r>
+          </a:p>
+          <a:p>
+            <a:r>
+              <a:rPr lang="en-IN" dirty="0"/>
+              <a:t>Parse </a:t>
+            </a:r>
+            <a:r>
+              <a:rPr lang="en-IN" dirty="0" err="1"/>
+              <a:t>dbt</a:t>
+            </a:r>
+            <a:r>
+              <a:rPr lang="en-IN" dirty="0"/>
+              <a:t> models </a:t>
+            </a:r>
+          </a:p>
+          <a:p>
+            <a:r>
+              <a:rPr lang="en-IN" dirty="0"/>
+              <a:t>Identify sources </a:t>
+            </a:r>
+          </a:p>
+          <a:p>
+            <a:r>
+              <a:rPr lang="en-IN" dirty="0"/>
+              <a:t>Build lineage relationships </a:t>
+            </a:r>
+          </a:p>
+          <a:p>
+            <a:r>
+              <a:rPr lang="en-IN" dirty="0"/>
+              <a:t>Explain transformations</a:t>
+            </a:r>
+          </a:p>
+          <a:p>
+            <a:endParaRPr lang="en-IN" dirty="0"/>
           </a:p>
         </p:txBody>
       </p:sp>
     </p:spTree>
+    <p:extLst>
+      <p:ext uri="{BB962C8B-B14F-4D97-AF65-F5344CB8AC3E}">
+        <p14:creationId xmlns:p14="http://schemas.microsoft.com/office/powerpoint/2010/main" val="1932514110"/>
+      </p:ext>
+    </p:extLst>
   </p:cSld>
   <p:clrMapOvr>
     <a:masterClrMapping/>
@@ -16470,6 +16624,14 @@
 <file path=ppt/slides/slide11.xml><?xml version="1.0" encoding="utf-8"?>
 <p:sld xmlns:a="http://schemas.openxmlformats.org/drawingml/2006/main" xmlns:r="http://schemas.openxmlformats.org/officeDocument/2006/relationships" xmlns:p="http://schemas.openxmlformats.org/presentationml/2006/main">
   <p:cSld>
+    <p:bg>
+      <p:bgPr>
+        <a:solidFill>
+          <a:srgbClr val="1B3A4B"/>
+        </a:solidFill>
+        <a:effectLst/>
+      </p:bgPr>
+    </p:bg>
     <p:spTree>
       <p:nvGrpSpPr>
         <p:cNvPr id="1" name=""/>
@@ -16486,62 +16648,180 @@
       </p:grpSpPr>
       <p:sp>
         <p:nvSpPr>
-          <p:cNvPr id="2" name="Title 1"/>
-          <p:cNvSpPr>
-            <a:spLocks noGrp="1"/>
-          </p:cNvSpPr>
-          <p:nvPr>
-            <p:ph type="title"/>
-          </p:nvPr>
+          <p:cNvPr id="10" name="TopBar"/>
+          <p:cNvSpPr/>
+          <p:nvPr/>
         </p:nvSpPr>
-        <p:spPr/>
+        <p:spPr>
+          <a:xfrm>
+            <a:off x="914400" y="2148840"/>
+            <a:ext cx="7315200" cy="45720"/>
+          </a:xfrm>
+          <a:prstGeom prst="rect">
+            <a:avLst/>
+          </a:prstGeom>
+          <a:solidFill>
+            <a:srgbClr val="1CADE4"/>
+          </a:solidFill>
+          <a:ln>
+            <a:noFill/>
+          </a:ln>
+        </p:spPr>
         <p:txBody>
           <a:bodyPr/>
           <a:lstStyle/>
           <a:p>
-            <a:r>
-              <a:t>PII Detection Techniques</a:t>
-            </a:r>
+            <a:endParaRPr lang="en-IN"/>
           </a:p>
         </p:txBody>
       </p:sp>
       <p:sp>
         <p:nvSpPr>
-          <p:cNvPr id="3" name="Content Placeholder 2"/>
-          <p:cNvSpPr>
-            <a:spLocks noGrp="1"/>
-          </p:cNvSpPr>
-          <p:nvPr>
-            <p:ph idx="1"/>
-          </p:nvPr>
+          <p:cNvPr id="11" name="LabTag"/>
+          <p:cNvSpPr/>
+          <p:nvPr/>
         </p:nvSpPr>
-        <p:spPr/>
+        <p:spPr>
+          <a:xfrm>
+            <a:off x="3657600" y="2377440"/>
+            <a:ext cx="1828800" cy="548640"/>
+          </a:xfrm>
+          <a:prstGeom prst="roundRect">
+            <a:avLst>
+              <a:gd name="adj" fmla="val 16667"/>
+            </a:avLst>
+          </a:prstGeom>
+          <a:solidFill>
+            <a:srgbClr val="1CADE4"/>
+          </a:solidFill>
+          <a:ln>
+            <a:noFill/>
+          </a:ln>
+        </p:spPr>
+        <p:txBody>
+          <a:bodyPr wrap="square" lIns="0" tIns="0" rIns="0" bIns="0" anchor="ctr"/>
+          <a:lstStyle/>
+          <a:p>
+            <a:pPr algn="ctr"/>
+            <a:r>
+              <a:rPr lang="en-US" sz="2000" b="1" spc="400">
+                <a:solidFill>
+                  <a:srgbClr val="FFFFFF"/>
+                </a:solidFill>
+                <a:latin typeface="Trebuchet MS"/>
+              </a:rPr>
+              <a:t>LAB 2</a:t>
+            </a:r>
+          </a:p>
+        </p:txBody>
+      </p:sp>
+      <p:sp>
+        <p:nvSpPr>
+          <p:cNvPr id="12" name="MainTitle"/>
+          <p:cNvSpPr/>
+          <p:nvPr/>
+        </p:nvSpPr>
+        <p:spPr>
+          <a:xfrm>
+            <a:off x="914400" y="3148965"/>
+            <a:ext cx="7315200" cy="914400"/>
+          </a:xfrm>
+          <a:prstGeom prst="rect">
+            <a:avLst/>
+          </a:prstGeom>
+          <a:noFill/>
+          <a:ln>
+            <a:noFill/>
+          </a:ln>
+        </p:spPr>
+        <p:txBody>
+          <a:bodyPr wrap="square" lIns="0" tIns="0" rIns="0" bIns="0" anchor="ctr"/>
+          <a:lstStyle/>
+          <a:p>
+            <a:pPr algn="ctr"/>
+            <a:r>
+              <a:rPr lang="en-US" sz="4400" b="1">
+                <a:solidFill>
+                  <a:srgbClr val="FFFFFF"/>
+                </a:solidFill>
+                <a:latin typeface="Trebuchet MS"/>
+              </a:rPr>
+              <a:t>Hands-On Activity</a:t>
+            </a:r>
+          </a:p>
+        </p:txBody>
+      </p:sp>
+      <p:sp>
+        <p:nvSpPr>
+          <p:cNvPr id="13" name="Subtitle"/>
+          <p:cNvSpPr/>
+          <p:nvPr/>
+        </p:nvSpPr>
+        <p:spPr>
+          <a:xfrm>
+            <a:off x="1828800" y="4130040"/>
+            <a:ext cx="5486400" cy="548640"/>
+          </a:xfrm>
+          <a:prstGeom prst="rect">
+            <a:avLst/>
+          </a:prstGeom>
+          <a:noFill/>
+          <a:ln>
+            <a:noFill/>
+          </a:ln>
+        </p:spPr>
+        <p:txBody>
+          <a:bodyPr wrap="square" lIns="0" tIns="0" rIns="0" bIns="0" anchor="t"/>
+          <a:lstStyle/>
+          <a:p>
+            <a:pPr algn="ctr"/>
+            <a:r>
+              <a:rPr lang="en-US" sz="1800">
+                <a:solidFill>
+                  <a:srgbClr val="8BB8D0"/>
+                </a:solidFill>
+                <a:latin typeface="Calibri"/>
+              </a:rPr>
+              <a:t>dbt Lineage Extraction</a:t>
+            </a:r>
+          </a:p>
+        </p:txBody>
+      </p:sp>
+      <p:sp>
+        <p:nvSpPr>
+          <p:cNvPr id="14" name="BottomBar"/>
+          <p:cNvSpPr/>
+          <p:nvPr/>
+        </p:nvSpPr>
+        <p:spPr>
+          <a:xfrm>
+            <a:off x="914400" y="4892040"/>
+            <a:ext cx="7315200" cy="45720"/>
+          </a:xfrm>
+          <a:prstGeom prst="rect">
+            <a:avLst/>
+          </a:prstGeom>
+          <a:solidFill>
+            <a:srgbClr val="1CADE4"/>
+          </a:solidFill>
+          <a:ln>
+            <a:noFill/>
+          </a:ln>
+        </p:spPr>
         <p:txBody>
           <a:bodyPr/>
           <a:lstStyle/>
           <a:p>
-            <a:r>
-              <a:t>Regex-based detection</a:t>
-            </a:r>
-          </a:p>
-          <a:p>
-            <a:r>
-              <a:t>NLP-based classification</a:t>
-            </a:r>
-          </a:p>
-          <a:p>
-            <a:r>
-              <a:t>LLM semantic understanding</a:t>
-            </a:r>
-          </a:p>
-          <a:p>
-            <a:r>
-              <a:t>Context-aware analysis</a:t>
-            </a:r>
+            <a:endParaRPr lang="en-IN"/>
           </a:p>
         </p:txBody>
       </p:sp>
     </p:spTree>
+    <p:extLst>
+      <p:ext uri="{BB962C8B-B14F-4D97-AF65-F5344CB8AC3E}">
+        <p14:creationId xmlns:p14="http://schemas.microsoft.com/office/powerpoint/2010/main" val="559865816"/>
+      </p:ext>
+    </p:extLst>
   </p:cSld>
   <p:clrMapOvr>
     <a:masterClrMapping/>
@@ -16582,7 +16862,7 @@
           <a:lstStyle/>
           <a:p>
             <a:r>
-              <a:t>Sensitive Data Classification</a:t>
+              <a:t>LLM Capabilities in Lineage</a:t>
             </a:r>
           </a:p>
         </p:txBody>
@@ -16603,22 +16883,22 @@
           <a:lstStyle/>
           <a:p>
             <a:r>
-              <a:t>Public</a:t>
-            </a:r>
-          </a:p>
-          <a:p>
-            <a:r>
-              <a:t>Internal</a:t>
-            </a:r>
-          </a:p>
-          <a:p>
-            <a:r>
-              <a:t>Confidential</a:t>
-            </a:r>
-          </a:p>
-          <a:p>
-            <a:r>
-              <a:t>Restricted</a:t>
+              <a:t>Understand SQL semantics</a:t>
+            </a:r>
+          </a:p>
+          <a:p>
+            <a:r>
+              <a:t>Extract business logic</a:t>
+            </a:r>
+          </a:p>
+          <a:p>
+            <a:r>
+              <a:t>Generate column-level lineage</a:t>
+            </a:r>
+          </a:p>
+          <a:p>
+            <a:r>
+              <a:t>Infer hidden dependencies</a:t>
             </a:r>
           </a:p>
         </p:txBody>
@@ -16650,28 +16930,13 @@
       </p:grpSpPr>
       <p:sp>
         <p:nvSpPr>
-          <p:cNvPr id="2" name="Title 1"/>
-          <p:cNvSpPr>
-            <a:spLocks noGrp="1"/>
-          </p:cNvSpPr>
-          <p:nvPr>
-            <p:ph type="title"/>
-          </p:nvPr>
-        </p:nvSpPr>
-        <p:spPr/>
-        <p:txBody>
-          <a:bodyPr/>
-          <a:lstStyle/>
-          <a:p>
-            <a:r>
-              <a:t>AI-Generated Governance Policies</a:t>
-            </a:r>
-          </a:p>
-        </p:txBody>
-      </p:sp>
-      <p:sp>
-        <p:nvSpPr>
-          <p:cNvPr id="3" name="Content Placeholder 2"/>
+          <p:cNvPr id="3" name="Content Placeholder 2">
+            <a:extLst>
+              <a:ext uri="{FF2B5EF4-FFF2-40B4-BE49-F238E27FC236}">
+                <a16:creationId xmlns:a16="http://schemas.microsoft.com/office/drawing/2014/main" id="{9A8AA81F-17E2-BAB0-8E56-5AB886F52072}"/>
+              </a:ext>
+            </a:extLst>
+          </p:cNvPr>
           <p:cNvSpPr>
             <a:spLocks noGrp="1"/>
           </p:cNvSpPr>
@@ -16679,33 +16944,113 @@
             <p:ph idx="1"/>
           </p:nvPr>
         </p:nvSpPr>
-        <p:spPr/>
+        <p:spPr>
+          <a:xfrm>
+            <a:off x="768096" y="581025"/>
+            <a:ext cx="7290055" cy="5728335"/>
+          </a:xfrm>
+        </p:spPr>
         <p:txBody>
-          <a:bodyPr/>
+          <a:bodyPr>
+            <a:normAutofit fontScale="92500" lnSpcReduction="10000"/>
+          </a:bodyPr>
           <a:lstStyle/>
           <a:p>
             <a:r>
-              <a:t>Generate retention policies</a:t>
-            </a:r>
-          </a:p>
-          <a:p>
-            <a:r>
-              <a:t>Define access controls</a:t>
-            </a:r>
-          </a:p>
-          <a:p>
-            <a:r>
-              <a:t>Create classification rules</a:t>
-            </a:r>
-          </a:p>
-          <a:p>
-            <a:r>
-              <a:t>Draft compliance documents</a:t>
-            </a:r>
+              <a:rPr lang="en-IN" b="1" dirty="0"/>
+              <a:t>How LLMs Help</a:t>
+            </a:r>
+          </a:p>
+          <a:p>
+            <a:r>
+              <a:rPr lang="en-IN" dirty="0"/>
+              <a:t>LLMs understand:</a:t>
+            </a:r>
+          </a:p>
+          <a:p>
+            <a:r>
+              <a:rPr lang="en-IN" dirty="0"/>
+              <a:t>SQL semantics </a:t>
+            </a:r>
+          </a:p>
+          <a:p>
+            <a:r>
+              <a:rPr lang="en-IN" dirty="0"/>
+              <a:t>Business meaning </a:t>
+            </a:r>
+          </a:p>
+          <a:p>
+            <a:r>
+              <a:rPr lang="en-IN" dirty="0"/>
+              <a:t>Transformation logic </a:t>
+            </a:r>
+          </a:p>
+          <a:p>
+            <a:r>
+              <a:rPr lang="en-IN" b="1" dirty="0"/>
+              <a:t>Example</a:t>
+            </a:r>
+          </a:p>
+          <a:p>
+            <a:r>
+              <a:rPr lang="en-IN" dirty="0"/>
+              <a:t>AI can infer:</a:t>
+            </a:r>
+          </a:p>
+          <a:p>
+            <a:r>
+              <a:rPr lang="en-IN" dirty="0"/>
+              <a:t>revenue = quantity * price</a:t>
+            </a:r>
+          </a:p>
+          <a:p>
+            <a:r>
+              <a:rPr lang="en-IN" dirty="0"/>
+              <a:t>Meaning:</a:t>
+            </a:r>
+            <a:br>
+              <a:rPr lang="en-IN" dirty="0"/>
+            </a:br>
+            <a:r>
+              <a:rPr lang="en-IN" dirty="0"/>
+              <a:t>“Revenue calculation logic.”</a:t>
+            </a:r>
+          </a:p>
+          <a:p>
+            <a:r>
+              <a:rPr lang="en-IN" b="1" dirty="0"/>
+              <a:t>Advanced Features</a:t>
+            </a:r>
+          </a:p>
+          <a:p>
+            <a:r>
+              <a:rPr lang="en-IN" dirty="0"/>
+              <a:t>Column-level lineage </a:t>
+            </a:r>
+          </a:p>
+          <a:p>
+            <a:r>
+              <a:rPr lang="en-IN" dirty="0"/>
+              <a:t>Hidden dependency detection </a:t>
+            </a:r>
+          </a:p>
+          <a:p>
+            <a:r>
+              <a:rPr lang="en-IN" dirty="0"/>
+              <a:t>Business rule extraction</a:t>
+            </a:r>
+          </a:p>
+          <a:p>
+            <a:endParaRPr lang="en-IN" dirty="0"/>
           </a:p>
         </p:txBody>
       </p:sp>
     </p:spTree>
+    <p:extLst>
+      <p:ext uri="{BB962C8B-B14F-4D97-AF65-F5344CB8AC3E}">
+        <p14:creationId xmlns:p14="http://schemas.microsoft.com/office/powerpoint/2010/main" val="707288879"/>
+      </p:ext>
+    </p:extLst>
   </p:cSld>
   <p:clrMapOvr>
     <a:masterClrMapping/>
@@ -16746,7 +17091,7 @@
           <a:lstStyle/>
           <a:p>
             <a:r>
-              <a:t>AI-Driven Catalogue Enrichment</a:t>
+              <a:t>Metadata Management</a:t>
             </a:r>
           </a:p>
         </p:txBody>
@@ -16767,22 +17112,22 @@
           <a:lstStyle/>
           <a:p>
             <a:r>
-              <a:t>Generate dataset descriptions</a:t>
-            </a:r>
-          </a:p>
-          <a:p>
-            <a:r>
-              <a:t>Suggest owners</a:t>
-            </a:r>
-          </a:p>
-          <a:p>
-            <a:r>
-              <a:t>Apply SLA recommendations</a:t>
-            </a:r>
-          </a:p>
-          <a:p>
-            <a:r>
-              <a:t>Add metadata tags</a:t>
+              <a:t>Store table descriptions</a:t>
+            </a:r>
+          </a:p>
+          <a:p>
+            <a:r>
+              <a:t>Track dataset ownership</a:t>
+            </a:r>
+          </a:p>
+          <a:p>
+            <a:r>
+              <a:t>Maintain SLA information</a:t>
+            </a:r>
+          </a:p>
+          <a:p>
+            <a:r>
+              <a:t>Apply governance tags</a:t>
             </a:r>
           </a:p>
         </p:txBody>
@@ -16814,28 +17159,13 @@
       </p:grpSpPr>
       <p:sp>
         <p:nvSpPr>
-          <p:cNvPr id="2" name="Title 1"/>
-          <p:cNvSpPr>
-            <a:spLocks noGrp="1"/>
-          </p:cNvSpPr>
-          <p:nvPr>
-            <p:ph type="title"/>
-          </p:nvPr>
-        </p:nvSpPr>
-        <p:spPr/>
-        <p:txBody>
-          <a:bodyPr/>
-          <a:lstStyle/>
-          <a:p>
-            <a:r>
-              <a:t>AI-Generated Dataset Descriptions</a:t>
-            </a:r>
-          </a:p>
-        </p:txBody>
-      </p:sp>
-      <p:sp>
-        <p:nvSpPr>
-          <p:cNvPr id="3" name="Content Placeholder 2"/>
+          <p:cNvPr id="3" name="Content Placeholder 2">
+            <a:extLst>
+              <a:ext uri="{FF2B5EF4-FFF2-40B4-BE49-F238E27FC236}">
+                <a16:creationId xmlns:a16="http://schemas.microsoft.com/office/drawing/2014/main" id="{D4D2479E-6307-8066-61B3-2A7BBF61EE84}"/>
+              </a:ext>
+            </a:extLst>
+          </p:cNvPr>
           <p:cNvSpPr>
             <a:spLocks noGrp="1"/>
           </p:cNvSpPr>
@@ -16843,33 +17173,121 @@
             <p:ph idx="1"/>
           </p:nvPr>
         </p:nvSpPr>
-        <p:spPr/>
+        <p:spPr>
+          <a:xfrm>
+            <a:off x="768096" y="523875"/>
+            <a:ext cx="7290055" cy="5785485"/>
+          </a:xfrm>
+        </p:spPr>
         <p:txBody>
-          <a:bodyPr/>
+          <a:bodyPr>
+            <a:normAutofit/>
+          </a:bodyPr>
           <a:lstStyle/>
           <a:p>
             <a:r>
-              <a:t>Summarize dataset purpose</a:t>
-            </a:r>
-          </a:p>
-          <a:p>
-            <a:r>
-              <a:t>Explain column usage</a:t>
-            </a:r>
-          </a:p>
-          <a:p>
-            <a:r>
-              <a:t>Describe business context</a:t>
-            </a:r>
-          </a:p>
-          <a:p>
-            <a:r>
-              <a:t>Improve searchability</a:t>
-            </a:r>
+              <a:rPr lang="en-IN" b="1" dirty="0"/>
+              <a:t>What is Metadata?</a:t>
+            </a:r>
+          </a:p>
+          <a:p>
+            <a:r>
+              <a:rPr lang="en-IN" dirty="0"/>
+              <a:t>Metadata = “Data about data”</a:t>
+            </a:r>
+          </a:p>
+          <a:p>
+            <a:r>
+              <a:rPr lang="en-IN" dirty="0"/>
+              <a:t>Examples:</a:t>
+            </a:r>
+          </a:p>
+          <a:p>
+            <a:pPr lvl="1"/>
+            <a:r>
+              <a:rPr lang="en-IN" dirty="0"/>
+              <a:t>Table descriptions </a:t>
+            </a:r>
+          </a:p>
+          <a:p>
+            <a:pPr lvl="1"/>
+            <a:r>
+              <a:rPr lang="en-IN" dirty="0"/>
+              <a:t>Column definitions </a:t>
+            </a:r>
+          </a:p>
+          <a:p>
+            <a:pPr lvl="1"/>
+            <a:r>
+              <a:rPr lang="en-IN" dirty="0"/>
+              <a:t>Owners </a:t>
+            </a:r>
+          </a:p>
+          <a:p>
+            <a:pPr lvl="1"/>
+            <a:r>
+              <a:rPr lang="en-IN" dirty="0"/>
+              <a:t>SLAs </a:t>
+            </a:r>
+          </a:p>
+          <a:p>
+            <a:pPr lvl="1"/>
+            <a:r>
+              <a:rPr lang="en-IN" dirty="0"/>
+              <a:t>Tags </a:t>
+            </a:r>
+          </a:p>
+          <a:p>
+            <a:r>
+              <a:rPr lang="en-IN" b="1" dirty="0"/>
+              <a:t>Importance</a:t>
+            </a:r>
+          </a:p>
+          <a:p>
+            <a:r>
+              <a:rPr lang="en-IN" dirty="0"/>
+              <a:t>Helps:</a:t>
+            </a:r>
+          </a:p>
+          <a:p>
+            <a:pPr lvl="1"/>
+            <a:r>
+              <a:rPr lang="en-IN" dirty="0"/>
+              <a:t>Discover datasets </a:t>
+            </a:r>
+          </a:p>
+          <a:p>
+            <a:pPr lvl="1"/>
+            <a:r>
+              <a:rPr lang="en-IN" dirty="0"/>
+              <a:t>Understand usage </a:t>
+            </a:r>
+          </a:p>
+          <a:p>
+            <a:pPr lvl="1"/>
+            <a:r>
+              <a:rPr lang="en-IN" dirty="0"/>
+              <a:t>Improve governance </a:t>
+            </a:r>
+          </a:p>
+          <a:p>
+            <a:pPr lvl="1"/>
+            <a:r>
+              <a:rPr lang="en-IN" dirty="0"/>
+              <a:t>Increase trust</a:t>
+            </a:r>
+          </a:p>
+          <a:p>
+            <a:endParaRPr lang="en-IN" dirty="0"/>
           </a:p>
         </p:txBody>
       </p:sp>
     </p:spTree>
+    <p:extLst>
+      <p:ext uri="{BB962C8B-B14F-4D97-AF65-F5344CB8AC3E}">
+        <p14:creationId xmlns:p14="http://schemas.microsoft.com/office/powerpoint/2010/main" val="1967059073"/>
+      </p:ext>
+    </p:extLst>
   </p:cSld>
   <p:clrMapOvr>
     <a:masterClrMapping/>
@@ -16910,7 +17328,7 @@
           <a:lstStyle/>
           <a:p>
             <a:r>
-              <a:t>Ownership Detection</a:t>
+              <a:t>AI-Powered Metadata Tagging</a:t>
             </a:r>
           </a:p>
         </p:txBody>
@@ -16931,22 +17349,22 @@
           <a:lstStyle/>
           <a:p>
             <a:r>
-              <a:t>Analyze Git history</a:t>
-            </a:r>
-          </a:p>
-          <a:p>
-            <a:r>
-              <a:t>Monitor query logs</a:t>
-            </a:r>
-          </a:p>
-          <a:p>
-            <a:r>
-              <a:t>Track access patterns</a:t>
-            </a:r>
-          </a:p>
-          <a:p>
-            <a:r>
-              <a:t>Infer responsible teams</a:t>
+              <a:t>Generate business tags</a:t>
+            </a:r>
+          </a:p>
+          <a:p>
+            <a:r>
+              <a:t>Apply sensitivity labels</a:t>
+            </a:r>
+          </a:p>
+          <a:p>
+            <a:r>
+              <a:t>Classify datasets automatically</a:t>
+            </a:r>
+          </a:p>
+          <a:p>
+            <a:r>
+              <a:t>Enhance discoverability</a:t>
             </a:r>
           </a:p>
         </p:txBody>
@@ -16978,28 +17396,13 @@
       </p:grpSpPr>
       <p:sp>
         <p:nvSpPr>
-          <p:cNvPr id="2" name="Title 1"/>
-          <p:cNvSpPr>
-            <a:spLocks noGrp="1"/>
-          </p:cNvSpPr>
-          <p:nvPr>
-            <p:ph type="title"/>
-          </p:nvPr>
-        </p:nvSpPr>
-        <p:spPr/>
-        <p:txBody>
-          <a:bodyPr/>
-          <a:lstStyle/>
-          <a:p>
-            <a:r>
-              <a:t>SLA Recommendation Engine</a:t>
-            </a:r>
-          </a:p>
-        </p:txBody>
-      </p:sp>
-      <p:sp>
-        <p:nvSpPr>
-          <p:cNvPr id="3" name="Content Placeholder 2"/>
+          <p:cNvPr id="3" name="Content Placeholder 2">
+            <a:extLst>
+              <a:ext uri="{FF2B5EF4-FFF2-40B4-BE49-F238E27FC236}">
+                <a16:creationId xmlns:a16="http://schemas.microsoft.com/office/drawing/2014/main" id="{8B0446B3-AA5C-5FF5-2420-39D7C7B65BA8}"/>
+              </a:ext>
+            </a:extLst>
+          </p:cNvPr>
           <p:cNvSpPr>
             <a:spLocks noGrp="1"/>
           </p:cNvSpPr>
@@ -17007,33 +17410,140 @@
             <p:ph idx="1"/>
           </p:nvPr>
         </p:nvSpPr>
-        <p:spPr/>
+        <p:spPr>
+          <a:xfrm>
+            <a:off x="768096" y="457200"/>
+            <a:ext cx="7290055" cy="5852160"/>
+          </a:xfrm>
+        </p:spPr>
         <p:txBody>
-          <a:bodyPr/>
+          <a:bodyPr>
+            <a:normAutofit lnSpcReduction="10000"/>
+          </a:bodyPr>
           <a:lstStyle/>
           <a:p>
             <a:r>
-              <a:t>Suggest refresh frequency</a:t>
-            </a:r>
-          </a:p>
-          <a:p>
-            <a:r>
-              <a:t>Recommend availability targets</a:t>
-            </a:r>
-          </a:p>
-          <a:p>
-            <a:r>
-              <a:t>Estimate retention periods</a:t>
-            </a:r>
-          </a:p>
-          <a:p>
-            <a:r>
-              <a:t>Improve governance visibility</a:t>
-            </a:r>
+              <a:rPr lang="en-IN" b="1" dirty="0"/>
+              <a:t>Automatic Classification</a:t>
+            </a:r>
+          </a:p>
+          <a:p>
+            <a:r>
+              <a:rPr lang="en-IN" dirty="0"/>
+              <a:t>AI automatically adds:</a:t>
+            </a:r>
+          </a:p>
+          <a:p>
+            <a:pPr lvl="1"/>
+            <a:r>
+              <a:rPr lang="en-IN" dirty="0"/>
+              <a:t>Business tags </a:t>
+            </a:r>
+          </a:p>
+          <a:p>
+            <a:pPr lvl="1"/>
+            <a:r>
+              <a:rPr lang="en-IN" dirty="0"/>
+              <a:t>Sensitivity labels </a:t>
+            </a:r>
+          </a:p>
+          <a:p>
+            <a:pPr lvl="1"/>
+            <a:r>
+              <a:rPr lang="en-IN" dirty="0"/>
+              <a:t>Domain classifications </a:t>
+            </a:r>
+          </a:p>
+          <a:p>
+            <a:r>
+              <a:rPr lang="en-IN" dirty="0"/>
+              <a:t>Example:</a:t>
+            </a:r>
+            <a:br>
+              <a:rPr lang="en-IN" dirty="0"/>
+            </a:br>
+            <a:r>
+              <a:rPr lang="en-IN" dirty="0"/>
+              <a:t>Column:</a:t>
+            </a:r>
+          </a:p>
+          <a:p>
+            <a:r>
+              <a:rPr lang="en-IN" dirty="0" err="1"/>
+              <a:t>customer_email</a:t>
+            </a:r>
+            <a:endParaRPr lang="en-IN" dirty="0"/>
+          </a:p>
+          <a:p>
+            <a:r>
+              <a:rPr lang="en-IN" dirty="0"/>
+              <a:t>AI Tags:</a:t>
+            </a:r>
+          </a:p>
+          <a:p>
+            <a:pPr lvl="1"/>
+            <a:r>
+              <a:rPr lang="en-IN" dirty="0"/>
+              <a:t>PII </a:t>
+            </a:r>
+          </a:p>
+          <a:p>
+            <a:pPr lvl="1"/>
+            <a:r>
+              <a:rPr lang="en-IN" dirty="0"/>
+              <a:t>Sensitive </a:t>
+            </a:r>
+          </a:p>
+          <a:p>
+            <a:pPr lvl="1"/>
+            <a:r>
+              <a:rPr lang="en-IN" dirty="0"/>
+              <a:t>Customer Data </a:t>
+            </a:r>
+          </a:p>
+          <a:p>
+            <a:r>
+              <a:rPr lang="en-IN" b="1" dirty="0"/>
+              <a:t>Benefits</a:t>
+            </a:r>
+          </a:p>
+          <a:p>
+            <a:r>
+              <a:rPr lang="en-IN" dirty="0"/>
+              <a:t>Faster </a:t>
+            </a:r>
+            <a:r>
+              <a:rPr lang="en-IN" dirty="0" err="1"/>
+              <a:t>cataloging</a:t>
+            </a:r>
+            <a:r>
+              <a:rPr lang="en-IN" dirty="0"/>
+              <a:t> </a:t>
+            </a:r>
+          </a:p>
+          <a:p>
+            <a:r>
+              <a:rPr lang="en-IN" dirty="0"/>
+              <a:t>Better searchability </a:t>
+            </a:r>
+          </a:p>
+          <a:p>
+            <a:r>
+              <a:rPr lang="en-IN" dirty="0"/>
+              <a:t>Reduced manual effort</a:t>
+            </a:r>
+          </a:p>
+          <a:p>
+            <a:endParaRPr lang="en-IN" dirty="0"/>
           </a:p>
         </p:txBody>
       </p:sp>
     </p:spTree>
+    <p:extLst>
+      <p:ext uri="{BB962C8B-B14F-4D97-AF65-F5344CB8AC3E}">
+        <p14:creationId xmlns:p14="http://schemas.microsoft.com/office/powerpoint/2010/main" val="496165058"/>
+      </p:ext>
+    </p:extLst>
   </p:cSld>
   <p:clrMapOvr>
     <a:masterClrMapping/>
@@ -17044,6 +17554,14 @@
 <file path=ppt/slides/slide18.xml><?xml version="1.0" encoding="utf-8"?>
 <p:sld xmlns:a="http://schemas.openxmlformats.org/drawingml/2006/main" xmlns:r="http://schemas.openxmlformats.org/officeDocument/2006/relationships" xmlns:p="http://schemas.openxmlformats.org/presentationml/2006/main">
   <p:cSld>
+    <p:bg>
+      <p:bgPr>
+        <a:solidFill>
+          <a:srgbClr val="1B3A4B"/>
+        </a:solidFill>
+        <a:effectLst/>
+      </p:bgPr>
+    </p:bg>
     <p:spTree>
       <p:nvGrpSpPr>
         <p:cNvPr id="1" name=""/>
@@ -17060,62 +17578,180 @@
       </p:grpSpPr>
       <p:sp>
         <p:nvSpPr>
-          <p:cNvPr id="2" name="Title 1"/>
-          <p:cNvSpPr>
-            <a:spLocks noGrp="1"/>
-          </p:cNvSpPr>
-          <p:nvPr>
-            <p:ph type="title"/>
-          </p:nvPr>
+          <p:cNvPr id="10" name="TopBar"/>
+          <p:cNvSpPr/>
+          <p:nvPr/>
         </p:nvSpPr>
-        <p:spPr/>
+        <p:spPr>
+          <a:xfrm>
+            <a:off x="914400" y="2148840"/>
+            <a:ext cx="7315200" cy="45720"/>
+          </a:xfrm>
+          <a:prstGeom prst="rect">
+            <a:avLst/>
+          </a:prstGeom>
+          <a:solidFill>
+            <a:srgbClr val="1CADE4"/>
+          </a:solidFill>
+          <a:ln>
+            <a:noFill/>
+          </a:ln>
+        </p:spPr>
         <p:txBody>
           <a:bodyPr/>
           <a:lstStyle/>
           <a:p>
-            <a:r>
-              <a:t>Regulatory Compliance</a:t>
-            </a:r>
+            <a:endParaRPr lang="en-IN"/>
           </a:p>
         </p:txBody>
       </p:sp>
       <p:sp>
         <p:nvSpPr>
-          <p:cNvPr id="3" name="Content Placeholder 2"/>
-          <p:cNvSpPr>
-            <a:spLocks noGrp="1"/>
-          </p:cNvSpPr>
-          <p:nvPr>
-            <p:ph idx="1"/>
-          </p:nvPr>
+          <p:cNvPr id="11" name="LabTag"/>
+          <p:cNvSpPr/>
+          <p:nvPr/>
         </p:nvSpPr>
-        <p:spPr/>
+        <p:spPr>
+          <a:xfrm>
+            <a:off x="3657600" y="2377440"/>
+            <a:ext cx="1828800" cy="548640"/>
+          </a:xfrm>
+          <a:prstGeom prst="roundRect">
+            <a:avLst>
+              <a:gd name="adj" fmla="val 16667"/>
+            </a:avLst>
+          </a:prstGeom>
+          <a:solidFill>
+            <a:srgbClr val="1CADE4"/>
+          </a:solidFill>
+          <a:ln>
+            <a:noFill/>
+          </a:ln>
+        </p:spPr>
+        <p:txBody>
+          <a:bodyPr wrap="square" lIns="0" tIns="0" rIns="0" bIns="0" anchor="ctr"/>
+          <a:lstStyle/>
+          <a:p>
+            <a:pPr algn="ctr"/>
+            <a:r>
+              <a:rPr lang="en-US" sz="2000" b="1" spc="400">
+                <a:solidFill>
+                  <a:srgbClr val="FFFFFF"/>
+                </a:solidFill>
+                <a:latin typeface="Trebuchet MS"/>
+              </a:rPr>
+              <a:t>LAB 3</a:t>
+            </a:r>
+          </a:p>
+        </p:txBody>
+      </p:sp>
+      <p:sp>
+        <p:nvSpPr>
+          <p:cNvPr id="12" name="MainTitle"/>
+          <p:cNvSpPr/>
+          <p:nvPr/>
+        </p:nvSpPr>
+        <p:spPr>
+          <a:xfrm>
+            <a:off x="914400" y="3148965"/>
+            <a:ext cx="7315200" cy="914400"/>
+          </a:xfrm>
+          <a:prstGeom prst="rect">
+            <a:avLst/>
+          </a:prstGeom>
+          <a:noFill/>
+          <a:ln>
+            <a:noFill/>
+          </a:ln>
+        </p:spPr>
+        <p:txBody>
+          <a:bodyPr wrap="square" lIns="0" tIns="0" rIns="0" bIns="0" anchor="ctr"/>
+          <a:lstStyle/>
+          <a:p>
+            <a:pPr algn="ctr"/>
+            <a:r>
+              <a:rPr lang="en-US" sz="4400" b="1">
+                <a:solidFill>
+                  <a:srgbClr val="FFFFFF"/>
+                </a:solidFill>
+                <a:latin typeface="Trebuchet MS"/>
+              </a:rPr>
+              <a:t>Hands-On Activity</a:t>
+            </a:r>
+          </a:p>
+        </p:txBody>
+      </p:sp>
+      <p:sp>
+        <p:nvSpPr>
+          <p:cNvPr id="13" name="Subtitle"/>
+          <p:cNvSpPr/>
+          <p:nvPr/>
+        </p:nvSpPr>
+        <p:spPr>
+          <a:xfrm>
+            <a:off x="1828800" y="4130040"/>
+            <a:ext cx="5486400" cy="548640"/>
+          </a:xfrm>
+          <a:prstGeom prst="rect">
+            <a:avLst/>
+          </a:prstGeom>
+          <a:noFill/>
+          <a:ln>
+            <a:noFill/>
+          </a:ln>
+        </p:spPr>
+        <p:txBody>
+          <a:bodyPr wrap="square" lIns="0" tIns="0" rIns="0" bIns="0" anchor="t"/>
+          <a:lstStyle/>
+          <a:p>
+            <a:pPr algn="ctr"/>
+            <a:r>
+              <a:rPr lang="en-US" sz="1800">
+                <a:solidFill>
+                  <a:srgbClr val="8BB8D0"/>
+                </a:solidFill>
+                <a:latin typeface="Calibri"/>
+              </a:rPr>
+              <a:t>AI-Powered Metadata Tagging</a:t>
+            </a:r>
+          </a:p>
+        </p:txBody>
+      </p:sp>
+      <p:sp>
+        <p:nvSpPr>
+          <p:cNvPr id="14" name="BottomBar"/>
+          <p:cNvSpPr/>
+          <p:nvPr/>
+        </p:nvSpPr>
+        <p:spPr>
+          <a:xfrm>
+            <a:off x="914400" y="4892040"/>
+            <a:ext cx="7315200" cy="45720"/>
+          </a:xfrm>
+          <a:prstGeom prst="rect">
+            <a:avLst/>
+          </a:prstGeom>
+          <a:solidFill>
+            <a:srgbClr val="1CADE4"/>
+          </a:solidFill>
+          <a:ln>
+            <a:noFill/>
+          </a:ln>
+        </p:spPr>
         <p:txBody>
           <a:bodyPr/>
           <a:lstStyle/>
           <a:p>
-            <a:r>
-              <a:t>GDPR</a:t>
-            </a:r>
-          </a:p>
-          <a:p>
-            <a:r>
-              <a:t>HIPAA</a:t>
-            </a:r>
-          </a:p>
-          <a:p>
-            <a:r>
-              <a:t>SOC2</a:t>
-            </a:r>
-          </a:p>
-          <a:p>
-            <a:r>
-              <a:t>PCI DSS</a:t>
-            </a:r>
+            <a:endParaRPr lang="en-IN"/>
           </a:p>
         </p:txBody>
       </p:sp>
     </p:spTree>
+    <p:extLst>
+      <p:ext uri="{BB962C8B-B14F-4D97-AF65-F5344CB8AC3E}">
+        <p14:creationId xmlns:p14="http://schemas.microsoft.com/office/powerpoint/2010/main" val="1560402617"/>
+      </p:ext>
+    </p:extLst>
   </p:cSld>
   <p:clrMapOvr>
     <a:masterClrMapping/>
@@ -17156,7 +17792,7 @@
           <a:lstStyle/>
           <a:p>
             <a:r>
-              <a:t>GDPR with AI</a:t>
+              <a:t>Business Glossary Generation</a:t>
             </a:r>
           </a:p>
         </p:txBody>
@@ -17177,22 +17813,22 @@
           <a:lstStyle/>
           <a:p>
             <a:r>
-              <a:t>Detect personal data</a:t>
-            </a:r>
-          </a:p>
-          <a:p>
-            <a:r>
-              <a:t>Monitor retention compliance</a:t>
-            </a:r>
-          </a:p>
-          <a:p>
-            <a:r>
-              <a:t>Enable right-to-delete workflows</a:t>
-            </a:r>
-          </a:p>
-          <a:p>
-            <a:r>
-              <a:t>Generate compliance reports</a:t>
+              <a:t>Generate business definitions</a:t>
+            </a:r>
+          </a:p>
+          <a:p>
+            <a:r>
+              <a:t>Standardize terminology</a:t>
+            </a:r>
+          </a:p>
+          <a:p>
+            <a:r>
+              <a:t>Improve governance consistency</a:t>
+            </a:r>
+          </a:p>
+          <a:p>
+            <a:r>
+              <a:t>Automate glossary updates</a:t>
             </a:r>
           </a:p>
         </p:txBody>
@@ -17311,28 +17947,13 @@
       </p:grpSpPr>
       <p:sp>
         <p:nvSpPr>
-          <p:cNvPr id="2" name="Title 1"/>
-          <p:cNvSpPr>
-            <a:spLocks noGrp="1"/>
-          </p:cNvSpPr>
-          <p:nvPr>
-            <p:ph type="title"/>
-          </p:nvPr>
-        </p:nvSpPr>
-        <p:spPr/>
-        <p:txBody>
-          <a:bodyPr/>
-          <a:lstStyle/>
-          <a:p>
-            <a:r>
-              <a:t>HIPAA Compliance</a:t>
-            </a:r>
-          </a:p>
-        </p:txBody>
-      </p:sp>
-      <p:sp>
-        <p:nvSpPr>
-          <p:cNvPr id="3" name="Content Placeholder 2"/>
+          <p:cNvPr id="3" name="Content Placeholder 2">
+            <a:extLst>
+              <a:ext uri="{FF2B5EF4-FFF2-40B4-BE49-F238E27FC236}">
+                <a16:creationId xmlns:a16="http://schemas.microsoft.com/office/drawing/2014/main" id="{365D2890-8220-353B-165D-F6ABDF75E6DC}"/>
+              </a:ext>
+            </a:extLst>
+          </p:cNvPr>
           <p:cNvSpPr>
             <a:spLocks noGrp="1"/>
           </p:cNvSpPr>
@@ -17340,33 +17961,358 @@
             <p:ph idx="1"/>
           </p:nvPr>
         </p:nvSpPr>
-        <p:spPr/>
+        <p:spPr>
+          <a:xfrm>
+            <a:off x="768096" y="619125"/>
+            <a:ext cx="7290055" cy="5690235"/>
+          </a:xfrm>
+        </p:spPr>
         <p:txBody>
-          <a:bodyPr/>
+          <a:bodyPr>
+            <a:normAutofit/>
+          </a:bodyPr>
           <a:lstStyle/>
           <a:p>
             <a:r>
-              <a:t>Protect healthcare information</a:t>
-            </a:r>
-          </a:p>
-          <a:p>
-            <a:r>
-              <a:t>Detect PHI automatically</a:t>
-            </a:r>
-          </a:p>
-          <a:p>
-            <a:r>
-              <a:t>Monitor healthcare access</a:t>
-            </a:r>
-          </a:p>
-          <a:p>
-            <a:r>
-              <a:t>Generate audit trails</a:t>
-            </a:r>
+              <a:rPr lang="en-US" b="1" dirty="0"/>
+              <a:t>Business Glossary</a:t>
+            </a:r>
+          </a:p>
+          <a:p>
+            <a:r>
+              <a:rPr lang="en-US" dirty="0"/>
+              <a:t>A glossary standardizes business terms.</a:t>
+            </a:r>
+          </a:p>
+          <a:p>
+            <a:r>
+              <a:rPr lang="en-US" dirty="0"/>
+              <a:t>Example:</a:t>
+            </a:r>
+          </a:p>
+          <a:p>
+            <a:endParaRPr lang="en-US" dirty="0"/>
+          </a:p>
+          <a:p>
+            <a:endParaRPr lang="en-US" dirty="0"/>
+          </a:p>
+          <a:p>
+            <a:endParaRPr lang="en-US" dirty="0"/>
+          </a:p>
+          <a:p>
+            <a:endParaRPr lang="en-US" dirty="0"/>
+          </a:p>
+          <a:p>
+            <a:r>
+              <a:rPr lang="en-IN" b="1" dirty="0"/>
+              <a:t>AI Contribution</a:t>
+            </a:r>
+          </a:p>
+          <a:p>
+            <a:r>
+              <a:rPr lang="en-IN" dirty="0"/>
+              <a:t>LLMs generate:</a:t>
+            </a:r>
+          </a:p>
+          <a:p>
+            <a:pPr lvl="1"/>
+            <a:r>
+              <a:rPr lang="en-IN" dirty="0"/>
+              <a:t>Definitions </a:t>
+            </a:r>
+          </a:p>
+          <a:p>
+            <a:pPr lvl="1"/>
+            <a:r>
+              <a:rPr lang="en-IN" dirty="0"/>
+              <a:t>Descriptions </a:t>
+            </a:r>
+          </a:p>
+          <a:p>
+            <a:pPr lvl="1"/>
+            <a:r>
+              <a:rPr lang="en-IN" dirty="0"/>
+              <a:t>Synonyms </a:t>
+            </a:r>
+          </a:p>
+          <a:p>
+            <a:pPr lvl="1"/>
+            <a:r>
+              <a:rPr lang="en-IN" dirty="0"/>
+              <a:t>Business context</a:t>
+            </a:r>
+          </a:p>
+          <a:p>
+            <a:pPr marL="0" indent="0">
+              <a:buNone/>
+            </a:pPr>
+            <a:endParaRPr lang="en-US" dirty="0"/>
+          </a:p>
+          <a:p>
+            <a:endParaRPr lang="en-US" dirty="0"/>
+          </a:p>
+          <a:p>
+            <a:endParaRPr lang="en-IN" dirty="0"/>
           </a:p>
         </p:txBody>
       </p:sp>
+      <p:graphicFrame>
+        <p:nvGraphicFramePr>
+          <p:cNvPr id="6" name="Table 5">
+            <a:extLst>
+              <a:ext uri="{FF2B5EF4-FFF2-40B4-BE49-F238E27FC236}">
+                <a16:creationId xmlns:a16="http://schemas.microsoft.com/office/drawing/2014/main" id="{9E3BE948-2CC4-5D41-43D6-4C1961D639BC}"/>
+              </a:ext>
+            </a:extLst>
+          </p:cNvPr>
+          <p:cNvGraphicFramePr>
+            <a:graphicFrameLocks noGrp="1"/>
+          </p:cNvGraphicFramePr>
+          <p:nvPr>
+            <p:extLst>
+              <p:ext uri="{D42A27DB-BD31-4B8C-83A1-F6EECF244321}">
+                <p14:modId xmlns:p14="http://schemas.microsoft.com/office/powerpoint/2010/main" val="3401524744"/>
+              </p:ext>
+            </p:extLst>
+          </p:nvPr>
+        </p:nvGraphicFramePr>
+        <p:xfrm>
+          <a:off x="927100" y="2196338"/>
+          <a:ext cx="7289800" cy="1232661"/>
+        </p:xfrm>
+        <a:graphic>
+          <a:graphicData uri="http://schemas.openxmlformats.org/drawingml/2006/table">
+            <a:tbl>
+              <a:tblPr firstRow="1" firstCol="1" bandRow="1">
+                <a:tableStyleId>{5C22544A-7EE6-4342-B048-85BDC9FD1C3A}</a:tableStyleId>
+              </a:tblPr>
+              <a:tblGrid>
+                <a:gridCol w="3644900">
+                  <a:extLst>
+                    <a:ext uri="{9D8B030D-6E8A-4147-A177-3AD203B41FA5}">
+                      <a16:colId xmlns:a16="http://schemas.microsoft.com/office/drawing/2014/main" val="3302703851"/>
+                    </a:ext>
+                  </a:extLst>
+                </a:gridCol>
+                <a:gridCol w="3644900">
+                  <a:extLst>
+                    <a:ext uri="{9D8B030D-6E8A-4147-A177-3AD203B41FA5}">
+                      <a16:colId xmlns:a16="http://schemas.microsoft.com/office/drawing/2014/main" val="4227985743"/>
+                    </a:ext>
+                  </a:extLst>
+                </a:gridCol>
+              </a:tblGrid>
+              <a:tr h="410887">
+                <a:tc>
+                  <a:txBody>
+                    <a:bodyPr/>
+                    <a:lstStyle/>
+                    <a:p>
+                      <a:pPr>
+                        <a:lnSpc>
+                          <a:spcPct val="115000"/>
+                        </a:lnSpc>
+                        <a:spcAft>
+                          <a:spcPts val="1000"/>
+                        </a:spcAft>
+                        <a:buNone/>
+                      </a:pPr>
+                      <a:r>
+                        <a:rPr lang="en-IN" sz="1100">
+                          <a:effectLst/>
+                        </a:rPr>
+                        <a:t>Term</a:t>
+                      </a:r>
+                      <a:endParaRPr lang="en-IN" sz="1100">
+                        <a:effectLst/>
+                        <a:latin typeface="Calibri" panose="020F0502020204030204" pitchFamily="34" charset="0"/>
+                        <a:ea typeface="Calibri" panose="020F0502020204030204" pitchFamily="34" charset="0"/>
+                        <a:cs typeface="Times New Roman" panose="02020603050405020304" pitchFamily="18" charset="0"/>
+                      </a:endParaRPr>
+                    </a:p>
+                  </a:txBody>
+                  <a:tcPr marL="9525" marR="9525" marT="9525" marB="9525" anchor="ctr"/>
+                </a:tc>
+                <a:tc>
+                  <a:txBody>
+                    <a:bodyPr/>
+                    <a:lstStyle/>
+                    <a:p>
+                      <a:pPr>
+                        <a:lnSpc>
+                          <a:spcPct val="115000"/>
+                        </a:lnSpc>
+                        <a:spcAft>
+                          <a:spcPts val="1000"/>
+                        </a:spcAft>
+                        <a:buNone/>
+                      </a:pPr>
+                      <a:r>
+                        <a:rPr lang="en-IN" sz="1100">
+                          <a:effectLst/>
+                        </a:rPr>
+                        <a:t>Definition</a:t>
+                      </a:r>
+                      <a:endParaRPr lang="en-IN" sz="1100">
+                        <a:effectLst/>
+                        <a:latin typeface="Calibri" panose="020F0502020204030204" pitchFamily="34" charset="0"/>
+                        <a:ea typeface="Calibri" panose="020F0502020204030204" pitchFamily="34" charset="0"/>
+                        <a:cs typeface="Times New Roman" panose="02020603050405020304" pitchFamily="18" charset="0"/>
+                      </a:endParaRPr>
+                    </a:p>
+                  </a:txBody>
+                  <a:tcPr marL="9525" marR="9525" marT="9525" marB="9525" anchor="ctr"/>
+                </a:tc>
+                <a:extLst>
+                  <a:ext uri="{0D108BD9-81ED-4DB2-BD59-A6C34878D82A}">
+                    <a16:rowId xmlns:a16="http://schemas.microsoft.com/office/drawing/2014/main" val="1349637414"/>
+                  </a:ext>
+                </a:extLst>
+              </a:tr>
+              <a:tr h="410887">
+                <a:tc>
+                  <a:txBody>
+                    <a:bodyPr/>
+                    <a:lstStyle/>
+                    <a:p>
+                      <a:pPr>
+                        <a:lnSpc>
+                          <a:spcPct val="115000"/>
+                        </a:lnSpc>
+                        <a:spcAft>
+                          <a:spcPts val="1000"/>
+                        </a:spcAft>
+                        <a:buNone/>
+                      </a:pPr>
+                      <a:r>
+                        <a:rPr lang="en-IN" sz="1100">
+                          <a:effectLst/>
+                        </a:rPr>
+                        <a:t>ARR</a:t>
+                      </a:r>
+                      <a:endParaRPr lang="en-IN" sz="1100">
+                        <a:effectLst/>
+                        <a:latin typeface="Calibri" panose="020F0502020204030204" pitchFamily="34" charset="0"/>
+                        <a:ea typeface="Calibri" panose="020F0502020204030204" pitchFamily="34" charset="0"/>
+                        <a:cs typeface="Times New Roman" panose="02020603050405020304" pitchFamily="18" charset="0"/>
+                      </a:endParaRPr>
+                    </a:p>
+                  </a:txBody>
+                  <a:tcPr marL="9525" marR="9525" marT="9525" marB="9525" anchor="ctr"/>
+                </a:tc>
+                <a:tc>
+                  <a:txBody>
+                    <a:bodyPr/>
+                    <a:lstStyle/>
+                    <a:p>
+                      <a:pPr>
+                        <a:lnSpc>
+                          <a:spcPct val="115000"/>
+                        </a:lnSpc>
+                        <a:spcAft>
+                          <a:spcPts val="1000"/>
+                        </a:spcAft>
+                        <a:buNone/>
+                      </a:pPr>
+                      <a:r>
+                        <a:rPr lang="en-IN" sz="1100">
+                          <a:effectLst/>
+                        </a:rPr>
+                        <a:t>Annual Recurring Revenue</a:t>
+                      </a:r>
+                      <a:endParaRPr lang="en-IN" sz="1100">
+                        <a:effectLst/>
+                        <a:latin typeface="Calibri" panose="020F0502020204030204" pitchFamily="34" charset="0"/>
+                        <a:ea typeface="Calibri" panose="020F0502020204030204" pitchFamily="34" charset="0"/>
+                        <a:cs typeface="Times New Roman" panose="02020603050405020304" pitchFamily="18" charset="0"/>
+                      </a:endParaRPr>
+                    </a:p>
+                  </a:txBody>
+                  <a:tcPr marL="9525" marR="9525" marT="9525" marB="9525" anchor="ctr"/>
+                </a:tc>
+                <a:extLst>
+                  <a:ext uri="{0D108BD9-81ED-4DB2-BD59-A6C34878D82A}">
+                    <a16:rowId xmlns:a16="http://schemas.microsoft.com/office/drawing/2014/main" val="2943564093"/>
+                  </a:ext>
+                </a:extLst>
+              </a:tr>
+              <a:tr h="410887">
+                <a:tc>
+                  <a:txBody>
+                    <a:bodyPr/>
+                    <a:lstStyle/>
+                    <a:p>
+                      <a:pPr>
+                        <a:lnSpc>
+                          <a:spcPct val="115000"/>
+                        </a:lnSpc>
+                        <a:spcAft>
+                          <a:spcPts val="1000"/>
+                        </a:spcAft>
+                        <a:buNone/>
+                      </a:pPr>
+                      <a:r>
+                        <a:rPr lang="en-IN" sz="1100">
+                          <a:effectLst/>
+                        </a:rPr>
+                        <a:t>Active Customer</a:t>
+                      </a:r>
+                      <a:endParaRPr lang="en-IN" sz="1100">
+                        <a:effectLst/>
+                        <a:latin typeface="Calibri" panose="020F0502020204030204" pitchFamily="34" charset="0"/>
+                        <a:ea typeface="Calibri" panose="020F0502020204030204" pitchFamily="34" charset="0"/>
+                        <a:cs typeface="Times New Roman" panose="02020603050405020304" pitchFamily="18" charset="0"/>
+                      </a:endParaRPr>
+                    </a:p>
+                  </a:txBody>
+                  <a:tcPr marL="9525" marR="9525" marT="9525" marB="9525" anchor="ctr"/>
+                </a:tc>
+                <a:tc>
+                  <a:txBody>
+                    <a:bodyPr/>
+                    <a:lstStyle/>
+                    <a:p>
+                      <a:pPr>
+                        <a:lnSpc>
+                          <a:spcPct val="115000"/>
+                        </a:lnSpc>
+                        <a:spcAft>
+                          <a:spcPts val="1000"/>
+                        </a:spcAft>
+                        <a:buNone/>
+                      </a:pPr>
+                      <a:r>
+                        <a:rPr lang="en-IN" sz="1100" dirty="0">
+                          <a:effectLst/>
+                        </a:rPr>
+                        <a:t>Customer active in last 30 days</a:t>
+                      </a:r>
+                      <a:endParaRPr lang="en-IN" sz="1100" dirty="0">
+                        <a:effectLst/>
+                        <a:latin typeface="Calibri" panose="020F0502020204030204" pitchFamily="34" charset="0"/>
+                        <a:ea typeface="Calibri" panose="020F0502020204030204" pitchFamily="34" charset="0"/>
+                        <a:cs typeface="Times New Roman" panose="02020603050405020304" pitchFamily="18" charset="0"/>
+                      </a:endParaRPr>
+                    </a:p>
+                  </a:txBody>
+                  <a:tcPr marL="9525" marR="9525" marT="9525" marB="9525" anchor="ctr"/>
+                </a:tc>
+                <a:extLst>
+                  <a:ext uri="{0D108BD9-81ED-4DB2-BD59-A6C34878D82A}">
+                    <a16:rowId xmlns:a16="http://schemas.microsoft.com/office/drawing/2014/main" val="3525004177"/>
+                  </a:ext>
+                </a:extLst>
+              </a:tr>
+            </a:tbl>
+          </a:graphicData>
+        </a:graphic>
+      </p:graphicFrame>
     </p:spTree>
+    <p:extLst>
+      <p:ext uri="{BB962C8B-B14F-4D97-AF65-F5344CB8AC3E}">
+        <p14:creationId xmlns:p14="http://schemas.microsoft.com/office/powerpoint/2010/main" val="1232657890"/>
+      </p:ext>
+    </p:extLst>
   </p:cSld>
   <p:clrMapOvr>
     <a:masterClrMapping/>
@@ -17377,6 +18323,14 @@
 <file path=ppt/slides/slide21.xml><?xml version="1.0" encoding="utf-8"?>
 <p:sld xmlns:a="http://schemas.openxmlformats.org/drawingml/2006/main" xmlns:r="http://schemas.openxmlformats.org/officeDocument/2006/relationships" xmlns:p="http://schemas.openxmlformats.org/presentationml/2006/main">
   <p:cSld>
+    <p:bg>
+      <p:bgPr>
+        <a:solidFill>
+          <a:srgbClr val="1B3A4B"/>
+        </a:solidFill>
+        <a:effectLst/>
+      </p:bgPr>
+    </p:bg>
     <p:spTree>
       <p:nvGrpSpPr>
         <p:cNvPr id="1" name=""/>
@@ -17393,62 +18347,180 @@
       </p:grpSpPr>
       <p:sp>
         <p:nvSpPr>
-          <p:cNvPr id="2" name="Title 1"/>
-          <p:cNvSpPr>
-            <a:spLocks noGrp="1"/>
-          </p:cNvSpPr>
-          <p:nvPr>
-            <p:ph type="title"/>
-          </p:nvPr>
+          <p:cNvPr id="10" name="TopBar"/>
+          <p:cNvSpPr/>
+          <p:nvPr/>
         </p:nvSpPr>
-        <p:spPr/>
+        <p:spPr>
+          <a:xfrm>
+            <a:off x="914400" y="2148840"/>
+            <a:ext cx="7315200" cy="45720"/>
+          </a:xfrm>
+          <a:prstGeom prst="rect">
+            <a:avLst/>
+          </a:prstGeom>
+          <a:solidFill>
+            <a:srgbClr val="1CADE4"/>
+          </a:solidFill>
+          <a:ln>
+            <a:noFill/>
+          </a:ln>
+        </p:spPr>
         <p:txBody>
           <a:bodyPr/>
           <a:lstStyle/>
           <a:p>
-            <a:r>
-              <a:t>SOC2 Compliance</a:t>
-            </a:r>
+            <a:endParaRPr lang="en-IN"/>
           </a:p>
         </p:txBody>
       </p:sp>
       <p:sp>
         <p:nvSpPr>
-          <p:cNvPr id="3" name="Content Placeholder 2"/>
-          <p:cNvSpPr>
-            <a:spLocks noGrp="1"/>
-          </p:cNvSpPr>
-          <p:nvPr>
-            <p:ph idx="1"/>
-          </p:nvPr>
+          <p:cNvPr id="11" name="LabTag"/>
+          <p:cNvSpPr/>
+          <p:nvPr/>
         </p:nvSpPr>
-        <p:spPr/>
+        <p:spPr>
+          <a:xfrm>
+            <a:off x="3657600" y="2377440"/>
+            <a:ext cx="1828800" cy="548640"/>
+          </a:xfrm>
+          <a:prstGeom prst="roundRect">
+            <a:avLst>
+              <a:gd name="adj" fmla="val 16667"/>
+            </a:avLst>
+          </a:prstGeom>
+          <a:solidFill>
+            <a:srgbClr val="1CADE4"/>
+          </a:solidFill>
+          <a:ln>
+            <a:noFill/>
+          </a:ln>
+        </p:spPr>
+        <p:txBody>
+          <a:bodyPr wrap="square" lIns="0" tIns="0" rIns="0" bIns="0" anchor="ctr"/>
+          <a:lstStyle/>
+          <a:p>
+            <a:pPr algn="ctr"/>
+            <a:r>
+              <a:rPr lang="en-US" sz="2000" b="1" spc="400">
+                <a:solidFill>
+                  <a:srgbClr val="FFFFFF"/>
+                </a:solidFill>
+                <a:latin typeface="Trebuchet MS"/>
+              </a:rPr>
+              <a:t>LAB 4</a:t>
+            </a:r>
+          </a:p>
+        </p:txBody>
+      </p:sp>
+      <p:sp>
+        <p:nvSpPr>
+          <p:cNvPr id="12" name="MainTitle"/>
+          <p:cNvSpPr/>
+          <p:nvPr/>
+        </p:nvSpPr>
+        <p:spPr>
+          <a:xfrm>
+            <a:off x="914400" y="3148965"/>
+            <a:ext cx="7315200" cy="914400"/>
+          </a:xfrm>
+          <a:prstGeom prst="rect">
+            <a:avLst/>
+          </a:prstGeom>
+          <a:noFill/>
+          <a:ln>
+            <a:noFill/>
+          </a:ln>
+        </p:spPr>
+        <p:txBody>
+          <a:bodyPr wrap="square" lIns="0" tIns="0" rIns="0" bIns="0" anchor="ctr"/>
+          <a:lstStyle/>
+          <a:p>
+            <a:pPr algn="ctr"/>
+            <a:r>
+              <a:rPr lang="en-US" sz="4400" b="1">
+                <a:solidFill>
+                  <a:srgbClr val="FFFFFF"/>
+                </a:solidFill>
+                <a:latin typeface="Trebuchet MS"/>
+              </a:rPr>
+              <a:t>Hands-On Activity</a:t>
+            </a:r>
+          </a:p>
+        </p:txBody>
+      </p:sp>
+      <p:sp>
+        <p:nvSpPr>
+          <p:cNvPr id="13" name="Subtitle"/>
+          <p:cNvSpPr/>
+          <p:nvPr/>
+        </p:nvSpPr>
+        <p:spPr>
+          <a:xfrm>
+            <a:off x="1828800" y="4130040"/>
+            <a:ext cx="5486400" cy="548640"/>
+          </a:xfrm>
+          <a:prstGeom prst="rect">
+            <a:avLst/>
+          </a:prstGeom>
+          <a:noFill/>
+          <a:ln>
+            <a:noFill/>
+          </a:ln>
+        </p:spPr>
+        <p:txBody>
+          <a:bodyPr wrap="square" lIns="0" tIns="0" rIns="0" bIns="0" anchor="t"/>
+          <a:lstStyle/>
+          <a:p>
+            <a:pPr algn="ctr"/>
+            <a:r>
+              <a:rPr lang="en-US" sz="1800">
+                <a:solidFill>
+                  <a:srgbClr val="8BB8D0"/>
+                </a:solidFill>
+                <a:latin typeface="Calibri"/>
+              </a:rPr>
+              <a:t>Business Glossary Generation</a:t>
+            </a:r>
+          </a:p>
+        </p:txBody>
+      </p:sp>
+      <p:sp>
+        <p:nvSpPr>
+          <p:cNvPr id="14" name="BottomBar"/>
+          <p:cNvSpPr/>
+          <p:nvPr/>
+        </p:nvSpPr>
+        <p:spPr>
+          <a:xfrm>
+            <a:off x="914400" y="4892040"/>
+            <a:ext cx="7315200" cy="45720"/>
+          </a:xfrm>
+          <a:prstGeom prst="rect">
+            <a:avLst/>
+          </a:prstGeom>
+          <a:solidFill>
+            <a:srgbClr val="1CADE4"/>
+          </a:solidFill>
+          <a:ln>
+            <a:noFill/>
+          </a:ln>
+        </p:spPr>
         <p:txBody>
           <a:bodyPr/>
           <a:lstStyle/>
           <a:p>
-            <a:r>
-              <a:t>Ensure confidentiality</a:t>
-            </a:r>
-          </a:p>
-          <a:p>
-            <a:r>
-              <a:t>Monitor system security</a:t>
-            </a:r>
-          </a:p>
-          <a:p>
-            <a:r>
-              <a:t>Track integrity controls</a:t>
-            </a:r>
-          </a:p>
-          <a:p>
-            <a:r>
-              <a:t>Support audit readiness</a:t>
-            </a:r>
+            <a:endParaRPr lang="en-IN"/>
           </a:p>
         </p:txBody>
       </p:sp>
     </p:spTree>
+    <p:extLst>
+      <p:ext uri="{BB962C8B-B14F-4D97-AF65-F5344CB8AC3E}">
+        <p14:creationId xmlns:p14="http://schemas.microsoft.com/office/powerpoint/2010/main" val="2648177632"/>
+      </p:ext>
+    </p:extLst>
   </p:cSld>
   <p:clrMapOvr>
     <a:masterClrMapping/>
@@ -17489,7 +18561,7 @@
           <a:lstStyle/>
           <a:p>
             <a:r>
-              <a:t>AI-Assisted Compliance Monitoring</a:t>
+              <a:t>PII and Sensitive Data Discovery</a:t>
             </a:r>
           </a:p>
         </p:txBody>
@@ -17510,22 +18582,22 @@
           <a:lstStyle/>
           <a:p>
             <a:r>
-              <a:t>Detect policy violations</a:t>
-            </a:r>
-          </a:p>
-          <a:p>
-            <a:r>
-              <a:t>Identify unauthorized access</a:t>
-            </a:r>
-          </a:p>
-          <a:p>
-            <a:r>
-              <a:t>Monitor encryption coverage</a:t>
-            </a:r>
-          </a:p>
-          <a:p>
-            <a:r>
-              <a:t>Generate compliance alerts</a:t>
+              <a:t>Detect personal data</a:t>
+            </a:r>
+          </a:p>
+          <a:p>
+            <a:r>
+              <a:t>Classify sensitive records</a:t>
+            </a:r>
+          </a:p>
+          <a:p>
+            <a:r>
+              <a:t>Monitor confidential information</a:t>
+            </a:r>
+          </a:p>
+          <a:p>
+            <a:r>
+              <a:t>Apply governance policies</a:t>
             </a:r>
           </a:p>
         </p:txBody>
@@ -17557,28 +18629,13 @@
       </p:grpSpPr>
       <p:sp>
         <p:nvSpPr>
-          <p:cNvPr id="2" name="Title 1"/>
-          <p:cNvSpPr>
-            <a:spLocks noGrp="1"/>
-          </p:cNvSpPr>
-          <p:nvPr>
-            <p:ph type="title"/>
-          </p:nvPr>
-        </p:nvSpPr>
-        <p:spPr/>
-        <p:txBody>
-          <a:bodyPr/>
-          <a:lstStyle/>
-          <a:p>
-            <a:r>
-              <a:t>Governance Platforms</a:t>
-            </a:r>
-          </a:p>
-        </p:txBody>
-      </p:sp>
-      <p:sp>
-        <p:nvSpPr>
-          <p:cNvPr id="3" name="Content Placeholder 2"/>
+          <p:cNvPr id="3" name="Content Placeholder 2">
+            <a:extLst>
+              <a:ext uri="{FF2B5EF4-FFF2-40B4-BE49-F238E27FC236}">
+                <a16:creationId xmlns:a16="http://schemas.microsoft.com/office/drawing/2014/main" id="{245DF398-29B9-C959-7BB2-BDFE7118837F}"/>
+              </a:ext>
+            </a:extLst>
+          </p:cNvPr>
           <p:cNvSpPr>
             <a:spLocks noGrp="1"/>
           </p:cNvSpPr>
@@ -17586,33 +18643,102 @@
             <p:ph idx="1"/>
           </p:nvPr>
         </p:nvSpPr>
-        <p:spPr/>
+        <p:spPr>
+          <a:xfrm>
+            <a:off x="768096" y="923925"/>
+            <a:ext cx="7290055" cy="5385435"/>
+          </a:xfrm>
+        </p:spPr>
         <p:txBody>
-          <a:bodyPr/>
+          <a:bodyPr>
+            <a:normAutofit/>
+          </a:bodyPr>
           <a:lstStyle/>
           <a:p>
             <a:r>
-              <a:t>DataHub</a:t>
-            </a:r>
-          </a:p>
-          <a:p>
-            <a:r>
-              <a:t>OpenMetadata</a:t>
-            </a:r>
-          </a:p>
-          <a:p>
-            <a:r>
-              <a:t>Collibra</a:t>
-            </a:r>
-          </a:p>
-          <a:p>
-            <a:r>
-              <a:t>Microsoft Purview</a:t>
-            </a:r>
+              <a:rPr lang="en-US" b="1" dirty="0"/>
+              <a:t>What is PII?</a:t>
+            </a:r>
+          </a:p>
+          <a:p>
+            <a:r>
+              <a:rPr lang="en-US" dirty="0"/>
+              <a:t>Personally Identifiable Information:</a:t>
+            </a:r>
+          </a:p>
+          <a:p>
+            <a:pPr lvl="1"/>
+            <a:r>
+              <a:rPr lang="en-US" dirty="0"/>
+              <a:t>Email </a:t>
+            </a:r>
+          </a:p>
+          <a:p>
+            <a:pPr lvl="1"/>
+            <a:r>
+              <a:rPr lang="en-US" dirty="0"/>
+              <a:t>Phone number </a:t>
+            </a:r>
+          </a:p>
+          <a:p>
+            <a:pPr lvl="1"/>
+            <a:r>
+              <a:rPr lang="en-US" dirty="0"/>
+              <a:t>Aadhaar </a:t>
+            </a:r>
+          </a:p>
+          <a:p>
+            <a:pPr lvl="1"/>
+            <a:r>
+              <a:rPr lang="en-US" dirty="0"/>
+              <a:t>PAN </a:t>
+            </a:r>
+          </a:p>
+          <a:p>
+            <a:pPr lvl="1"/>
+            <a:r>
+              <a:rPr lang="en-US" dirty="0"/>
+              <a:t>Credit card </a:t>
+            </a:r>
+          </a:p>
+          <a:p>
+            <a:r>
+              <a:rPr lang="en-US" b="1" dirty="0"/>
+              <a:t>AI Tasks</a:t>
+            </a:r>
+          </a:p>
+          <a:p>
+            <a:pPr lvl="1"/>
+            <a:r>
+              <a:rPr lang="en-US" dirty="0"/>
+              <a:t>Detect sensitive fields </a:t>
+            </a:r>
+          </a:p>
+          <a:p>
+            <a:pPr lvl="1"/>
+            <a:r>
+              <a:rPr lang="en-US" dirty="0"/>
+              <a:t>Monitor confidential data </a:t>
+            </a:r>
+          </a:p>
+          <a:p>
+            <a:pPr lvl="1"/>
+            <a:r>
+              <a:rPr lang="en-US" dirty="0"/>
+              <a:t>Trigger governance actions</a:t>
+            </a:r>
+          </a:p>
+          <a:p>
+            <a:endParaRPr lang="en-IN" dirty="0"/>
           </a:p>
         </p:txBody>
       </p:sp>
     </p:spTree>
+    <p:extLst>
+      <p:ext uri="{BB962C8B-B14F-4D97-AF65-F5344CB8AC3E}">
+        <p14:creationId xmlns:p14="http://schemas.microsoft.com/office/powerpoint/2010/main" val="1580572132"/>
+      </p:ext>
+    </p:extLst>
   </p:cSld>
   <p:clrMapOvr>
     <a:masterClrMapping/>
@@ -17653,7 +18779,7 @@
           <a:lstStyle/>
           <a:p>
             <a:r>
-              <a:t>DataHub Integration</a:t>
+              <a:t>PII Detection Techniques</a:t>
             </a:r>
           </a:p>
         </p:txBody>
@@ -17674,22 +18800,22 @@
           <a:lstStyle/>
           <a:p>
             <a:r>
-              <a:t>Connect metadata sources</a:t>
-            </a:r>
-          </a:p>
-          <a:p>
-            <a:r>
-              <a:t>Enable AI tagging</a:t>
-            </a:r>
-          </a:p>
-          <a:p>
-            <a:r>
-              <a:t>Generate lineage automatically</a:t>
-            </a:r>
-          </a:p>
-          <a:p>
-            <a:r>
-              <a:t>Improve metadata discovery</a:t>
+              <a:t>Regex-based detection</a:t>
+            </a:r>
+          </a:p>
+          <a:p>
+            <a:r>
+              <a:t>NLP-based classification</a:t>
+            </a:r>
+          </a:p>
+          <a:p>
+            <a:r>
+              <a:t>LLM semantic understanding</a:t>
+            </a:r>
+          </a:p>
+          <a:p>
+            <a:r>
+              <a:t>Context-aware analysis</a:t>
             </a:r>
           </a:p>
         </p:txBody>
@@ -17721,28 +18847,13 @@
       </p:grpSpPr>
       <p:sp>
         <p:nvSpPr>
-          <p:cNvPr id="2" name="Title 1"/>
-          <p:cNvSpPr>
-            <a:spLocks noGrp="1"/>
-          </p:cNvSpPr>
-          <p:nvPr>
-            <p:ph type="title"/>
-          </p:nvPr>
-        </p:nvSpPr>
-        <p:spPr/>
-        <p:txBody>
-          <a:bodyPr/>
-          <a:lstStyle/>
-          <a:p>
-            <a:r>
-              <a:t>OpenMetadata Integration</a:t>
-            </a:r>
-          </a:p>
-        </p:txBody>
-      </p:sp>
-      <p:sp>
-        <p:nvSpPr>
-          <p:cNvPr id="3" name="Content Placeholder 2"/>
+          <p:cNvPr id="3" name="Content Placeholder 2">
+            <a:extLst>
+              <a:ext uri="{FF2B5EF4-FFF2-40B4-BE49-F238E27FC236}">
+                <a16:creationId xmlns:a16="http://schemas.microsoft.com/office/drawing/2014/main" id="{4B85A7C6-D8CA-32E6-2762-26C300F5E075}"/>
+              </a:ext>
+            </a:extLst>
+          </p:cNvPr>
           <p:cNvSpPr>
             <a:spLocks noGrp="1"/>
           </p:cNvSpPr>
@@ -17750,33 +18861,141 @@
             <p:ph idx="1"/>
           </p:nvPr>
         </p:nvSpPr>
-        <p:spPr/>
+        <p:spPr>
+          <a:xfrm>
+            <a:off x="768096" y="590550"/>
+            <a:ext cx="7290055" cy="5718810"/>
+          </a:xfrm>
+        </p:spPr>
         <p:txBody>
-          <a:bodyPr/>
+          <a:bodyPr>
+            <a:normAutofit fontScale="85000" lnSpcReduction="20000"/>
+          </a:bodyPr>
           <a:lstStyle/>
           <a:p>
             <a:r>
-              <a:t>Generate descriptions</a:t>
-            </a:r>
-          </a:p>
-          <a:p>
-            <a:r>
-              <a:t>Enable AI search</a:t>
-            </a:r>
-          </a:p>
-          <a:p>
-            <a:r>
-              <a:t>Detect PII</a:t>
-            </a:r>
-          </a:p>
-          <a:p>
-            <a:r>
-              <a:t>Enhance lineage tracking</a:t>
-            </a:r>
+              <a:rPr lang="en-IN" b="1" dirty="0"/>
+              <a:t>1. Regex-Based Detection</a:t>
+            </a:r>
+          </a:p>
+          <a:p>
+            <a:r>
+              <a:rPr lang="en-IN" dirty="0"/>
+              <a:t>Pattern matching.</a:t>
+            </a:r>
+          </a:p>
+          <a:p>
+            <a:r>
+              <a:rPr lang="en-IN" dirty="0"/>
+              <a:t>Example:</a:t>
+            </a:r>
+          </a:p>
+          <a:p>
+            <a:r>
+              <a:rPr lang="en-IN" dirty="0"/>
+              <a:t>\d{4}-\d{4}-\d{4}-\d{4}</a:t>
+            </a:r>
+          </a:p>
+          <a:p>
+            <a:r>
+              <a:rPr lang="en-IN" dirty="0"/>
+              <a:t>Detects credit cards.</a:t>
+            </a:r>
+          </a:p>
+          <a:p>
+            <a:r>
+              <a:rPr lang="en-IN" b="1" dirty="0"/>
+              <a:t>2. NLP-Based Classification</a:t>
+            </a:r>
+          </a:p>
+          <a:p>
+            <a:r>
+              <a:rPr lang="en-IN" dirty="0"/>
+              <a:t>AI understands language meaning.</a:t>
+            </a:r>
+          </a:p>
+          <a:p>
+            <a:r>
+              <a:rPr lang="en-IN" dirty="0"/>
+              <a:t>Example:</a:t>
+            </a:r>
+            <a:br>
+              <a:rPr lang="en-IN" dirty="0"/>
+            </a:br>
+            <a:r>
+              <a:rPr lang="en-IN" dirty="0"/>
+              <a:t>“Patient medical record number”</a:t>
+            </a:r>
+          </a:p>
+          <a:p>
+            <a:r>
+              <a:rPr lang="en-IN" b="1" dirty="0"/>
+              <a:t>3. LLM Semantic Understanding</a:t>
+            </a:r>
+          </a:p>
+          <a:p>
+            <a:r>
+              <a:rPr lang="en-IN" dirty="0"/>
+              <a:t>LLM understands context.</a:t>
+            </a:r>
+          </a:p>
+          <a:p>
+            <a:r>
+              <a:rPr lang="en-IN" dirty="0"/>
+              <a:t>Example:</a:t>
+            </a:r>
+            <a:br>
+              <a:rPr lang="en-IN" dirty="0"/>
+            </a:br>
+            <a:r>
+              <a:rPr lang="en-IN" dirty="0"/>
+              <a:t>Column name:</a:t>
+            </a:r>
+          </a:p>
+          <a:p>
+            <a:r>
+              <a:rPr lang="en-IN" dirty="0" err="1"/>
+              <a:t>contact_info</a:t>
+            </a:r>
+            <a:endParaRPr lang="en-IN" dirty="0"/>
+          </a:p>
+          <a:p>
+            <a:r>
+              <a:rPr lang="en-IN" dirty="0"/>
+              <a:t>Could contain phone/email.</a:t>
+            </a:r>
+          </a:p>
+          <a:p>
+            <a:r>
+              <a:rPr lang="en-IN" b="1" dirty="0"/>
+              <a:t>4. Context-Aware Analysis</a:t>
+            </a:r>
+          </a:p>
+          <a:p>
+            <a:r>
+              <a:rPr lang="en-IN" dirty="0"/>
+              <a:t>Looks at </a:t>
+            </a:r>
+            <a:r>
+              <a:rPr lang="en-IN" dirty="0" err="1"/>
+              <a:t>neighboring</a:t>
+            </a:r>
+            <a:r>
+              <a:rPr lang="en-IN" dirty="0"/>
+              <a:t> columns and dataset context.</a:t>
+            </a:r>
+          </a:p>
+          <a:p>
+            <a:endParaRPr lang="en-IN" dirty="0"/>
           </a:p>
         </p:txBody>
       </p:sp>
     </p:spTree>
+    <p:extLst>
+      <p:ext uri="{BB962C8B-B14F-4D97-AF65-F5344CB8AC3E}">
+        <p14:creationId xmlns:p14="http://schemas.microsoft.com/office/powerpoint/2010/main" val="3530051595"/>
+      </p:ext>
+    </p:extLst>
   </p:cSld>
   <p:clrMapOvr>
     <a:masterClrMapping/>
@@ -17787,6 +19006,14 @@
 <file path=ppt/slides/slide26.xml><?xml version="1.0" encoding="utf-8"?>
 <p:sld xmlns:a="http://schemas.openxmlformats.org/drawingml/2006/main" xmlns:r="http://schemas.openxmlformats.org/officeDocument/2006/relationships" xmlns:p="http://schemas.openxmlformats.org/presentationml/2006/main">
   <p:cSld>
+    <p:bg>
+      <p:bgPr>
+        <a:solidFill>
+          <a:srgbClr val="1B3A4B"/>
+        </a:solidFill>
+        <a:effectLst/>
+      </p:bgPr>
+    </p:bg>
     <p:spTree>
       <p:nvGrpSpPr>
         <p:cNvPr id="1" name=""/>
@@ -17803,62 +19030,180 @@
       </p:grpSpPr>
       <p:sp>
         <p:nvSpPr>
-          <p:cNvPr id="2" name="Title 1"/>
-          <p:cNvSpPr>
-            <a:spLocks noGrp="1"/>
-          </p:cNvSpPr>
-          <p:nvPr>
-            <p:ph type="title"/>
-          </p:nvPr>
+          <p:cNvPr id="10" name="TopBar"/>
+          <p:cNvSpPr/>
+          <p:nvPr/>
         </p:nvSpPr>
-        <p:spPr/>
+        <p:spPr>
+          <a:xfrm>
+            <a:off x="914400" y="2148840"/>
+            <a:ext cx="7315200" cy="45720"/>
+          </a:xfrm>
+          <a:prstGeom prst="rect">
+            <a:avLst/>
+          </a:prstGeom>
+          <a:solidFill>
+            <a:srgbClr val="1CADE4"/>
+          </a:solidFill>
+          <a:ln>
+            <a:noFill/>
+          </a:ln>
+        </p:spPr>
         <p:txBody>
           <a:bodyPr/>
           <a:lstStyle/>
           <a:p>
-            <a:r>
-              <a:t>Collibra + AI</a:t>
-            </a:r>
+            <a:endParaRPr lang="en-IN"/>
           </a:p>
         </p:txBody>
       </p:sp>
       <p:sp>
         <p:nvSpPr>
-          <p:cNvPr id="3" name="Content Placeholder 2"/>
-          <p:cNvSpPr>
-            <a:spLocks noGrp="1"/>
-          </p:cNvSpPr>
-          <p:nvPr>
-            <p:ph idx="1"/>
-          </p:nvPr>
+          <p:cNvPr id="11" name="LabTag"/>
+          <p:cNvSpPr/>
+          <p:nvPr/>
         </p:nvSpPr>
-        <p:spPr/>
+        <p:spPr>
+          <a:xfrm>
+            <a:off x="3657600" y="2377440"/>
+            <a:ext cx="1828800" cy="548640"/>
+          </a:xfrm>
+          <a:prstGeom prst="roundRect">
+            <a:avLst>
+              <a:gd name="adj" fmla="val 16667"/>
+            </a:avLst>
+          </a:prstGeom>
+          <a:solidFill>
+            <a:srgbClr val="1CADE4"/>
+          </a:solidFill>
+          <a:ln>
+            <a:noFill/>
+          </a:ln>
+        </p:spPr>
+        <p:txBody>
+          <a:bodyPr wrap="square" lIns="0" tIns="0" rIns="0" bIns="0" anchor="ctr"/>
+          <a:lstStyle/>
+          <a:p>
+            <a:pPr algn="ctr"/>
+            <a:r>
+              <a:rPr lang="en-US" sz="2000" b="1" spc="400">
+                <a:solidFill>
+                  <a:srgbClr val="FFFFFF"/>
+                </a:solidFill>
+                <a:latin typeface="Trebuchet MS"/>
+              </a:rPr>
+              <a:t>LAB 5</a:t>
+            </a:r>
+          </a:p>
+        </p:txBody>
+      </p:sp>
+      <p:sp>
+        <p:nvSpPr>
+          <p:cNvPr id="12" name="MainTitle"/>
+          <p:cNvSpPr/>
+          <p:nvPr/>
+        </p:nvSpPr>
+        <p:spPr>
+          <a:xfrm>
+            <a:off x="914400" y="3148965"/>
+            <a:ext cx="7315200" cy="914400"/>
+          </a:xfrm>
+          <a:prstGeom prst="rect">
+            <a:avLst/>
+          </a:prstGeom>
+          <a:noFill/>
+          <a:ln>
+            <a:noFill/>
+          </a:ln>
+        </p:spPr>
+        <p:txBody>
+          <a:bodyPr wrap="square" lIns="0" tIns="0" rIns="0" bIns="0" anchor="ctr"/>
+          <a:lstStyle/>
+          <a:p>
+            <a:pPr algn="ctr"/>
+            <a:r>
+              <a:rPr lang="en-US" sz="4400" b="1">
+                <a:solidFill>
+                  <a:srgbClr val="FFFFFF"/>
+                </a:solidFill>
+                <a:latin typeface="Trebuchet MS"/>
+              </a:rPr>
+              <a:t>Hands-On Activity</a:t>
+            </a:r>
+          </a:p>
+        </p:txBody>
+      </p:sp>
+      <p:sp>
+        <p:nvSpPr>
+          <p:cNvPr id="13" name="Subtitle"/>
+          <p:cNvSpPr/>
+          <p:nvPr/>
+        </p:nvSpPr>
+        <p:spPr>
+          <a:xfrm>
+            <a:off x="1828800" y="4130040"/>
+            <a:ext cx="5486400" cy="548640"/>
+          </a:xfrm>
+          <a:prstGeom prst="rect">
+            <a:avLst/>
+          </a:prstGeom>
+          <a:noFill/>
+          <a:ln>
+            <a:noFill/>
+          </a:ln>
+        </p:spPr>
+        <p:txBody>
+          <a:bodyPr wrap="square" lIns="0" tIns="0" rIns="0" bIns="0" anchor="t"/>
+          <a:lstStyle/>
+          <a:p>
+            <a:pPr algn="ctr"/>
+            <a:r>
+              <a:rPr lang="en-US" sz="1800">
+                <a:solidFill>
+                  <a:srgbClr val="8BB8D0"/>
+                </a:solidFill>
+                <a:latin typeface="Calibri"/>
+              </a:rPr>
+              <a:t>PII and Sensitive Data Discovery</a:t>
+            </a:r>
+          </a:p>
+        </p:txBody>
+      </p:sp>
+      <p:sp>
+        <p:nvSpPr>
+          <p:cNvPr id="14" name="BottomBar"/>
+          <p:cNvSpPr/>
+          <p:nvPr/>
+        </p:nvSpPr>
+        <p:spPr>
+          <a:xfrm>
+            <a:off x="914400" y="4892040"/>
+            <a:ext cx="7315200" cy="45720"/>
+          </a:xfrm>
+          <a:prstGeom prst="rect">
+            <a:avLst/>
+          </a:prstGeom>
+          <a:solidFill>
+            <a:srgbClr val="1CADE4"/>
+          </a:solidFill>
+          <a:ln>
+            <a:noFill/>
+          </a:ln>
+        </p:spPr>
         <p:txBody>
           <a:bodyPr/>
           <a:lstStyle/>
           <a:p>
-            <a:r>
-              <a:t>Generate glossary terms</a:t>
-            </a:r>
-          </a:p>
-          <a:p>
-            <a:r>
-              <a:t>Recommend governance policies</a:t>
-            </a:r>
-          </a:p>
-          <a:p>
-            <a:r>
-              <a:t>Classify datasets</a:t>
-            </a:r>
-          </a:p>
-          <a:p>
-            <a:r>
-              <a:t>Automate compliance workflows</a:t>
-            </a:r>
+            <a:endParaRPr lang="en-IN"/>
           </a:p>
         </p:txBody>
       </p:sp>
     </p:spTree>
+    <p:extLst>
+      <p:ext uri="{BB962C8B-B14F-4D97-AF65-F5344CB8AC3E}">
+        <p14:creationId xmlns:p14="http://schemas.microsoft.com/office/powerpoint/2010/main" val="61986955"/>
+      </p:ext>
+    </p:extLst>
   </p:cSld>
   <p:clrMapOvr>
     <a:masterClrMapping/>
@@ -17899,7 +19244,7 @@
           <a:lstStyle/>
           <a:p>
             <a:r>
-              <a:t>LLM Layer Architecture</a:t>
+              <a:t>Sensitive Data Classification</a:t>
             </a:r>
           </a:p>
         </p:txBody>
@@ -17920,22 +19265,22 @@
           <a:lstStyle/>
           <a:p>
             <a:r>
-              <a:t>Metadata connectors</a:t>
-            </a:r>
-          </a:p>
-          <a:p>
-            <a:r>
-              <a:t>Vector databases</a:t>
-            </a:r>
-          </a:p>
-          <a:p>
-            <a:r>
-              <a:t>LLM reasoning engine</a:t>
-            </a:r>
-          </a:p>
-          <a:p>
-            <a:r>
-              <a:t>Governance APIs</a:t>
+              <a:t>Public</a:t>
+            </a:r>
+          </a:p>
+          <a:p>
+            <a:r>
+              <a:t>Internal</a:t>
+            </a:r>
+          </a:p>
+          <a:p>
+            <a:r>
+              <a:t>Confidential</a:t>
+            </a:r>
+          </a:p>
+          <a:p>
+            <a:r>
+              <a:t>Restricted</a:t>
             </a:r>
           </a:p>
         </p:txBody>
@@ -17967,28 +19312,13 @@
       </p:grpSpPr>
       <p:sp>
         <p:nvSpPr>
-          <p:cNvPr id="2" name="Title 1"/>
-          <p:cNvSpPr>
-            <a:spLocks noGrp="1"/>
-          </p:cNvSpPr>
-          <p:nvPr>
-            <p:ph type="title"/>
-          </p:nvPr>
-        </p:nvSpPr>
-        <p:spPr/>
-        <p:txBody>
-          <a:bodyPr/>
-          <a:lstStyle/>
-          <a:p>
-            <a:r>
-              <a:t>RAG for Governance</a:t>
-            </a:r>
-          </a:p>
-        </p:txBody>
-      </p:sp>
-      <p:sp>
-        <p:nvSpPr>
-          <p:cNvPr id="3" name="Content Placeholder 2"/>
+          <p:cNvPr id="3" name="Content Placeholder 2">
+            <a:extLst>
+              <a:ext uri="{FF2B5EF4-FFF2-40B4-BE49-F238E27FC236}">
+                <a16:creationId xmlns:a16="http://schemas.microsoft.com/office/drawing/2014/main" id="{538820C4-5C24-0787-D664-9DC57B5E0940}"/>
+              </a:ext>
+            </a:extLst>
+          </p:cNvPr>
           <p:cNvSpPr>
             <a:spLocks noGrp="1"/>
           </p:cNvSpPr>
@@ -17996,33 +19326,110 @@
             <p:ph idx="1"/>
           </p:nvPr>
         </p:nvSpPr>
-        <p:spPr/>
+        <p:spPr>
+          <a:xfrm>
+            <a:off x="768096" y="752475"/>
+            <a:ext cx="7290055" cy="5556885"/>
+          </a:xfrm>
+        </p:spPr>
         <p:txBody>
-          <a:bodyPr/>
+          <a:bodyPr>
+            <a:normAutofit/>
+          </a:bodyPr>
           <a:lstStyle/>
           <a:p>
             <a:r>
-              <a:t>Retrieve governance policies</a:t>
-            </a:r>
-          </a:p>
-          <a:p>
-            <a:r>
-              <a:t>Enable semantic search</a:t>
-            </a:r>
-          </a:p>
-          <a:p>
-            <a:r>
-              <a:t>Answer compliance questions</a:t>
-            </a:r>
-          </a:p>
-          <a:p>
-            <a:r>
-              <a:t>Improve governance insights</a:t>
-            </a:r>
+              <a:rPr lang="en-US" b="1" dirty="0"/>
+              <a:t>Classification Levels</a:t>
+            </a:r>
+          </a:p>
+          <a:p>
+            <a:r>
+              <a:rPr lang="en-US" b="1" dirty="0"/>
+              <a:t>Public</a:t>
+            </a:r>
+          </a:p>
+          <a:p>
+            <a:pPr lvl="1"/>
+            <a:r>
+              <a:rPr lang="en-US" dirty="0"/>
+              <a:t>Anyone can access.</a:t>
+            </a:r>
+          </a:p>
+          <a:p>
+            <a:r>
+              <a:rPr lang="en-US" b="1" dirty="0"/>
+              <a:t>Internal</a:t>
+            </a:r>
+          </a:p>
+          <a:p>
+            <a:pPr lvl="1"/>
+            <a:r>
+              <a:rPr lang="en-US" dirty="0"/>
+              <a:t>Company-only access.</a:t>
+            </a:r>
+          </a:p>
+          <a:p>
+            <a:r>
+              <a:rPr lang="en-US" b="1" dirty="0"/>
+              <a:t>Confidential</a:t>
+            </a:r>
+          </a:p>
+          <a:p>
+            <a:pPr lvl="1"/>
+            <a:r>
+              <a:rPr lang="en-US" dirty="0"/>
+              <a:t>Restricted business information.</a:t>
+            </a:r>
+          </a:p>
+          <a:p>
+            <a:r>
+              <a:rPr lang="en-US" b="1" dirty="0"/>
+              <a:t>Restricted</a:t>
+            </a:r>
+          </a:p>
+          <a:p>
+            <a:pPr lvl="1"/>
+            <a:r>
+              <a:rPr lang="en-US" dirty="0"/>
+              <a:t>Highly sensitive data.</a:t>
+            </a:r>
+          </a:p>
+          <a:p>
+            <a:r>
+              <a:rPr lang="en-US" dirty="0"/>
+              <a:t>Examples:</a:t>
+            </a:r>
+          </a:p>
+          <a:p>
+            <a:r>
+              <a:rPr lang="en-US" dirty="0"/>
+              <a:t>Medical records </a:t>
+            </a:r>
+          </a:p>
+          <a:p>
+            <a:r>
+              <a:rPr lang="en-US" dirty="0"/>
+              <a:t>Financial data </a:t>
+            </a:r>
+          </a:p>
+          <a:p>
+            <a:r>
+              <a:rPr lang="en-US" dirty="0"/>
+              <a:t>Government IDs</a:t>
+            </a:r>
+          </a:p>
+          <a:p>
+            <a:endParaRPr lang="en-IN" dirty="0"/>
           </a:p>
         </p:txBody>
       </p:sp>
     </p:spTree>
+    <p:extLst>
+      <p:ext uri="{BB962C8B-B14F-4D97-AF65-F5344CB8AC3E}">
+        <p14:creationId xmlns:p14="http://schemas.microsoft.com/office/powerpoint/2010/main" val="4209992331"/>
+      </p:ext>
+    </p:extLst>
   </p:cSld>
   <p:clrMapOvr>
     <a:masterClrMapping/>
@@ -18063,7 +19470,7 @@
           <a:lstStyle/>
           <a:p>
             <a:r>
-              <a:t>Enterprise Benefits</a:t>
+              <a:t>AI-Generated Governance Policies</a:t>
             </a:r>
           </a:p>
         </p:txBody>
@@ -18084,22 +19491,22 @@
           <a:lstStyle/>
           <a:p>
             <a:r>
-              <a:t>Reduced manual effort</a:t>
-            </a:r>
-          </a:p>
-          <a:p>
-            <a:r>
-              <a:t>Improved compliance</a:t>
-            </a:r>
-          </a:p>
-          <a:p>
-            <a:r>
-              <a:t>Faster metadata onboarding</a:t>
-            </a:r>
-          </a:p>
-          <a:p>
-            <a:r>
-              <a:t>Better governance visibility</a:t>
+              <a:t>Generate retention policies</a:t>
+            </a:r>
+          </a:p>
+          <a:p>
+            <a:r>
+              <a:t>Define access controls</a:t>
+            </a:r>
+          </a:p>
+          <a:p>
+            <a:r>
+              <a:t>Create classification rules</a:t>
+            </a:r>
+          </a:p>
+          <a:p>
+            <a:r>
+              <a:t>Draft compliance documents</a:t>
             </a:r>
           </a:p>
         </p:txBody>
@@ -18131,7 +19538,13 @@
       </p:grpSpPr>
       <p:sp>
         <p:nvSpPr>
-          <p:cNvPr id="2" name="Title 1"/>
+          <p:cNvPr id="2" name="Title 1">
+            <a:extLst>
+              <a:ext uri="{FF2B5EF4-FFF2-40B4-BE49-F238E27FC236}">
+                <a16:creationId xmlns:a16="http://schemas.microsoft.com/office/drawing/2014/main" id="{95117D8C-EADD-EB12-1512-7E365F2A7117}"/>
+              </a:ext>
+            </a:extLst>
+          </p:cNvPr>
           <p:cNvSpPr>
             <a:spLocks noGrp="1"/>
           </p:cNvSpPr>
@@ -18145,6 +19558,7 @@
           <a:lstStyle/>
           <a:p>
             <a:r>
+              <a:rPr lang="en-IN" dirty="0"/>
               <a:t>Automated Lineage Extraction</a:t>
             </a:r>
           </a:p>
@@ -18152,7 +19566,13 @@
       </p:sp>
       <p:sp>
         <p:nvSpPr>
-          <p:cNvPr id="3" name="Content Placeholder 2"/>
+          <p:cNvPr id="3" name="Content Placeholder 2">
+            <a:extLst>
+              <a:ext uri="{FF2B5EF4-FFF2-40B4-BE49-F238E27FC236}">
+                <a16:creationId xmlns:a16="http://schemas.microsoft.com/office/drawing/2014/main" id="{68EEEBF5-3723-CA2F-7207-811FB6BC6F61}"/>
+              </a:ext>
+            </a:extLst>
+          </p:cNvPr>
           <p:cNvSpPr>
             <a:spLocks noGrp="1"/>
           </p:cNvSpPr>
@@ -18162,31 +19582,67 @@
         </p:nvSpPr>
         <p:spPr/>
         <p:txBody>
-          <a:bodyPr/>
+          <a:bodyPr>
+            <a:normAutofit/>
+          </a:bodyPr>
           <a:lstStyle/>
           <a:p>
             <a:r>
-              <a:t>Extract lineage from SQL and dbt code</a:t>
-            </a:r>
-          </a:p>
-          <a:p>
-            <a:r>
-              <a:t>Track upstream/downstream dependencies</a:t>
-            </a:r>
-          </a:p>
-          <a:p>
-            <a:r>
-              <a:t>Generate lineage graphs automatically</a:t>
-            </a:r>
-          </a:p>
-          <a:p>
-            <a:r>
-              <a:t>Enable impact analysis</a:t>
-            </a:r>
+              <a:rPr lang="en-US" b="1" dirty="0"/>
+              <a:t>What is Data Lineage?</a:t>
+            </a:r>
+          </a:p>
+          <a:p>
+            <a:r>
+              <a:rPr lang="en-US" dirty="0"/>
+              <a:t>Data lineage shows:</a:t>
+            </a:r>
+          </a:p>
+          <a:p>
+            <a:r>
+              <a:rPr lang="en-US" dirty="0"/>
+              <a:t>Where data comes from </a:t>
+            </a:r>
+          </a:p>
+          <a:p>
+            <a:r>
+              <a:rPr lang="en-US" dirty="0"/>
+              <a:t>How it transforms </a:t>
+            </a:r>
+          </a:p>
+          <a:p>
+            <a:r>
+              <a:rPr lang="en-US" dirty="0"/>
+              <a:t>Where it goes </a:t>
+            </a:r>
+          </a:p>
+          <a:p>
+            <a:r>
+              <a:rPr lang="en-US" dirty="0"/>
+              <a:t>Example:</a:t>
+            </a:r>
+            <a:br>
+              <a:rPr lang="en-US" dirty="0"/>
+            </a:br>
+            <a:r>
+              <a:rPr lang="en-US" dirty="0"/>
+              <a:t>Raw CSV → Bronze Table → Silver Table → Power BI Dashboard</a:t>
+            </a:r>
+          </a:p>
+          <a:p>
+            <a:endParaRPr lang="en-US" dirty="0"/>
+          </a:p>
+          <a:p>
+            <a:endParaRPr lang="en-IN" dirty="0"/>
           </a:p>
         </p:txBody>
       </p:sp>
     </p:spTree>
+    <p:extLst>
+      <p:ext uri="{BB962C8B-B14F-4D97-AF65-F5344CB8AC3E}">
+        <p14:creationId xmlns:p14="http://schemas.microsoft.com/office/powerpoint/2010/main" val="4262001149"/>
+      </p:ext>
+    </p:extLst>
   </p:cSld>
   <p:clrMapOvr>
     <a:masterClrMapping/>
@@ -18213,28 +19669,13 @@
       </p:grpSpPr>
       <p:sp>
         <p:nvSpPr>
-          <p:cNvPr id="2" name="Title 1"/>
-          <p:cNvSpPr>
-            <a:spLocks noGrp="1"/>
-          </p:cNvSpPr>
-          <p:nvPr>
-            <p:ph type="title"/>
-          </p:nvPr>
-        </p:nvSpPr>
-        <p:spPr/>
-        <p:txBody>
-          <a:bodyPr/>
-          <a:lstStyle/>
-          <a:p>
-            <a:r>
-              <a:t>Challenges &amp; Risks</a:t>
-            </a:r>
-          </a:p>
-        </p:txBody>
-      </p:sp>
-      <p:sp>
-        <p:nvSpPr>
-          <p:cNvPr id="3" name="Content Placeholder 2"/>
+          <p:cNvPr id="3" name="Content Placeholder 2">
+            <a:extLst>
+              <a:ext uri="{FF2B5EF4-FFF2-40B4-BE49-F238E27FC236}">
+                <a16:creationId xmlns:a16="http://schemas.microsoft.com/office/drawing/2014/main" id="{2E0D4F35-DDDB-FC1A-6686-F33E68A2441A}"/>
+              </a:ext>
+            </a:extLst>
+          </p:cNvPr>
           <p:cNvSpPr>
             <a:spLocks noGrp="1"/>
           </p:cNvSpPr>
@@ -18242,33 +19683,107 @@
             <p:ph idx="1"/>
           </p:nvPr>
         </p:nvSpPr>
-        <p:spPr/>
+        <p:spPr>
+          <a:xfrm>
+            <a:off x="768096" y="781050"/>
+            <a:ext cx="7290055" cy="5528310"/>
+          </a:xfrm>
+        </p:spPr>
         <p:txBody>
-          <a:bodyPr/>
+          <a:bodyPr>
+            <a:normAutofit/>
+          </a:bodyPr>
           <a:lstStyle/>
           <a:p>
             <a:r>
-              <a:t>Hallucinated metadata</a:t>
-            </a:r>
-          </a:p>
-          <a:p>
-            <a:r>
-              <a:t>Incorrect classifications</a:t>
-            </a:r>
-          </a:p>
-          <a:p>
-            <a:r>
-              <a:t>Compliance risks</a:t>
-            </a:r>
-          </a:p>
-          <a:p>
-            <a:r>
-              <a:t>Privacy concerns</a:t>
-            </a:r>
+              <a:rPr lang="en-US" b="1" dirty="0"/>
+              <a:t>AI Can Draft Policies</a:t>
+            </a:r>
+          </a:p>
+          <a:p>
+            <a:r>
+              <a:rPr lang="en-US" dirty="0"/>
+              <a:t>Examples:</a:t>
+            </a:r>
+          </a:p>
+          <a:p>
+            <a:pPr lvl="1"/>
+            <a:r>
+              <a:rPr lang="en-US" dirty="0"/>
+              <a:t>Retention policy </a:t>
+            </a:r>
+          </a:p>
+          <a:p>
+            <a:pPr lvl="1"/>
+            <a:r>
+              <a:rPr lang="en-US" dirty="0"/>
+              <a:t>Access policy </a:t>
+            </a:r>
+          </a:p>
+          <a:p>
+            <a:pPr lvl="1"/>
+            <a:r>
+              <a:rPr lang="en-US" dirty="0"/>
+              <a:t>Classification rules </a:t>
+            </a:r>
+          </a:p>
+          <a:p>
+            <a:pPr lvl="1"/>
+            <a:r>
+              <a:rPr lang="en-US" dirty="0"/>
+              <a:t>Compliance documents </a:t>
+            </a:r>
+          </a:p>
+          <a:p>
+            <a:r>
+              <a:rPr lang="en-US" b="1" dirty="0"/>
+              <a:t>Example</a:t>
+            </a:r>
+          </a:p>
+          <a:p>
+            <a:r>
+              <a:rPr lang="en-US" dirty="0"/>
+              <a:t>AI generates:</a:t>
+            </a:r>
+            <a:br>
+              <a:rPr lang="en-US" dirty="0"/>
+            </a:br>
+            <a:r>
+              <a:rPr lang="en-US" dirty="0"/>
+              <a:t>“Delete customer records after 7 years.”</a:t>
+            </a:r>
+          </a:p>
+          <a:p>
+            <a:r>
+              <a:rPr lang="en-US" b="1" dirty="0"/>
+              <a:t>Benefits</a:t>
+            </a:r>
+          </a:p>
+          <a:p>
+            <a:pPr lvl="1"/>
+            <a:r>
+              <a:rPr lang="en-US" dirty="0"/>
+              <a:t>Faster governance rollout </a:t>
+            </a:r>
+          </a:p>
+          <a:p>
+            <a:pPr lvl="1"/>
+            <a:r>
+              <a:rPr lang="en-US" dirty="0"/>
+              <a:t>Standardized policies</a:t>
+            </a:r>
+          </a:p>
+          <a:p>
+            <a:endParaRPr lang="en-IN" dirty="0"/>
           </a:p>
         </p:txBody>
       </p:sp>
     </p:spTree>
+    <p:extLst>
+      <p:ext uri="{BB962C8B-B14F-4D97-AF65-F5344CB8AC3E}">
+        <p14:creationId xmlns:p14="http://schemas.microsoft.com/office/powerpoint/2010/main" val="1529638758"/>
+      </p:ext>
+    </p:extLst>
   </p:cSld>
   <p:clrMapOvr>
     <a:masterClrMapping/>
@@ -18279,6 +19794,14 @@
 <file path=ppt/slides/slide31.xml><?xml version="1.0" encoding="utf-8"?>
 <p:sld xmlns:a="http://schemas.openxmlformats.org/drawingml/2006/main" xmlns:r="http://schemas.openxmlformats.org/officeDocument/2006/relationships" xmlns:p="http://schemas.openxmlformats.org/presentationml/2006/main">
   <p:cSld>
+    <p:bg>
+      <p:bgPr>
+        <a:solidFill>
+          <a:srgbClr val="1B3A4B"/>
+        </a:solidFill>
+        <a:effectLst/>
+      </p:bgPr>
+    </p:bg>
     <p:spTree>
       <p:nvGrpSpPr>
         <p:cNvPr id="1" name=""/>
@@ -18295,62 +19818,180 @@
       </p:grpSpPr>
       <p:sp>
         <p:nvSpPr>
-          <p:cNvPr id="2" name="Title 1"/>
-          <p:cNvSpPr>
-            <a:spLocks noGrp="1"/>
-          </p:cNvSpPr>
-          <p:nvPr>
-            <p:ph type="title"/>
-          </p:nvPr>
+          <p:cNvPr id="10" name="TopBar"/>
+          <p:cNvSpPr/>
+          <p:nvPr/>
         </p:nvSpPr>
-        <p:spPr/>
+        <p:spPr>
+          <a:xfrm>
+            <a:off x="914400" y="2148840"/>
+            <a:ext cx="7315200" cy="45720"/>
+          </a:xfrm>
+          <a:prstGeom prst="rect">
+            <a:avLst/>
+          </a:prstGeom>
+          <a:solidFill>
+            <a:srgbClr val="1CADE4"/>
+          </a:solidFill>
+          <a:ln>
+            <a:noFill/>
+          </a:ln>
+        </p:spPr>
         <p:txBody>
           <a:bodyPr/>
           <a:lstStyle/>
           <a:p>
-            <a:r>
-              <a:t>Best Practices</a:t>
-            </a:r>
+            <a:endParaRPr lang="en-IN"/>
           </a:p>
         </p:txBody>
       </p:sp>
       <p:sp>
         <p:nvSpPr>
-          <p:cNvPr id="3" name="Content Placeholder 2"/>
-          <p:cNvSpPr>
-            <a:spLocks noGrp="1"/>
-          </p:cNvSpPr>
-          <p:nvPr>
-            <p:ph idx="1"/>
-          </p:nvPr>
+          <p:cNvPr id="11" name="LabTag"/>
+          <p:cNvSpPr/>
+          <p:nvPr/>
         </p:nvSpPr>
-        <p:spPr/>
+        <p:spPr>
+          <a:xfrm>
+            <a:off x="3657600" y="2377440"/>
+            <a:ext cx="1828800" cy="548640"/>
+          </a:xfrm>
+          <a:prstGeom prst="roundRect">
+            <a:avLst>
+              <a:gd name="adj" fmla="val 16667"/>
+            </a:avLst>
+          </a:prstGeom>
+          <a:solidFill>
+            <a:srgbClr val="1CADE4"/>
+          </a:solidFill>
+          <a:ln>
+            <a:noFill/>
+          </a:ln>
+        </p:spPr>
+        <p:txBody>
+          <a:bodyPr wrap="square" lIns="0" tIns="0" rIns="0" bIns="0" anchor="ctr"/>
+          <a:lstStyle/>
+          <a:p>
+            <a:pPr algn="ctr"/>
+            <a:r>
+              <a:rPr lang="en-US" sz="2000" b="1" spc="400">
+                <a:solidFill>
+                  <a:srgbClr val="FFFFFF"/>
+                </a:solidFill>
+                <a:latin typeface="Trebuchet MS"/>
+              </a:rPr>
+              <a:t>LAB 6</a:t>
+            </a:r>
+          </a:p>
+        </p:txBody>
+      </p:sp>
+      <p:sp>
+        <p:nvSpPr>
+          <p:cNvPr id="12" name="MainTitle"/>
+          <p:cNvSpPr/>
+          <p:nvPr/>
+        </p:nvSpPr>
+        <p:spPr>
+          <a:xfrm>
+            <a:off x="914400" y="3148965"/>
+            <a:ext cx="7315200" cy="914400"/>
+          </a:xfrm>
+          <a:prstGeom prst="rect">
+            <a:avLst/>
+          </a:prstGeom>
+          <a:noFill/>
+          <a:ln>
+            <a:noFill/>
+          </a:ln>
+        </p:spPr>
+        <p:txBody>
+          <a:bodyPr wrap="square" lIns="0" tIns="0" rIns="0" bIns="0" anchor="ctr"/>
+          <a:lstStyle/>
+          <a:p>
+            <a:pPr algn="ctr"/>
+            <a:r>
+              <a:rPr lang="en-US" sz="4400" b="1">
+                <a:solidFill>
+                  <a:srgbClr val="FFFFFF"/>
+                </a:solidFill>
+                <a:latin typeface="Trebuchet MS"/>
+              </a:rPr>
+              <a:t>Hands-On Activity</a:t>
+            </a:r>
+          </a:p>
+        </p:txBody>
+      </p:sp>
+      <p:sp>
+        <p:nvSpPr>
+          <p:cNvPr id="13" name="Subtitle"/>
+          <p:cNvSpPr/>
+          <p:nvPr/>
+        </p:nvSpPr>
+        <p:spPr>
+          <a:xfrm>
+            <a:off x="1828800" y="4130040"/>
+            <a:ext cx="5486400" cy="548640"/>
+          </a:xfrm>
+          <a:prstGeom prst="rect">
+            <a:avLst/>
+          </a:prstGeom>
+          <a:noFill/>
+          <a:ln>
+            <a:noFill/>
+          </a:ln>
+        </p:spPr>
+        <p:txBody>
+          <a:bodyPr wrap="square" lIns="0" tIns="0" rIns="0" bIns="0" anchor="t"/>
+          <a:lstStyle/>
+          <a:p>
+            <a:pPr algn="ctr"/>
+            <a:r>
+              <a:rPr lang="en-US" sz="1800">
+                <a:solidFill>
+                  <a:srgbClr val="8BB8D0"/>
+                </a:solidFill>
+                <a:latin typeface="Calibri"/>
+              </a:rPr>
+              <a:t>AI-Generated Governance Policies</a:t>
+            </a:r>
+          </a:p>
+        </p:txBody>
+      </p:sp>
+      <p:sp>
+        <p:nvSpPr>
+          <p:cNvPr id="14" name="BottomBar"/>
+          <p:cNvSpPr/>
+          <p:nvPr/>
+        </p:nvSpPr>
+        <p:spPr>
+          <a:xfrm>
+            <a:off x="914400" y="4892040"/>
+            <a:ext cx="7315200" cy="45720"/>
+          </a:xfrm>
+          <a:prstGeom prst="rect">
+            <a:avLst/>
+          </a:prstGeom>
+          <a:solidFill>
+            <a:srgbClr val="1CADE4"/>
+          </a:solidFill>
+          <a:ln>
+            <a:noFill/>
+          </a:ln>
+        </p:spPr>
         <p:txBody>
           <a:bodyPr/>
           <a:lstStyle/>
           <a:p>
-            <a:r>
-              <a:t>Human approval workflows</a:t>
-            </a:r>
-          </a:p>
-          <a:p>
-            <a:r>
-              <a:t>Audit logging</a:t>
-            </a:r>
-          </a:p>
-          <a:p>
-            <a:r>
-              <a:t>RBAC enforcement</a:t>
-            </a:r>
-          </a:p>
-          <a:p>
-            <a:r>
-              <a:t>Continuous validation</a:t>
-            </a:r>
+            <a:endParaRPr lang="en-IN"/>
           </a:p>
         </p:txBody>
       </p:sp>
     </p:spTree>
+    <p:extLst>
+      <p:ext uri="{BB962C8B-B14F-4D97-AF65-F5344CB8AC3E}">
+        <p14:creationId xmlns:p14="http://schemas.microsoft.com/office/powerpoint/2010/main" val="2650987293"/>
+      </p:ext>
+    </p:extLst>
   </p:cSld>
   <p:clrMapOvr>
     <a:masterClrMapping/>
@@ -18391,7 +20032,7 @@
           <a:lstStyle/>
           <a:p>
             <a:r>
-              <a:t>Future of AI Governance</a:t>
+              <a:t>AI-Driven Catalogue Enrichment</a:t>
             </a:r>
           </a:p>
         </p:txBody>
@@ -18412,22 +20053,70 @@
           <a:lstStyle/>
           <a:p>
             <a:r>
-              <a:t>Autonomous governance agents</a:t>
-            </a:r>
-          </a:p>
-          <a:p>
-            <a:r>
-              <a:t>AI-native catalogues</a:t>
-            </a:r>
-          </a:p>
-          <a:p>
-            <a:r>
-              <a:t>Real-time compliance</a:t>
-            </a:r>
-          </a:p>
-          <a:p>
-            <a:r>
-              <a:t>Intelligent lineage graphs</a:t>
+              <a:rPr lang="en-IN" b="1" dirty="0"/>
+              <a:t>Data </a:t>
+            </a:r>
+            <a:r>
+              <a:rPr lang="en-IN" b="1" dirty="0" err="1"/>
+              <a:t>Catalog</a:t>
+            </a:r>
+            <a:r>
+              <a:rPr lang="en-IN" b="1" dirty="0"/>
+              <a:t> Enhancement</a:t>
+            </a:r>
+          </a:p>
+          <a:p>
+            <a:r>
+              <a:rPr lang="en-IN" dirty="0"/>
+              <a:t>AI improves </a:t>
+            </a:r>
+            <a:r>
+              <a:rPr lang="en-IN" dirty="0" err="1"/>
+              <a:t>catalogs</a:t>
+            </a:r>
+            <a:r>
+              <a:rPr lang="en-IN" dirty="0"/>
+              <a:t> by:</a:t>
+            </a:r>
+          </a:p>
+          <a:p>
+            <a:pPr lvl="1"/>
+            <a:r>
+              <a:rPr lang="en-IN" dirty="0"/>
+              <a:t>Generating descriptions </a:t>
+            </a:r>
+          </a:p>
+          <a:p>
+            <a:pPr lvl="1"/>
+            <a:r>
+              <a:rPr lang="en-IN" dirty="0"/>
+              <a:t>Suggesting owners </a:t>
+            </a:r>
+          </a:p>
+          <a:p>
+            <a:pPr lvl="1"/>
+            <a:r>
+              <a:rPr lang="en-IN" dirty="0"/>
+              <a:t>Adding tags </a:t>
+            </a:r>
+          </a:p>
+          <a:p>
+            <a:pPr lvl="1"/>
+            <a:r>
+              <a:rPr lang="en-IN" dirty="0"/>
+              <a:t>Recommending SLAs </a:t>
+            </a:r>
+          </a:p>
+          <a:p>
+            <a:r>
+              <a:rPr lang="en-IN" b="1" dirty="0"/>
+              <a:t>Result</a:t>
+            </a:r>
+          </a:p>
+          <a:p>
+            <a:r>
+              <a:rPr lang="en-IN" dirty="0"/>
+              <a:t>Better data discoverability.</a:t>
             </a:r>
           </a:p>
         </p:txBody>
@@ -18440,7 +20129,7 @@
 </p:sld>
 </file>
 
-<file path=ppt/slides/slide4.xml><?xml version="1.0" encoding="utf-8"?>
+<file path=ppt/slides/slide33.xml><?xml version="1.0" encoding="utf-8"?>
 <p:sld xmlns:a="http://schemas.openxmlformats.org/drawingml/2006/main" xmlns:r="http://schemas.openxmlformats.org/officeDocument/2006/relationships" xmlns:p="http://schemas.openxmlformats.org/presentationml/2006/main">
   <p:cSld>
     <p:spTree>
@@ -18473,7 +20162,7 @@
           <a:lstStyle/>
           <a:p>
             <a:r>
-              <a:t>SQL-Based Lineage Extraction</a:t>
+              <a:t>AI-Generated Dataset Descriptions</a:t>
             </a:r>
           </a:p>
         </p:txBody>
@@ -18494,22 +20183,2729 @@
           <a:lstStyle/>
           <a:p>
             <a:r>
-              <a:t>Analyze SELECT statements</a:t>
-            </a:r>
-          </a:p>
-          <a:p>
-            <a:r>
-              <a:t>Parse JOIN operations</a:t>
-            </a:r>
-          </a:p>
-          <a:p>
-            <a:r>
-              <a:t>Track CTE dependencies</a:t>
-            </a:r>
-          </a:p>
-          <a:p>
-            <a:r>
-              <a:t>Generate transformation flow maps</a:t>
+              <a:rPr lang="en-IN" b="1" dirty="0"/>
+              <a:t>Automatic Documentation</a:t>
+            </a:r>
+          </a:p>
+          <a:p>
+            <a:r>
+              <a:rPr lang="en-IN" dirty="0"/>
+              <a:t>AI summarizes:</a:t>
+            </a:r>
+          </a:p>
+          <a:p>
+            <a:pPr lvl="1"/>
+            <a:r>
+              <a:rPr lang="en-IN" dirty="0"/>
+              <a:t>Dataset purpose </a:t>
+            </a:r>
+          </a:p>
+          <a:p>
+            <a:pPr lvl="1"/>
+            <a:r>
+              <a:rPr lang="en-IN" dirty="0"/>
+              <a:t>Business meaning </a:t>
+            </a:r>
+          </a:p>
+          <a:p>
+            <a:pPr lvl="1"/>
+            <a:r>
+              <a:rPr lang="en-IN" dirty="0"/>
+              <a:t>Column usage </a:t>
+            </a:r>
+          </a:p>
+          <a:p>
+            <a:r>
+              <a:rPr lang="en-IN" b="1" dirty="0"/>
+              <a:t>Example</a:t>
+            </a:r>
+          </a:p>
+          <a:p>
+            <a:r>
+              <a:rPr lang="en-IN" dirty="0"/>
+              <a:t>“Contains monthly sales transactions across retail stores.”</a:t>
+            </a:r>
+          </a:p>
+          <a:p>
+            <a:r>
+              <a:rPr lang="en-IN" b="1" dirty="0"/>
+              <a:t>Benefit</a:t>
+            </a:r>
+          </a:p>
+          <a:p>
+            <a:r>
+              <a:rPr lang="en-IN" dirty="0"/>
+              <a:t>Reduces documentation burden.</a:t>
+            </a:r>
+          </a:p>
+        </p:txBody>
+      </p:sp>
+    </p:spTree>
+  </p:cSld>
+  <p:clrMapOvr>
+    <a:masterClrMapping/>
+  </p:clrMapOvr>
+</p:sld>
+</file>
+
+<file path=ppt/slides/slide34.xml><?xml version="1.0" encoding="utf-8"?>
+<p:sld xmlns:a="http://schemas.openxmlformats.org/drawingml/2006/main" xmlns:r="http://schemas.openxmlformats.org/officeDocument/2006/relationships" xmlns:p="http://schemas.openxmlformats.org/presentationml/2006/main">
+  <p:cSld>
+    <p:bg>
+      <p:bgPr>
+        <a:solidFill>
+          <a:srgbClr val="1B3A4B"/>
+        </a:solidFill>
+        <a:effectLst/>
+      </p:bgPr>
+    </p:bg>
+    <p:spTree>
+      <p:nvGrpSpPr>
+        <p:cNvPr id="1" name=""/>
+        <p:cNvGrpSpPr/>
+        <p:nvPr/>
+      </p:nvGrpSpPr>
+      <p:grpSpPr>
+        <a:xfrm>
+          <a:off x="0" y="0"/>
+          <a:ext cx="0" cy="0"/>
+          <a:chOff x="0" y="0"/>
+          <a:chExt cx="0" cy="0"/>
+        </a:xfrm>
+      </p:grpSpPr>
+      <p:sp>
+        <p:nvSpPr>
+          <p:cNvPr id="10" name="TopBar"/>
+          <p:cNvSpPr/>
+          <p:nvPr/>
+        </p:nvSpPr>
+        <p:spPr>
+          <a:xfrm>
+            <a:off x="914400" y="2148840"/>
+            <a:ext cx="7315200" cy="45720"/>
+          </a:xfrm>
+          <a:prstGeom prst="rect">
+            <a:avLst/>
+          </a:prstGeom>
+          <a:solidFill>
+            <a:srgbClr val="1CADE4"/>
+          </a:solidFill>
+          <a:ln>
+            <a:noFill/>
+          </a:ln>
+        </p:spPr>
+        <p:txBody>
+          <a:bodyPr/>
+          <a:lstStyle/>
+          <a:p>
+            <a:endParaRPr lang="en-IN"/>
+          </a:p>
+        </p:txBody>
+      </p:sp>
+      <p:sp>
+        <p:nvSpPr>
+          <p:cNvPr id="11" name="LabTag"/>
+          <p:cNvSpPr/>
+          <p:nvPr/>
+        </p:nvSpPr>
+        <p:spPr>
+          <a:xfrm>
+            <a:off x="3657600" y="2377440"/>
+            <a:ext cx="1828800" cy="548640"/>
+          </a:xfrm>
+          <a:prstGeom prst="roundRect">
+            <a:avLst>
+              <a:gd name="adj" fmla="val 16667"/>
+            </a:avLst>
+          </a:prstGeom>
+          <a:solidFill>
+            <a:srgbClr val="1CADE4"/>
+          </a:solidFill>
+          <a:ln>
+            <a:noFill/>
+          </a:ln>
+        </p:spPr>
+        <p:txBody>
+          <a:bodyPr wrap="square" lIns="0" tIns="0" rIns="0" bIns="0" anchor="ctr"/>
+          <a:lstStyle/>
+          <a:p>
+            <a:pPr algn="ctr"/>
+            <a:r>
+              <a:rPr lang="en-US" sz="2000" b="1" spc="400">
+                <a:solidFill>
+                  <a:srgbClr val="FFFFFF"/>
+                </a:solidFill>
+                <a:latin typeface="Trebuchet MS"/>
+              </a:rPr>
+              <a:t>LAB 7</a:t>
+            </a:r>
+          </a:p>
+        </p:txBody>
+      </p:sp>
+      <p:sp>
+        <p:nvSpPr>
+          <p:cNvPr id="12" name="MainTitle"/>
+          <p:cNvSpPr/>
+          <p:nvPr/>
+        </p:nvSpPr>
+        <p:spPr>
+          <a:xfrm>
+            <a:off x="914400" y="3148965"/>
+            <a:ext cx="7315200" cy="914400"/>
+          </a:xfrm>
+          <a:prstGeom prst="rect">
+            <a:avLst/>
+          </a:prstGeom>
+          <a:noFill/>
+          <a:ln>
+            <a:noFill/>
+          </a:ln>
+        </p:spPr>
+        <p:txBody>
+          <a:bodyPr wrap="square" lIns="0" tIns="0" rIns="0" bIns="0" anchor="ctr"/>
+          <a:lstStyle/>
+          <a:p>
+            <a:pPr algn="ctr"/>
+            <a:r>
+              <a:rPr lang="en-US" sz="4400" b="1">
+                <a:solidFill>
+                  <a:srgbClr val="FFFFFF"/>
+                </a:solidFill>
+                <a:latin typeface="Trebuchet MS"/>
+              </a:rPr>
+              <a:t>Hands-On Activity</a:t>
+            </a:r>
+          </a:p>
+        </p:txBody>
+      </p:sp>
+      <p:sp>
+        <p:nvSpPr>
+          <p:cNvPr id="13" name="Subtitle"/>
+          <p:cNvSpPr/>
+          <p:nvPr/>
+        </p:nvSpPr>
+        <p:spPr>
+          <a:xfrm>
+            <a:off x="1828800" y="4130040"/>
+            <a:ext cx="5486400" cy="548640"/>
+          </a:xfrm>
+          <a:prstGeom prst="rect">
+            <a:avLst/>
+          </a:prstGeom>
+          <a:noFill/>
+          <a:ln>
+            <a:noFill/>
+          </a:ln>
+        </p:spPr>
+        <p:txBody>
+          <a:bodyPr wrap="square" lIns="0" tIns="0" rIns="0" bIns="0" anchor="t"/>
+          <a:lstStyle/>
+          <a:p>
+            <a:pPr algn="ctr"/>
+            <a:r>
+              <a:rPr lang="en-US" sz="1800">
+                <a:solidFill>
+                  <a:srgbClr val="8BB8D0"/>
+                </a:solidFill>
+                <a:latin typeface="Calibri"/>
+              </a:rPr>
+              <a:t>AI-Generated Dataset Descriptions</a:t>
+            </a:r>
+          </a:p>
+        </p:txBody>
+      </p:sp>
+      <p:sp>
+        <p:nvSpPr>
+          <p:cNvPr id="14" name="BottomBar"/>
+          <p:cNvSpPr/>
+          <p:nvPr/>
+        </p:nvSpPr>
+        <p:spPr>
+          <a:xfrm>
+            <a:off x="914400" y="4892040"/>
+            <a:ext cx="7315200" cy="45720"/>
+          </a:xfrm>
+          <a:prstGeom prst="rect">
+            <a:avLst/>
+          </a:prstGeom>
+          <a:solidFill>
+            <a:srgbClr val="1CADE4"/>
+          </a:solidFill>
+          <a:ln>
+            <a:noFill/>
+          </a:ln>
+        </p:spPr>
+        <p:txBody>
+          <a:bodyPr/>
+          <a:lstStyle/>
+          <a:p>
+            <a:endParaRPr lang="en-IN"/>
+          </a:p>
+        </p:txBody>
+      </p:sp>
+    </p:spTree>
+    <p:extLst>
+      <p:ext uri="{BB962C8B-B14F-4D97-AF65-F5344CB8AC3E}">
+        <p14:creationId xmlns:p14="http://schemas.microsoft.com/office/powerpoint/2010/main" val="3605160972"/>
+      </p:ext>
+    </p:extLst>
+  </p:cSld>
+  <p:clrMapOvr>
+    <a:masterClrMapping/>
+  </p:clrMapOvr>
+</p:sld>
+</file>
+
+<file path=ppt/slides/slide35.xml><?xml version="1.0" encoding="utf-8"?>
+<p:sld xmlns:a="http://schemas.openxmlformats.org/drawingml/2006/main" xmlns:r="http://schemas.openxmlformats.org/officeDocument/2006/relationships" xmlns:p="http://schemas.openxmlformats.org/presentationml/2006/main">
+  <p:cSld>
+    <p:spTree>
+      <p:nvGrpSpPr>
+        <p:cNvPr id="1" name=""/>
+        <p:cNvGrpSpPr/>
+        <p:nvPr/>
+      </p:nvGrpSpPr>
+      <p:grpSpPr>
+        <a:xfrm>
+          <a:off x="0" y="0"/>
+          <a:ext cx="0" cy="0"/>
+          <a:chOff x="0" y="0"/>
+          <a:chExt cx="0" cy="0"/>
+        </a:xfrm>
+      </p:grpSpPr>
+      <p:sp>
+        <p:nvSpPr>
+          <p:cNvPr id="2" name="Title 1"/>
+          <p:cNvSpPr>
+            <a:spLocks noGrp="1"/>
+          </p:cNvSpPr>
+          <p:nvPr>
+            <p:ph type="title"/>
+          </p:nvPr>
+        </p:nvSpPr>
+        <p:spPr/>
+        <p:txBody>
+          <a:bodyPr/>
+          <a:lstStyle/>
+          <a:p>
+            <a:r>
+              <a:t>Ownership Detection</a:t>
+            </a:r>
+          </a:p>
+        </p:txBody>
+      </p:sp>
+      <p:sp>
+        <p:nvSpPr>
+          <p:cNvPr id="3" name="Content Placeholder 2"/>
+          <p:cNvSpPr>
+            <a:spLocks noGrp="1"/>
+          </p:cNvSpPr>
+          <p:nvPr>
+            <p:ph idx="1"/>
+          </p:nvPr>
+        </p:nvSpPr>
+        <p:spPr/>
+        <p:txBody>
+          <a:bodyPr>
+            <a:normAutofit fontScale="92500" lnSpcReduction="20000"/>
+          </a:bodyPr>
+          <a:lstStyle/>
+          <a:p>
+            <a:r>
+              <a:rPr dirty="0"/>
+              <a:t>Analyze Git history</a:t>
+            </a:r>
+          </a:p>
+          <a:p>
+            <a:r>
+              <a:rPr dirty="0"/>
+              <a:t>Monitor query logs</a:t>
+            </a:r>
+          </a:p>
+          <a:p>
+            <a:r>
+              <a:rPr dirty="0"/>
+              <a:t>Track access patterns</a:t>
+            </a:r>
+          </a:p>
+          <a:p>
+            <a:r>
+              <a:rPr dirty="0"/>
+              <a:t>Infer responsible teams</a:t>
+            </a:r>
+            <a:endParaRPr lang="en-US" dirty="0"/>
+          </a:p>
+          <a:p>
+            <a:r>
+              <a:rPr lang="en-US" b="1" dirty="0"/>
+              <a:t>AI Infers Dataset Owners</a:t>
+            </a:r>
+          </a:p>
+          <a:p>
+            <a:r>
+              <a:rPr lang="en-US" dirty="0"/>
+              <a:t>Methods:</a:t>
+            </a:r>
+          </a:p>
+          <a:p>
+            <a:pPr lvl="1"/>
+            <a:r>
+              <a:rPr lang="en-US" dirty="0"/>
+              <a:t>Git history </a:t>
+            </a:r>
+          </a:p>
+          <a:p>
+            <a:pPr lvl="1"/>
+            <a:r>
+              <a:rPr lang="en-US" dirty="0"/>
+              <a:t>Query logs </a:t>
+            </a:r>
+          </a:p>
+          <a:p>
+            <a:pPr lvl="1"/>
+            <a:r>
+              <a:rPr lang="en-US" dirty="0"/>
+              <a:t>Access patterns </a:t>
+            </a:r>
+          </a:p>
+          <a:p>
+            <a:pPr lvl="1"/>
+            <a:r>
+              <a:rPr lang="en-US" b="1" dirty="0"/>
+              <a:t>Example</a:t>
+            </a:r>
+          </a:p>
+          <a:p>
+            <a:r>
+              <a:rPr lang="en-US" dirty="0"/>
+              <a:t>If Team A modifies a dataset frequently:</a:t>
+            </a:r>
+            <a:br>
+              <a:rPr lang="en-US" dirty="0"/>
+            </a:br>
+            <a:r>
+              <a:rPr lang="en-US" dirty="0"/>
+              <a:t>→ AI suggests Team A as owner.</a:t>
+            </a:r>
+          </a:p>
+          <a:p>
+            <a:endParaRPr dirty="0"/>
+          </a:p>
+        </p:txBody>
+      </p:sp>
+    </p:spTree>
+  </p:cSld>
+  <p:clrMapOvr>
+    <a:masterClrMapping/>
+  </p:clrMapOvr>
+</p:sld>
+</file>
+
+<file path=ppt/slides/slide36.xml><?xml version="1.0" encoding="utf-8"?>
+<p:sld xmlns:a="http://schemas.openxmlformats.org/drawingml/2006/main" xmlns:r="http://schemas.openxmlformats.org/officeDocument/2006/relationships" xmlns:p="http://schemas.openxmlformats.org/presentationml/2006/main">
+  <p:cSld>
+    <p:spTree>
+      <p:nvGrpSpPr>
+        <p:cNvPr id="1" name=""/>
+        <p:cNvGrpSpPr/>
+        <p:nvPr/>
+      </p:nvGrpSpPr>
+      <p:grpSpPr>
+        <a:xfrm>
+          <a:off x="0" y="0"/>
+          <a:ext cx="0" cy="0"/>
+          <a:chOff x="0" y="0"/>
+          <a:chExt cx="0" cy="0"/>
+        </a:xfrm>
+      </p:grpSpPr>
+      <p:sp>
+        <p:nvSpPr>
+          <p:cNvPr id="2" name="Title 1"/>
+          <p:cNvSpPr>
+            <a:spLocks noGrp="1"/>
+          </p:cNvSpPr>
+          <p:nvPr>
+            <p:ph type="title"/>
+          </p:nvPr>
+        </p:nvSpPr>
+        <p:spPr/>
+        <p:txBody>
+          <a:bodyPr/>
+          <a:lstStyle/>
+          <a:p>
+            <a:r>
+              <a:t>SLA Recommendation Engine</a:t>
+            </a:r>
+          </a:p>
+        </p:txBody>
+      </p:sp>
+      <p:sp>
+        <p:nvSpPr>
+          <p:cNvPr id="3" name="Content Placeholder 2"/>
+          <p:cNvSpPr>
+            <a:spLocks noGrp="1"/>
+          </p:cNvSpPr>
+          <p:nvPr>
+            <p:ph idx="1"/>
+          </p:nvPr>
+        </p:nvSpPr>
+        <p:spPr>
+          <a:xfrm>
+            <a:off x="768096" y="2084832"/>
+            <a:ext cx="7290055" cy="4224528"/>
+          </a:xfrm>
+        </p:spPr>
+        <p:txBody>
+          <a:bodyPr>
+            <a:normAutofit fontScale="92500" lnSpcReduction="20000"/>
+          </a:bodyPr>
+          <a:lstStyle/>
+          <a:p>
+            <a:r>
+              <a:rPr dirty="0"/>
+              <a:t>Suggest refresh frequency</a:t>
+            </a:r>
+          </a:p>
+          <a:p>
+            <a:r>
+              <a:rPr dirty="0"/>
+              <a:t>Recommend availability targets</a:t>
+            </a:r>
+          </a:p>
+          <a:p>
+            <a:r>
+              <a:rPr dirty="0"/>
+              <a:t>Estimate retention periods</a:t>
+            </a:r>
+          </a:p>
+          <a:p>
+            <a:r>
+              <a:rPr dirty="0"/>
+              <a:t>Improve governance visibility</a:t>
+            </a:r>
+            <a:endParaRPr lang="en-US" dirty="0"/>
+          </a:p>
+          <a:p>
+            <a:r>
+              <a:rPr lang="en-US" b="1" dirty="0"/>
+              <a:t>SLA = Service Level Agreement</a:t>
+            </a:r>
+          </a:p>
+          <a:p>
+            <a:r>
+              <a:rPr lang="en-US" dirty="0"/>
+              <a:t>Defines:</a:t>
+            </a:r>
+          </a:p>
+          <a:p>
+            <a:pPr lvl="1"/>
+            <a:r>
+              <a:rPr lang="en-US" dirty="0"/>
+              <a:t>Refresh frequency </a:t>
+            </a:r>
+          </a:p>
+          <a:p>
+            <a:pPr lvl="1"/>
+            <a:r>
+              <a:rPr lang="en-US" dirty="0"/>
+              <a:t>Availability expectations </a:t>
+            </a:r>
+          </a:p>
+          <a:p>
+            <a:pPr lvl="1"/>
+            <a:r>
+              <a:rPr lang="en-US" dirty="0"/>
+              <a:t>Retention duration </a:t>
+            </a:r>
+          </a:p>
+          <a:p>
+            <a:r>
+              <a:rPr lang="en-US" b="1" dirty="0"/>
+              <a:t>AI Suggestions</a:t>
+            </a:r>
+          </a:p>
+          <a:p>
+            <a:pPr lvl="1"/>
+            <a:r>
+              <a:rPr lang="en-US" dirty="0"/>
+              <a:t>Hourly refresh </a:t>
+            </a:r>
+          </a:p>
+          <a:p>
+            <a:pPr lvl="1"/>
+            <a:r>
+              <a:rPr lang="en-US" dirty="0"/>
+              <a:t>99.9% uptime </a:t>
+            </a:r>
+          </a:p>
+          <a:p>
+            <a:pPr lvl="1"/>
+            <a:r>
+              <a:rPr lang="en-US" dirty="0"/>
+              <a:t>5-year retention</a:t>
+            </a:r>
+          </a:p>
+          <a:p>
+            <a:endParaRPr dirty="0"/>
+          </a:p>
+        </p:txBody>
+      </p:sp>
+    </p:spTree>
+  </p:cSld>
+  <p:clrMapOvr>
+    <a:masterClrMapping/>
+  </p:clrMapOvr>
+</p:sld>
+</file>
+
+<file path=ppt/slides/slide37.xml><?xml version="1.0" encoding="utf-8"?>
+<p:sld xmlns:a="http://schemas.openxmlformats.org/drawingml/2006/main" xmlns:r="http://schemas.openxmlformats.org/officeDocument/2006/relationships" xmlns:p="http://schemas.openxmlformats.org/presentationml/2006/main">
+  <p:cSld>
+    <p:spTree>
+      <p:nvGrpSpPr>
+        <p:cNvPr id="1" name=""/>
+        <p:cNvGrpSpPr/>
+        <p:nvPr/>
+      </p:nvGrpSpPr>
+      <p:grpSpPr>
+        <a:xfrm>
+          <a:off x="0" y="0"/>
+          <a:ext cx="0" cy="0"/>
+          <a:chOff x="0" y="0"/>
+          <a:chExt cx="0" cy="0"/>
+        </a:xfrm>
+      </p:grpSpPr>
+      <p:sp>
+        <p:nvSpPr>
+          <p:cNvPr id="2" name="Title 1"/>
+          <p:cNvSpPr>
+            <a:spLocks noGrp="1"/>
+          </p:cNvSpPr>
+          <p:nvPr>
+            <p:ph type="title"/>
+          </p:nvPr>
+        </p:nvSpPr>
+        <p:spPr/>
+        <p:txBody>
+          <a:bodyPr/>
+          <a:lstStyle/>
+          <a:p>
+            <a:r>
+              <a:t>Regulatory Compliance</a:t>
+            </a:r>
+          </a:p>
+        </p:txBody>
+      </p:sp>
+      <p:sp>
+        <p:nvSpPr>
+          <p:cNvPr id="3" name="Content Placeholder 2"/>
+          <p:cNvSpPr>
+            <a:spLocks noGrp="1"/>
+          </p:cNvSpPr>
+          <p:nvPr>
+            <p:ph idx="1"/>
+          </p:nvPr>
+        </p:nvSpPr>
+        <p:spPr/>
+        <p:txBody>
+          <a:bodyPr/>
+          <a:lstStyle/>
+          <a:p>
+            <a:r>
+              <a:rPr dirty="0"/>
+              <a:t>GDPR</a:t>
+            </a:r>
+            <a:endParaRPr lang="en-US" dirty="0"/>
+          </a:p>
+          <a:p>
+            <a:pPr lvl="1"/>
+            <a:r>
+              <a:rPr lang="en-IN" dirty="0"/>
+              <a:t>European privacy regulation.</a:t>
+            </a:r>
+            <a:endParaRPr dirty="0"/>
+          </a:p>
+          <a:p>
+            <a:r>
+              <a:rPr dirty="0"/>
+              <a:t>HIPAA</a:t>
+            </a:r>
+            <a:endParaRPr lang="en-US" dirty="0"/>
+          </a:p>
+          <a:p>
+            <a:pPr lvl="1"/>
+            <a:r>
+              <a:rPr lang="en-IN" dirty="0"/>
+              <a:t>Healthcare data protection.</a:t>
+            </a:r>
+            <a:endParaRPr dirty="0"/>
+          </a:p>
+          <a:p>
+            <a:r>
+              <a:rPr dirty="0"/>
+              <a:t>SOC2</a:t>
+            </a:r>
+            <a:endParaRPr lang="en-US" dirty="0"/>
+          </a:p>
+          <a:p>
+            <a:pPr lvl="1"/>
+            <a:r>
+              <a:rPr lang="en-IN" dirty="0"/>
+              <a:t>Security and trust controls.</a:t>
+            </a:r>
+            <a:endParaRPr dirty="0"/>
+          </a:p>
+          <a:p>
+            <a:r>
+              <a:rPr dirty="0"/>
+              <a:t>PCI DSS</a:t>
+            </a:r>
+            <a:endParaRPr lang="en-US" dirty="0"/>
+          </a:p>
+          <a:p>
+            <a:pPr lvl="1"/>
+            <a:r>
+              <a:rPr lang="en-IN" dirty="0"/>
+              <a:t>Payment card security.</a:t>
+            </a:r>
+            <a:endParaRPr dirty="0"/>
+          </a:p>
+        </p:txBody>
+      </p:sp>
+    </p:spTree>
+  </p:cSld>
+  <p:clrMapOvr>
+    <a:masterClrMapping/>
+  </p:clrMapOvr>
+</p:sld>
+</file>
+
+<file path=ppt/slides/slide38.xml><?xml version="1.0" encoding="utf-8"?>
+<p:sld xmlns:a="http://schemas.openxmlformats.org/drawingml/2006/main" xmlns:r="http://schemas.openxmlformats.org/officeDocument/2006/relationships" xmlns:p="http://schemas.openxmlformats.org/presentationml/2006/main">
+  <p:cSld>
+    <p:spTree>
+      <p:nvGrpSpPr>
+        <p:cNvPr id="1" name=""/>
+        <p:cNvGrpSpPr/>
+        <p:nvPr/>
+      </p:nvGrpSpPr>
+      <p:grpSpPr>
+        <a:xfrm>
+          <a:off x="0" y="0"/>
+          <a:ext cx="0" cy="0"/>
+          <a:chOff x="0" y="0"/>
+          <a:chExt cx="0" cy="0"/>
+        </a:xfrm>
+      </p:grpSpPr>
+      <p:sp>
+        <p:nvSpPr>
+          <p:cNvPr id="2" name="Title 1"/>
+          <p:cNvSpPr>
+            <a:spLocks noGrp="1"/>
+          </p:cNvSpPr>
+          <p:nvPr>
+            <p:ph type="title"/>
+          </p:nvPr>
+        </p:nvSpPr>
+        <p:spPr/>
+        <p:txBody>
+          <a:bodyPr/>
+          <a:lstStyle/>
+          <a:p>
+            <a:r>
+              <a:t>GDPR with AI</a:t>
+            </a:r>
+          </a:p>
+        </p:txBody>
+      </p:sp>
+      <p:sp>
+        <p:nvSpPr>
+          <p:cNvPr id="3" name="Content Placeholder 2"/>
+          <p:cNvSpPr>
+            <a:spLocks noGrp="1"/>
+          </p:cNvSpPr>
+          <p:nvPr>
+            <p:ph idx="1"/>
+          </p:nvPr>
+        </p:nvSpPr>
+        <p:spPr/>
+        <p:txBody>
+          <a:bodyPr>
+            <a:normAutofit fontScale="92500" lnSpcReduction="20000"/>
+          </a:bodyPr>
+          <a:lstStyle/>
+          <a:p>
+            <a:r>
+              <a:rPr dirty="0"/>
+              <a:t>Detect personal data</a:t>
+            </a:r>
+          </a:p>
+          <a:p>
+            <a:r>
+              <a:rPr dirty="0"/>
+              <a:t>Monitor retention compliance</a:t>
+            </a:r>
+          </a:p>
+          <a:p>
+            <a:r>
+              <a:rPr dirty="0"/>
+              <a:t>Enable right-to-delete workflows</a:t>
+            </a:r>
+          </a:p>
+          <a:p>
+            <a:r>
+              <a:rPr dirty="0"/>
+              <a:t>Generate compliance reports</a:t>
+            </a:r>
+            <a:endParaRPr lang="en-US" dirty="0"/>
+          </a:p>
+          <a:p>
+            <a:r>
+              <a:rPr lang="en-IN" b="1" dirty="0"/>
+              <a:t>AI Supports GDPR</a:t>
+            </a:r>
+          </a:p>
+          <a:p>
+            <a:r>
+              <a:rPr lang="en-IN" dirty="0"/>
+              <a:t>Capabilities:</a:t>
+            </a:r>
+          </a:p>
+          <a:p>
+            <a:pPr lvl="1"/>
+            <a:r>
+              <a:rPr lang="en-IN" dirty="0"/>
+              <a:t>Detect personal data </a:t>
+            </a:r>
+          </a:p>
+          <a:p>
+            <a:pPr lvl="1"/>
+            <a:r>
+              <a:rPr lang="en-IN" dirty="0"/>
+              <a:t>Monitor retention rules </a:t>
+            </a:r>
+          </a:p>
+          <a:p>
+            <a:pPr lvl="1"/>
+            <a:r>
+              <a:rPr lang="en-IN" dirty="0"/>
+              <a:t>Enable delete workflows </a:t>
+            </a:r>
+          </a:p>
+          <a:p>
+            <a:pPr lvl="1"/>
+            <a:r>
+              <a:rPr lang="en-IN" dirty="0"/>
+              <a:t>Generate compliance reports </a:t>
+            </a:r>
+          </a:p>
+          <a:p>
+            <a:r>
+              <a:rPr lang="en-IN" b="1" dirty="0"/>
+              <a:t>Example</a:t>
+            </a:r>
+          </a:p>
+          <a:p>
+            <a:r>
+              <a:rPr lang="en-IN" dirty="0"/>
+              <a:t>“Delete user data upon request.”</a:t>
+            </a:r>
+          </a:p>
+          <a:p>
+            <a:endParaRPr dirty="0"/>
+          </a:p>
+        </p:txBody>
+      </p:sp>
+    </p:spTree>
+  </p:cSld>
+  <p:clrMapOvr>
+    <a:masterClrMapping/>
+  </p:clrMapOvr>
+</p:sld>
+</file>
+
+<file path=ppt/slides/slide39.xml><?xml version="1.0" encoding="utf-8"?>
+<p:sld xmlns:a="http://schemas.openxmlformats.org/drawingml/2006/main" xmlns:r="http://schemas.openxmlformats.org/officeDocument/2006/relationships" xmlns:p="http://schemas.openxmlformats.org/presentationml/2006/main">
+  <p:cSld>
+    <p:spTree>
+      <p:nvGrpSpPr>
+        <p:cNvPr id="1" name=""/>
+        <p:cNvGrpSpPr/>
+        <p:nvPr/>
+      </p:nvGrpSpPr>
+      <p:grpSpPr>
+        <a:xfrm>
+          <a:off x="0" y="0"/>
+          <a:ext cx="0" cy="0"/>
+          <a:chOff x="0" y="0"/>
+          <a:chExt cx="0" cy="0"/>
+        </a:xfrm>
+      </p:grpSpPr>
+      <p:sp>
+        <p:nvSpPr>
+          <p:cNvPr id="2" name="Title 1"/>
+          <p:cNvSpPr>
+            <a:spLocks noGrp="1"/>
+          </p:cNvSpPr>
+          <p:nvPr>
+            <p:ph type="title"/>
+          </p:nvPr>
+        </p:nvSpPr>
+        <p:spPr/>
+        <p:txBody>
+          <a:bodyPr/>
+          <a:lstStyle/>
+          <a:p>
+            <a:r>
+              <a:t>HIPAA Compliance</a:t>
+            </a:r>
+          </a:p>
+        </p:txBody>
+      </p:sp>
+      <p:sp>
+        <p:nvSpPr>
+          <p:cNvPr id="3" name="Content Placeholder 2"/>
+          <p:cNvSpPr>
+            <a:spLocks noGrp="1"/>
+          </p:cNvSpPr>
+          <p:nvPr>
+            <p:ph idx="1"/>
+          </p:nvPr>
+        </p:nvSpPr>
+        <p:spPr/>
+        <p:txBody>
+          <a:bodyPr>
+            <a:normAutofit fontScale="92500" lnSpcReduction="10000"/>
+          </a:bodyPr>
+          <a:lstStyle/>
+          <a:p>
+            <a:r>
+              <a:rPr dirty="0"/>
+              <a:t>Protect healthcare information</a:t>
+            </a:r>
+          </a:p>
+          <a:p>
+            <a:r>
+              <a:rPr dirty="0"/>
+              <a:t>Detect PHI automatically</a:t>
+            </a:r>
+          </a:p>
+          <a:p>
+            <a:r>
+              <a:rPr dirty="0"/>
+              <a:t>Monitor healthcare access</a:t>
+            </a:r>
+          </a:p>
+          <a:p>
+            <a:r>
+              <a:rPr dirty="0"/>
+              <a:t>Generate audit trails</a:t>
+            </a:r>
+            <a:endParaRPr lang="en-US" dirty="0"/>
+          </a:p>
+          <a:p>
+            <a:r>
+              <a:rPr lang="en-US" b="1" dirty="0"/>
+              <a:t>Healthcare Governance</a:t>
+            </a:r>
+          </a:p>
+          <a:p>
+            <a:r>
+              <a:rPr lang="en-US" dirty="0"/>
+              <a:t>AI helps:</a:t>
+            </a:r>
+          </a:p>
+          <a:p>
+            <a:pPr lvl="1"/>
+            <a:r>
+              <a:rPr lang="en-US" dirty="0"/>
+              <a:t>Detect PHI (Protected Health Information) </a:t>
+            </a:r>
+          </a:p>
+          <a:p>
+            <a:pPr lvl="1"/>
+            <a:r>
+              <a:rPr lang="en-US" dirty="0"/>
+              <a:t>Monitor healthcare access </a:t>
+            </a:r>
+          </a:p>
+          <a:p>
+            <a:pPr lvl="1"/>
+            <a:r>
+              <a:rPr lang="en-US" dirty="0"/>
+              <a:t>Generate audit logs </a:t>
+            </a:r>
+          </a:p>
+          <a:p>
+            <a:r>
+              <a:rPr lang="en-US" b="1" dirty="0"/>
+              <a:t>Important for:</a:t>
+            </a:r>
+          </a:p>
+          <a:p>
+            <a:r>
+              <a:rPr lang="en-US" dirty="0"/>
+              <a:t>Hospitals and healthcare systems.</a:t>
+            </a:r>
+          </a:p>
+          <a:p>
+            <a:endParaRPr dirty="0"/>
+          </a:p>
+        </p:txBody>
+      </p:sp>
+    </p:spTree>
+  </p:cSld>
+  <p:clrMapOvr>
+    <a:masterClrMapping/>
+  </p:clrMapOvr>
+</p:sld>
+</file>
+
+<file path=ppt/slides/slide4.xml><?xml version="1.0" encoding="utf-8"?>
+<p:sld xmlns:a="http://schemas.openxmlformats.org/drawingml/2006/main" xmlns:r="http://schemas.openxmlformats.org/officeDocument/2006/relationships" xmlns:p="http://schemas.openxmlformats.org/presentationml/2006/main">
+  <p:cSld>
+    <p:spTree>
+      <p:nvGrpSpPr>
+        <p:cNvPr id="1" name=""/>
+        <p:cNvGrpSpPr/>
+        <p:nvPr/>
+      </p:nvGrpSpPr>
+      <p:grpSpPr>
+        <a:xfrm>
+          <a:off x="0" y="0"/>
+          <a:ext cx="0" cy="0"/>
+          <a:chOff x="0" y="0"/>
+          <a:chExt cx="0" cy="0"/>
+        </a:xfrm>
+      </p:grpSpPr>
+      <p:sp>
+        <p:nvSpPr>
+          <p:cNvPr id="2" name="Title 1">
+            <a:extLst>
+              <a:ext uri="{FF2B5EF4-FFF2-40B4-BE49-F238E27FC236}">
+                <a16:creationId xmlns:a16="http://schemas.microsoft.com/office/drawing/2014/main" id="{408E1FC2-7199-1458-690B-92497B118278}"/>
+              </a:ext>
+            </a:extLst>
+          </p:cNvPr>
+          <p:cNvSpPr>
+            <a:spLocks noGrp="1"/>
+          </p:cNvSpPr>
+          <p:nvPr>
+            <p:ph type="title"/>
+          </p:nvPr>
+        </p:nvSpPr>
+        <p:spPr/>
+        <p:txBody>
+          <a:bodyPr/>
+          <a:lstStyle/>
+          <a:p>
+            <a:r>
+              <a:rPr lang="en-US" dirty="0"/>
+              <a:t>CONTD</a:t>
+            </a:r>
+            <a:endParaRPr lang="en-IN" dirty="0"/>
+          </a:p>
+        </p:txBody>
+      </p:sp>
+      <p:sp>
+        <p:nvSpPr>
+          <p:cNvPr id="3" name="Content Placeholder 2">
+            <a:extLst>
+              <a:ext uri="{FF2B5EF4-FFF2-40B4-BE49-F238E27FC236}">
+                <a16:creationId xmlns:a16="http://schemas.microsoft.com/office/drawing/2014/main" id="{8FDA2EA5-A065-87B0-8124-E19427F4E770}"/>
+              </a:ext>
+            </a:extLst>
+          </p:cNvPr>
+          <p:cNvSpPr>
+            <a:spLocks noGrp="1"/>
+          </p:cNvSpPr>
+          <p:nvPr>
+            <p:ph idx="1"/>
+          </p:nvPr>
+        </p:nvSpPr>
+        <p:spPr/>
+        <p:txBody>
+          <a:bodyPr>
+            <a:normAutofit fontScale="92500" lnSpcReduction="10000"/>
+          </a:bodyPr>
+          <a:lstStyle/>
+          <a:p>
+            <a:r>
+              <a:rPr lang="en-US" b="1" dirty="0"/>
+              <a:t>Key Points</a:t>
+            </a:r>
+          </a:p>
+          <a:p>
+            <a:r>
+              <a:rPr lang="en-US" dirty="0"/>
+              <a:t>Track upstream/downstream systems </a:t>
+            </a:r>
+          </a:p>
+          <a:p>
+            <a:r>
+              <a:rPr lang="en-US" dirty="0"/>
+              <a:t>Understand dependencies </a:t>
+            </a:r>
+          </a:p>
+          <a:p>
+            <a:r>
+              <a:rPr lang="en-US" dirty="0"/>
+              <a:t>Perform impact analysis </a:t>
+            </a:r>
+          </a:p>
+          <a:p>
+            <a:r>
+              <a:rPr lang="en-US" dirty="0"/>
+              <a:t>Auto-generate lineage diagrams </a:t>
+            </a:r>
+          </a:p>
+          <a:p>
+            <a:r>
+              <a:rPr lang="en-US" b="1" dirty="0"/>
+              <a:t>Why Important?</a:t>
+            </a:r>
+          </a:p>
+          <a:p>
+            <a:r>
+              <a:rPr lang="en-US" dirty="0"/>
+              <a:t>If a source table changes:</a:t>
+            </a:r>
+          </a:p>
+          <a:p>
+            <a:r>
+              <a:rPr lang="en-US" dirty="0"/>
+              <a:t>Which reports break? </a:t>
+            </a:r>
+          </a:p>
+          <a:p>
+            <a:r>
+              <a:rPr lang="en-US" dirty="0"/>
+              <a:t>Which ML models fail? </a:t>
+            </a:r>
+          </a:p>
+          <a:p>
+            <a:r>
+              <a:rPr lang="en-US" dirty="0"/>
+              <a:t>Which downstream pipelines are affected?</a:t>
+            </a:r>
+            <a:endParaRPr lang="en-IN" dirty="0"/>
+          </a:p>
+        </p:txBody>
+      </p:sp>
+    </p:spTree>
+    <p:extLst>
+      <p:ext uri="{BB962C8B-B14F-4D97-AF65-F5344CB8AC3E}">
+        <p14:creationId xmlns:p14="http://schemas.microsoft.com/office/powerpoint/2010/main" val="3578660362"/>
+      </p:ext>
+    </p:extLst>
+  </p:cSld>
+  <p:clrMapOvr>
+    <a:masterClrMapping/>
+  </p:clrMapOvr>
+</p:sld>
+</file>
+
+<file path=ppt/slides/slide40.xml><?xml version="1.0" encoding="utf-8"?>
+<p:sld xmlns:a="http://schemas.openxmlformats.org/drawingml/2006/main" xmlns:r="http://schemas.openxmlformats.org/officeDocument/2006/relationships" xmlns:p="http://schemas.openxmlformats.org/presentationml/2006/main">
+  <p:cSld>
+    <p:spTree>
+      <p:nvGrpSpPr>
+        <p:cNvPr id="1" name=""/>
+        <p:cNvGrpSpPr/>
+        <p:nvPr/>
+      </p:nvGrpSpPr>
+      <p:grpSpPr>
+        <a:xfrm>
+          <a:off x="0" y="0"/>
+          <a:ext cx="0" cy="0"/>
+          <a:chOff x="0" y="0"/>
+          <a:chExt cx="0" cy="0"/>
+        </a:xfrm>
+      </p:grpSpPr>
+      <p:sp>
+        <p:nvSpPr>
+          <p:cNvPr id="2" name="Title 1"/>
+          <p:cNvSpPr>
+            <a:spLocks noGrp="1"/>
+          </p:cNvSpPr>
+          <p:nvPr>
+            <p:ph type="title"/>
+          </p:nvPr>
+        </p:nvSpPr>
+        <p:spPr/>
+        <p:txBody>
+          <a:bodyPr/>
+          <a:lstStyle/>
+          <a:p>
+            <a:r>
+              <a:t>SOC2 Compliance</a:t>
+            </a:r>
+          </a:p>
+        </p:txBody>
+      </p:sp>
+      <p:sp>
+        <p:nvSpPr>
+          <p:cNvPr id="3" name="Content Placeholder 2"/>
+          <p:cNvSpPr>
+            <a:spLocks noGrp="1"/>
+          </p:cNvSpPr>
+          <p:nvPr>
+            <p:ph idx="1"/>
+          </p:nvPr>
+        </p:nvSpPr>
+        <p:spPr/>
+        <p:txBody>
+          <a:bodyPr>
+            <a:normAutofit fontScale="77500" lnSpcReduction="20000"/>
+          </a:bodyPr>
+          <a:lstStyle/>
+          <a:p>
+            <a:r>
+              <a:rPr dirty="0"/>
+              <a:t>Ensure confidentiality</a:t>
+            </a:r>
+          </a:p>
+          <a:p>
+            <a:r>
+              <a:rPr dirty="0"/>
+              <a:t>Monitor system security</a:t>
+            </a:r>
+          </a:p>
+          <a:p>
+            <a:r>
+              <a:rPr dirty="0"/>
+              <a:t>Track integrity controls</a:t>
+            </a:r>
+          </a:p>
+          <a:p>
+            <a:r>
+              <a:rPr dirty="0"/>
+              <a:t>Support audit readiness</a:t>
+            </a:r>
+            <a:endParaRPr lang="en-US" dirty="0"/>
+          </a:p>
+          <a:p>
+            <a:r>
+              <a:rPr lang="en-US" b="1" dirty="0"/>
+              <a:t>Security Governance</a:t>
+            </a:r>
+          </a:p>
+          <a:p>
+            <a:r>
+              <a:rPr lang="en-US" dirty="0"/>
+              <a:t>SOC2 focuses on:</a:t>
+            </a:r>
+          </a:p>
+          <a:p>
+            <a:pPr lvl="1"/>
+            <a:r>
+              <a:rPr lang="en-US" dirty="0"/>
+              <a:t>Confidentiality </a:t>
+            </a:r>
+          </a:p>
+          <a:p>
+            <a:pPr lvl="1"/>
+            <a:r>
+              <a:rPr lang="en-US" dirty="0"/>
+              <a:t>Security </a:t>
+            </a:r>
+          </a:p>
+          <a:p>
+            <a:pPr lvl="1"/>
+            <a:r>
+              <a:rPr lang="en-US" dirty="0"/>
+              <a:t>Integrity </a:t>
+            </a:r>
+          </a:p>
+          <a:p>
+            <a:pPr lvl="1"/>
+            <a:r>
+              <a:rPr lang="en-US" dirty="0"/>
+              <a:t>Availability </a:t>
+            </a:r>
+          </a:p>
+          <a:p>
+            <a:r>
+              <a:rPr lang="en-US" b="1" dirty="0"/>
+              <a:t>AI Role</a:t>
+            </a:r>
+          </a:p>
+          <a:p>
+            <a:pPr lvl="1"/>
+            <a:r>
+              <a:rPr lang="en-US" dirty="0"/>
+              <a:t>Detect violations </a:t>
+            </a:r>
+          </a:p>
+          <a:p>
+            <a:pPr lvl="1"/>
+            <a:r>
+              <a:rPr lang="en-US" dirty="0"/>
+              <a:t>Monitor controls </a:t>
+            </a:r>
+          </a:p>
+          <a:p>
+            <a:pPr lvl="1"/>
+            <a:r>
+              <a:rPr lang="en-US" dirty="0"/>
+              <a:t>Improve audit readiness</a:t>
+            </a:r>
+          </a:p>
+          <a:p>
+            <a:endParaRPr dirty="0"/>
+          </a:p>
+        </p:txBody>
+      </p:sp>
+    </p:spTree>
+  </p:cSld>
+  <p:clrMapOvr>
+    <a:masterClrMapping/>
+  </p:clrMapOvr>
+</p:sld>
+</file>
+
+<file path=ppt/slides/slide41.xml><?xml version="1.0" encoding="utf-8"?>
+<p:sld xmlns:a="http://schemas.openxmlformats.org/drawingml/2006/main" xmlns:r="http://schemas.openxmlformats.org/officeDocument/2006/relationships" xmlns:p="http://schemas.openxmlformats.org/presentationml/2006/main">
+  <p:cSld>
+    <p:bg>
+      <p:bgPr>
+        <a:solidFill>
+          <a:srgbClr val="1B3A4B"/>
+        </a:solidFill>
+        <a:effectLst/>
+      </p:bgPr>
+    </p:bg>
+    <p:spTree>
+      <p:nvGrpSpPr>
+        <p:cNvPr id="1" name=""/>
+        <p:cNvGrpSpPr/>
+        <p:nvPr/>
+      </p:nvGrpSpPr>
+      <p:grpSpPr>
+        <a:xfrm>
+          <a:off x="0" y="0"/>
+          <a:ext cx="0" cy="0"/>
+          <a:chOff x="0" y="0"/>
+          <a:chExt cx="0" cy="0"/>
+        </a:xfrm>
+      </p:grpSpPr>
+      <p:sp>
+        <p:nvSpPr>
+          <p:cNvPr id="10" name="TopBar"/>
+          <p:cNvSpPr/>
+          <p:nvPr/>
+        </p:nvSpPr>
+        <p:spPr>
+          <a:xfrm>
+            <a:off x="914400" y="2148840"/>
+            <a:ext cx="7315200" cy="45720"/>
+          </a:xfrm>
+          <a:prstGeom prst="rect">
+            <a:avLst/>
+          </a:prstGeom>
+          <a:solidFill>
+            <a:srgbClr val="1CADE4"/>
+          </a:solidFill>
+          <a:ln>
+            <a:noFill/>
+          </a:ln>
+        </p:spPr>
+        <p:txBody>
+          <a:bodyPr/>
+          <a:lstStyle/>
+          <a:p>
+            <a:endParaRPr lang="en-IN"/>
+          </a:p>
+        </p:txBody>
+      </p:sp>
+      <p:sp>
+        <p:nvSpPr>
+          <p:cNvPr id="11" name="LabTag"/>
+          <p:cNvSpPr/>
+          <p:nvPr/>
+        </p:nvSpPr>
+        <p:spPr>
+          <a:xfrm>
+            <a:off x="3657600" y="2377440"/>
+            <a:ext cx="1828800" cy="548640"/>
+          </a:xfrm>
+          <a:prstGeom prst="roundRect">
+            <a:avLst>
+              <a:gd name="adj" fmla="val 16667"/>
+            </a:avLst>
+          </a:prstGeom>
+          <a:solidFill>
+            <a:srgbClr val="1CADE4"/>
+          </a:solidFill>
+          <a:ln>
+            <a:noFill/>
+          </a:ln>
+        </p:spPr>
+        <p:txBody>
+          <a:bodyPr wrap="square" lIns="0" tIns="0" rIns="0" bIns="0" anchor="ctr"/>
+          <a:lstStyle/>
+          <a:p>
+            <a:pPr algn="ctr"/>
+            <a:r>
+              <a:rPr lang="en-US" sz="2000" b="1" spc="400">
+                <a:solidFill>
+                  <a:srgbClr val="FFFFFF"/>
+                </a:solidFill>
+                <a:latin typeface="Trebuchet MS"/>
+              </a:rPr>
+              <a:t>LAB 8</a:t>
+            </a:r>
+          </a:p>
+        </p:txBody>
+      </p:sp>
+      <p:sp>
+        <p:nvSpPr>
+          <p:cNvPr id="12" name="MainTitle"/>
+          <p:cNvSpPr/>
+          <p:nvPr/>
+        </p:nvSpPr>
+        <p:spPr>
+          <a:xfrm>
+            <a:off x="914400" y="3148965"/>
+            <a:ext cx="7315200" cy="914400"/>
+          </a:xfrm>
+          <a:prstGeom prst="rect">
+            <a:avLst/>
+          </a:prstGeom>
+          <a:noFill/>
+          <a:ln>
+            <a:noFill/>
+          </a:ln>
+        </p:spPr>
+        <p:txBody>
+          <a:bodyPr wrap="square" lIns="0" tIns="0" rIns="0" bIns="0" anchor="ctr"/>
+          <a:lstStyle/>
+          <a:p>
+            <a:pPr algn="ctr"/>
+            <a:r>
+              <a:rPr lang="en-US" sz="4400" b="1">
+                <a:solidFill>
+                  <a:srgbClr val="FFFFFF"/>
+                </a:solidFill>
+                <a:latin typeface="Trebuchet MS"/>
+              </a:rPr>
+              <a:t>Hands-On Activity</a:t>
+            </a:r>
+          </a:p>
+        </p:txBody>
+      </p:sp>
+      <p:sp>
+        <p:nvSpPr>
+          <p:cNvPr id="13" name="Subtitle"/>
+          <p:cNvSpPr/>
+          <p:nvPr/>
+        </p:nvSpPr>
+        <p:spPr>
+          <a:xfrm>
+            <a:off x="1828800" y="4130040"/>
+            <a:ext cx="5486400" cy="548640"/>
+          </a:xfrm>
+          <a:prstGeom prst="rect">
+            <a:avLst/>
+          </a:prstGeom>
+          <a:noFill/>
+          <a:ln>
+            <a:noFill/>
+          </a:ln>
+        </p:spPr>
+        <p:txBody>
+          <a:bodyPr wrap="square" lIns="0" tIns="0" rIns="0" bIns="0" anchor="t"/>
+          <a:lstStyle/>
+          <a:p>
+            <a:pPr algn="ctr"/>
+            <a:r>
+              <a:rPr lang="en-US" sz="1800">
+                <a:solidFill>
+                  <a:srgbClr val="8BB8D0"/>
+                </a:solidFill>
+                <a:latin typeface="Calibri"/>
+              </a:rPr>
+              <a:t>SOC2 Compliance Automation</a:t>
+            </a:r>
+          </a:p>
+        </p:txBody>
+      </p:sp>
+      <p:sp>
+        <p:nvSpPr>
+          <p:cNvPr id="14" name="BottomBar"/>
+          <p:cNvSpPr/>
+          <p:nvPr/>
+        </p:nvSpPr>
+        <p:spPr>
+          <a:xfrm>
+            <a:off x="914400" y="4892040"/>
+            <a:ext cx="7315200" cy="45720"/>
+          </a:xfrm>
+          <a:prstGeom prst="rect">
+            <a:avLst/>
+          </a:prstGeom>
+          <a:solidFill>
+            <a:srgbClr val="1CADE4"/>
+          </a:solidFill>
+          <a:ln>
+            <a:noFill/>
+          </a:ln>
+        </p:spPr>
+        <p:txBody>
+          <a:bodyPr/>
+          <a:lstStyle/>
+          <a:p>
+            <a:endParaRPr lang="en-IN"/>
+          </a:p>
+        </p:txBody>
+      </p:sp>
+    </p:spTree>
+    <p:extLst>
+      <p:ext uri="{BB962C8B-B14F-4D97-AF65-F5344CB8AC3E}">
+        <p14:creationId xmlns:p14="http://schemas.microsoft.com/office/powerpoint/2010/main" val="1567317134"/>
+      </p:ext>
+    </p:extLst>
+  </p:cSld>
+  <p:clrMapOvr>
+    <a:masterClrMapping/>
+  </p:clrMapOvr>
+</p:sld>
+</file>
+
+<file path=ppt/slides/slide42.xml><?xml version="1.0" encoding="utf-8"?>
+<p:sld xmlns:a="http://schemas.openxmlformats.org/drawingml/2006/main" xmlns:r="http://schemas.openxmlformats.org/officeDocument/2006/relationships" xmlns:p="http://schemas.openxmlformats.org/presentationml/2006/main">
+  <p:cSld>
+    <p:spTree>
+      <p:nvGrpSpPr>
+        <p:cNvPr id="1" name=""/>
+        <p:cNvGrpSpPr/>
+        <p:nvPr/>
+      </p:nvGrpSpPr>
+      <p:grpSpPr>
+        <a:xfrm>
+          <a:off x="0" y="0"/>
+          <a:ext cx="0" cy="0"/>
+          <a:chOff x="0" y="0"/>
+          <a:chExt cx="0" cy="0"/>
+        </a:xfrm>
+      </p:grpSpPr>
+      <p:sp>
+        <p:nvSpPr>
+          <p:cNvPr id="2" name="Title 1"/>
+          <p:cNvSpPr>
+            <a:spLocks noGrp="1"/>
+          </p:cNvSpPr>
+          <p:nvPr>
+            <p:ph type="title"/>
+          </p:nvPr>
+        </p:nvSpPr>
+        <p:spPr/>
+        <p:txBody>
+          <a:bodyPr/>
+          <a:lstStyle/>
+          <a:p>
+            <a:r>
+              <a:t>AI-Assisted Compliance Monitoring</a:t>
+            </a:r>
+          </a:p>
+        </p:txBody>
+      </p:sp>
+      <p:sp>
+        <p:nvSpPr>
+          <p:cNvPr id="3" name="Content Placeholder 2"/>
+          <p:cNvSpPr>
+            <a:spLocks noGrp="1"/>
+          </p:cNvSpPr>
+          <p:nvPr>
+            <p:ph idx="1"/>
+          </p:nvPr>
+        </p:nvSpPr>
+        <p:spPr/>
+        <p:txBody>
+          <a:bodyPr>
+            <a:normAutofit fontScale="85000" lnSpcReduction="20000"/>
+          </a:bodyPr>
+          <a:lstStyle/>
+          <a:p>
+            <a:r>
+              <a:rPr dirty="0"/>
+              <a:t>Detect policy violations</a:t>
+            </a:r>
+          </a:p>
+          <a:p>
+            <a:r>
+              <a:rPr dirty="0"/>
+              <a:t>Identify unauthorized access</a:t>
+            </a:r>
+          </a:p>
+          <a:p>
+            <a:r>
+              <a:rPr dirty="0"/>
+              <a:t>Monitor encryption coverage</a:t>
+            </a:r>
+          </a:p>
+          <a:p>
+            <a:r>
+              <a:rPr dirty="0"/>
+              <a:t>Generate compliance alerts</a:t>
+            </a:r>
+            <a:endParaRPr lang="en-US" dirty="0"/>
+          </a:p>
+          <a:p>
+            <a:r>
+              <a:rPr lang="en-US" b="1" dirty="0"/>
+              <a:t>Continuous Monitoring</a:t>
+            </a:r>
+          </a:p>
+          <a:p>
+            <a:r>
+              <a:rPr lang="en-US" dirty="0"/>
+              <a:t>AI can:</a:t>
+            </a:r>
+          </a:p>
+          <a:p>
+            <a:pPr lvl="1"/>
+            <a:r>
+              <a:rPr lang="en-US" dirty="0"/>
+              <a:t>Detect unauthorized access </a:t>
+            </a:r>
+          </a:p>
+          <a:p>
+            <a:pPr lvl="1"/>
+            <a:r>
+              <a:rPr lang="en-US" dirty="0"/>
+              <a:t>Check encryption coverage </a:t>
+            </a:r>
+          </a:p>
+          <a:p>
+            <a:pPr lvl="1"/>
+            <a:r>
+              <a:rPr lang="en-US" dirty="0"/>
+              <a:t>Identify policy violations </a:t>
+            </a:r>
+          </a:p>
+          <a:p>
+            <a:pPr lvl="1"/>
+            <a:r>
+              <a:rPr lang="en-US" dirty="0"/>
+              <a:t>Generate alerts </a:t>
+            </a:r>
+          </a:p>
+          <a:p>
+            <a:r>
+              <a:rPr lang="en-US" b="1" dirty="0"/>
+              <a:t>Example</a:t>
+            </a:r>
+          </a:p>
+          <a:p>
+            <a:r>
+              <a:rPr lang="en-US" dirty="0"/>
+              <a:t>Alert if:</a:t>
+            </a:r>
+            <a:br>
+              <a:rPr lang="en-US" dirty="0"/>
+            </a:br>
+            <a:r>
+              <a:rPr lang="en-US" dirty="0"/>
+              <a:t>Sensitive table accessed by unauthorized user.</a:t>
+            </a:r>
+          </a:p>
+          <a:p>
+            <a:endParaRPr dirty="0"/>
+          </a:p>
+        </p:txBody>
+      </p:sp>
+    </p:spTree>
+  </p:cSld>
+  <p:clrMapOvr>
+    <a:masterClrMapping/>
+  </p:clrMapOvr>
+</p:sld>
+</file>
+
+<file path=ppt/slides/slide43.xml><?xml version="1.0" encoding="utf-8"?>
+<p:sld xmlns:a="http://schemas.openxmlformats.org/drawingml/2006/main" xmlns:r="http://schemas.openxmlformats.org/officeDocument/2006/relationships" xmlns:p="http://schemas.openxmlformats.org/presentationml/2006/main">
+  <p:cSld>
+    <p:spTree>
+      <p:nvGrpSpPr>
+        <p:cNvPr id="1" name=""/>
+        <p:cNvGrpSpPr/>
+        <p:nvPr/>
+      </p:nvGrpSpPr>
+      <p:grpSpPr>
+        <a:xfrm>
+          <a:off x="0" y="0"/>
+          <a:ext cx="0" cy="0"/>
+          <a:chOff x="0" y="0"/>
+          <a:chExt cx="0" cy="0"/>
+        </a:xfrm>
+      </p:grpSpPr>
+      <p:sp>
+        <p:nvSpPr>
+          <p:cNvPr id="2" name="Title 1"/>
+          <p:cNvSpPr>
+            <a:spLocks noGrp="1"/>
+          </p:cNvSpPr>
+          <p:nvPr>
+            <p:ph type="title"/>
+          </p:nvPr>
+        </p:nvSpPr>
+        <p:spPr/>
+        <p:txBody>
+          <a:bodyPr/>
+          <a:lstStyle/>
+          <a:p>
+            <a:r>
+              <a:t>Governance Platforms</a:t>
+            </a:r>
+          </a:p>
+        </p:txBody>
+      </p:sp>
+      <p:sp>
+        <p:nvSpPr>
+          <p:cNvPr id="3" name="Content Placeholder 2"/>
+          <p:cNvSpPr>
+            <a:spLocks noGrp="1"/>
+          </p:cNvSpPr>
+          <p:nvPr>
+            <p:ph idx="1"/>
+          </p:nvPr>
+        </p:nvSpPr>
+        <p:spPr/>
+        <p:txBody>
+          <a:bodyPr/>
+          <a:lstStyle/>
+          <a:p>
+            <a:r>
+              <a:rPr lang="en-IN" b="1" dirty="0"/>
+              <a:t>Popular Governance Tools</a:t>
+            </a:r>
+          </a:p>
+          <a:p>
+            <a:r>
+              <a:rPr lang="en-IN" b="1" dirty="0" err="1"/>
+              <a:t>DataHub</a:t>
+            </a:r>
+            <a:endParaRPr lang="en-IN" b="1" dirty="0"/>
+          </a:p>
+          <a:p>
+            <a:pPr lvl="1"/>
+            <a:r>
+              <a:rPr lang="en-IN" dirty="0"/>
+              <a:t>Metadata discovery platform.</a:t>
+            </a:r>
+          </a:p>
+          <a:p>
+            <a:r>
+              <a:rPr lang="en-IN" b="1" dirty="0" err="1"/>
+              <a:t>OpenMetadata</a:t>
+            </a:r>
+            <a:endParaRPr lang="en-IN" b="1" dirty="0"/>
+          </a:p>
+          <a:p>
+            <a:pPr lvl="1"/>
+            <a:r>
+              <a:rPr lang="en-IN" dirty="0"/>
+              <a:t>Metadata + lineage + governance.</a:t>
+            </a:r>
+          </a:p>
+          <a:p>
+            <a:r>
+              <a:rPr lang="en-IN" b="1" dirty="0"/>
+              <a:t>Collibra</a:t>
+            </a:r>
+          </a:p>
+          <a:p>
+            <a:pPr lvl="1"/>
+            <a:r>
+              <a:rPr lang="en-IN" dirty="0"/>
+              <a:t>Enterprise governance tool.</a:t>
+            </a:r>
+          </a:p>
+          <a:p>
+            <a:r>
+              <a:rPr lang="en-IN" b="1" dirty="0"/>
+              <a:t>Microsoft Purview</a:t>
+            </a:r>
+          </a:p>
+          <a:p>
+            <a:pPr lvl="1"/>
+            <a:r>
+              <a:rPr lang="en-IN" dirty="0"/>
+              <a:t>Azure-native governance solution.</a:t>
+            </a:r>
+          </a:p>
+        </p:txBody>
+      </p:sp>
+    </p:spTree>
+  </p:cSld>
+  <p:clrMapOvr>
+    <a:masterClrMapping/>
+  </p:clrMapOvr>
+</p:sld>
+</file>
+
+<file path=ppt/slides/slide44.xml><?xml version="1.0" encoding="utf-8"?>
+<p:sld xmlns:a="http://schemas.openxmlformats.org/drawingml/2006/main" xmlns:r="http://schemas.openxmlformats.org/officeDocument/2006/relationships" xmlns:p="http://schemas.openxmlformats.org/presentationml/2006/main">
+  <p:cSld>
+    <p:spTree>
+      <p:nvGrpSpPr>
+        <p:cNvPr id="1" name=""/>
+        <p:cNvGrpSpPr/>
+        <p:nvPr/>
+      </p:nvGrpSpPr>
+      <p:grpSpPr>
+        <a:xfrm>
+          <a:off x="0" y="0"/>
+          <a:ext cx="0" cy="0"/>
+          <a:chOff x="0" y="0"/>
+          <a:chExt cx="0" cy="0"/>
+        </a:xfrm>
+      </p:grpSpPr>
+      <p:sp>
+        <p:nvSpPr>
+          <p:cNvPr id="2" name="Title 1"/>
+          <p:cNvSpPr>
+            <a:spLocks noGrp="1"/>
+          </p:cNvSpPr>
+          <p:nvPr>
+            <p:ph type="title"/>
+          </p:nvPr>
+        </p:nvSpPr>
+        <p:spPr/>
+        <p:txBody>
+          <a:bodyPr/>
+          <a:lstStyle/>
+          <a:p>
+            <a:r>
+              <a:t>DataHub Integration</a:t>
+            </a:r>
+          </a:p>
+        </p:txBody>
+      </p:sp>
+      <p:sp>
+        <p:nvSpPr>
+          <p:cNvPr id="3" name="Content Placeholder 2"/>
+          <p:cNvSpPr>
+            <a:spLocks noGrp="1"/>
+          </p:cNvSpPr>
+          <p:nvPr>
+            <p:ph idx="1"/>
+          </p:nvPr>
+        </p:nvSpPr>
+        <p:spPr/>
+        <p:txBody>
+          <a:bodyPr>
+            <a:normAutofit fontScale="92500" lnSpcReduction="20000"/>
+          </a:bodyPr>
+          <a:lstStyle/>
+          <a:p>
+            <a:r>
+              <a:rPr dirty="0"/>
+              <a:t>Connect metadata sources</a:t>
+            </a:r>
+          </a:p>
+          <a:p>
+            <a:r>
+              <a:rPr dirty="0"/>
+              <a:t>Enable AI tagging</a:t>
+            </a:r>
+          </a:p>
+          <a:p>
+            <a:r>
+              <a:rPr dirty="0"/>
+              <a:t>Generate lineage automatically</a:t>
+            </a:r>
+          </a:p>
+          <a:p>
+            <a:r>
+              <a:rPr dirty="0"/>
+              <a:t>Improve metadata discovery</a:t>
+            </a:r>
+            <a:endParaRPr lang="en-US" dirty="0"/>
+          </a:p>
+          <a:p>
+            <a:r>
+              <a:rPr lang="en-IN" b="1" dirty="0"/>
+              <a:t>AI + </a:t>
+            </a:r>
+            <a:r>
+              <a:rPr lang="en-IN" b="1" dirty="0" err="1"/>
+              <a:t>DataHub</a:t>
+            </a:r>
+            <a:endParaRPr lang="en-IN" b="1" dirty="0"/>
+          </a:p>
+          <a:p>
+            <a:r>
+              <a:rPr lang="en-IN" dirty="0"/>
+              <a:t>Capabilities:</a:t>
+            </a:r>
+          </a:p>
+          <a:p>
+            <a:pPr lvl="1"/>
+            <a:r>
+              <a:rPr lang="en-IN" dirty="0"/>
+              <a:t>Metadata ingestion </a:t>
+            </a:r>
+          </a:p>
+          <a:p>
+            <a:pPr lvl="1"/>
+            <a:r>
+              <a:rPr lang="en-IN" dirty="0"/>
+              <a:t>AI tagging </a:t>
+            </a:r>
+          </a:p>
+          <a:p>
+            <a:pPr lvl="1"/>
+            <a:r>
+              <a:rPr lang="en-IN" dirty="0"/>
+              <a:t>Automatic lineage </a:t>
+            </a:r>
+          </a:p>
+          <a:p>
+            <a:pPr lvl="1"/>
+            <a:r>
+              <a:rPr lang="en-IN" dirty="0"/>
+              <a:t>Smart search </a:t>
+            </a:r>
+          </a:p>
+          <a:p>
+            <a:r>
+              <a:rPr lang="en-IN" b="1" dirty="0"/>
+              <a:t>Benefit</a:t>
+            </a:r>
+          </a:p>
+          <a:p>
+            <a:r>
+              <a:rPr lang="en-IN" dirty="0"/>
+              <a:t>Centralized metadata intelligence.</a:t>
+            </a:r>
+          </a:p>
+          <a:p>
+            <a:endParaRPr dirty="0"/>
+          </a:p>
+        </p:txBody>
+      </p:sp>
+    </p:spTree>
+  </p:cSld>
+  <p:clrMapOvr>
+    <a:masterClrMapping/>
+  </p:clrMapOvr>
+</p:sld>
+</file>
+
+<file path=ppt/slides/slide45.xml><?xml version="1.0" encoding="utf-8"?>
+<p:sld xmlns:a="http://schemas.openxmlformats.org/drawingml/2006/main" xmlns:r="http://schemas.openxmlformats.org/officeDocument/2006/relationships" xmlns:p="http://schemas.openxmlformats.org/presentationml/2006/main">
+  <p:cSld>
+    <p:bg>
+      <p:bgPr>
+        <a:solidFill>
+          <a:srgbClr val="1B3A4B"/>
+        </a:solidFill>
+        <a:effectLst/>
+      </p:bgPr>
+    </p:bg>
+    <p:spTree>
+      <p:nvGrpSpPr>
+        <p:cNvPr id="1" name=""/>
+        <p:cNvGrpSpPr/>
+        <p:nvPr/>
+      </p:nvGrpSpPr>
+      <p:grpSpPr>
+        <a:xfrm>
+          <a:off x="0" y="0"/>
+          <a:ext cx="0" cy="0"/>
+          <a:chOff x="0" y="0"/>
+          <a:chExt cx="0" cy="0"/>
+        </a:xfrm>
+      </p:grpSpPr>
+      <p:sp>
+        <p:nvSpPr>
+          <p:cNvPr id="10" name="TopBar"/>
+          <p:cNvSpPr/>
+          <p:nvPr/>
+        </p:nvSpPr>
+        <p:spPr>
+          <a:xfrm>
+            <a:off x="914400" y="2148840"/>
+            <a:ext cx="7315200" cy="45720"/>
+          </a:xfrm>
+          <a:prstGeom prst="rect">
+            <a:avLst/>
+          </a:prstGeom>
+          <a:solidFill>
+            <a:srgbClr val="1CADE4"/>
+          </a:solidFill>
+          <a:ln>
+            <a:noFill/>
+          </a:ln>
+        </p:spPr>
+        <p:txBody>
+          <a:bodyPr/>
+          <a:lstStyle/>
+          <a:p>
+            <a:endParaRPr lang="en-IN"/>
+          </a:p>
+        </p:txBody>
+      </p:sp>
+      <p:sp>
+        <p:nvSpPr>
+          <p:cNvPr id="11" name="LabTag"/>
+          <p:cNvSpPr/>
+          <p:nvPr/>
+        </p:nvSpPr>
+        <p:spPr>
+          <a:xfrm>
+            <a:off x="3657600" y="2377440"/>
+            <a:ext cx="1828800" cy="548640"/>
+          </a:xfrm>
+          <a:prstGeom prst="roundRect">
+            <a:avLst>
+              <a:gd name="adj" fmla="val 16667"/>
+            </a:avLst>
+          </a:prstGeom>
+          <a:solidFill>
+            <a:srgbClr val="1CADE4"/>
+          </a:solidFill>
+          <a:ln>
+            <a:noFill/>
+          </a:ln>
+        </p:spPr>
+        <p:txBody>
+          <a:bodyPr wrap="square" lIns="0" tIns="0" rIns="0" bIns="0" anchor="ctr"/>
+          <a:lstStyle/>
+          <a:p>
+            <a:pPr algn="ctr"/>
+            <a:r>
+              <a:rPr lang="en-US" sz="2000" b="1" spc="400">
+                <a:solidFill>
+                  <a:srgbClr val="FFFFFF"/>
+                </a:solidFill>
+                <a:latin typeface="Trebuchet MS"/>
+              </a:rPr>
+              <a:t>LAB 9</a:t>
+            </a:r>
+          </a:p>
+        </p:txBody>
+      </p:sp>
+      <p:sp>
+        <p:nvSpPr>
+          <p:cNvPr id="12" name="MainTitle"/>
+          <p:cNvSpPr/>
+          <p:nvPr/>
+        </p:nvSpPr>
+        <p:spPr>
+          <a:xfrm>
+            <a:off x="914400" y="3148965"/>
+            <a:ext cx="7315200" cy="914400"/>
+          </a:xfrm>
+          <a:prstGeom prst="rect">
+            <a:avLst/>
+          </a:prstGeom>
+          <a:noFill/>
+          <a:ln>
+            <a:noFill/>
+          </a:ln>
+        </p:spPr>
+        <p:txBody>
+          <a:bodyPr wrap="square" lIns="0" tIns="0" rIns="0" bIns="0" anchor="ctr"/>
+          <a:lstStyle/>
+          <a:p>
+            <a:pPr algn="ctr"/>
+            <a:r>
+              <a:rPr lang="en-US" sz="4400" b="1">
+                <a:solidFill>
+                  <a:srgbClr val="FFFFFF"/>
+                </a:solidFill>
+                <a:latin typeface="Trebuchet MS"/>
+              </a:rPr>
+              <a:t>Hands-On Activity</a:t>
+            </a:r>
+          </a:p>
+        </p:txBody>
+      </p:sp>
+      <p:sp>
+        <p:nvSpPr>
+          <p:cNvPr id="13" name="Subtitle"/>
+          <p:cNvSpPr/>
+          <p:nvPr/>
+        </p:nvSpPr>
+        <p:spPr>
+          <a:xfrm>
+            <a:off x="1828800" y="4130040"/>
+            <a:ext cx="5486400" cy="548640"/>
+          </a:xfrm>
+          <a:prstGeom prst="rect">
+            <a:avLst/>
+          </a:prstGeom>
+          <a:noFill/>
+          <a:ln>
+            <a:noFill/>
+          </a:ln>
+        </p:spPr>
+        <p:txBody>
+          <a:bodyPr wrap="square" lIns="0" tIns="0" rIns="0" bIns="0" anchor="t"/>
+          <a:lstStyle/>
+          <a:p>
+            <a:pPr algn="ctr"/>
+            <a:r>
+              <a:rPr lang="en-US" sz="1800">
+                <a:solidFill>
+                  <a:srgbClr val="8BB8D0"/>
+                </a:solidFill>
+                <a:latin typeface="Calibri"/>
+              </a:rPr>
+              <a:t>DataHub Integration</a:t>
+            </a:r>
+          </a:p>
+        </p:txBody>
+      </p:sp>
+      <p:sp>
+        <p:nvSpPr>
+          <p:cNvPr id="14" name="BottomBar"/>
+          <p:cNvSpPr/>
+          <p:nvPr/>
+        </p:nvSpPr>
+        <p:spPr>
+          <a:xfrm>
+            <a:off x="914400" y="4892040"/>
+            <a:ext cx="7315200" cy="45720"/>
+          </a:xfrm>
+          <a:prstGeom prst="rect">
+            <a:avLst/>
+          </a:prstGeom>
+          <a:solidFill>
+            <a:srgbClr val="1CADE4"/>
+          </a:solidFill>
+          <a:ln>
+            <a:noFill/>
+          </a:ln>
+        </p:spPr>
+        <p:txBody>
+          <a:bodyPr/>
+          <a:lstStyle/>
+          <a:p>
+            <a:endParaRPr lang="en-IN"/>
+          </a:p>
+        </p:txBody>
+      </p:sp>
+    </p:spTree>
+    <p:extLst>
+      <p:ext uri="{BB962C8B-B14F-4D97-AF65-F5344CB8AC3E}">
+        <p14:creationId xmlns:p14="http://schemas.microsoft.com/office/powerpoint/2010/main" val="645404411"/>
+      </p:ext>
+    </p:extLst>
+  </p:cSld>
+  <p:clrMapOvr>
+    <a:masterClrMapping/>
+  </p:clrMapOvr>
+</p:sld>
+</file>
+
+<file path=ppt/slides/slide46.xml><?xml version="1.0" encoding="utf-8"?>
+<p:sld xmlns:a="http://schemas.openxmlformats.org/drawingml/2006/main" xmlns:r="http://schemas.openxmlformats.org/officeDocument/2006/relationships" xmlns:p="http://schemas.openxmlformats.org/presentationml/2006/main">
+  <p:cSld>
+    <p:spTree>
+      <p:nvGrpSpPr>
+        <p:cNvPr id="1" name=""/>
+        <p:cNvGrpSpPr/>
+        <p:nvPr/>
+      </p:nvGrpSpPr>
+      <p:grpSpPr>
+        <a:xfrm>
+          <a:off x="0" y="0"/>
+          <a:ext cx="0" cy="0"/>
+          <a:chOff x="0" y="0"/>
+          <a:chExt cx="0" cy="0"/>
+        </a:xfrm>
+      </p:grpSpPr>
+      <p:sp>
+        <p:nvSpPr>
+          <p:cNvPr id="2" name="Title 1"/>
+          <p:cNvSpPr>
+            <a:spLocks noGrp="1"/>
+          </p:cNvSpPr>
+          <p:nvPr>
+            <p:ph type="title"/>
+          </p:nvPr>
+        </p:nvSpPr>
+        <p:spPr/>
+        <p:txBody>
+          <a:bodyPr/>
+          <a:lstStyle/>
+          <a:p>
+            <a:r>
+              <a:t>OpenMetadata Integration</a:t>
+            </a:r>
+          </a:p>
+        </p:txBody>
+      </p:sp>
+      <p:sp>
+        <p:nvSpPr>
+          <p:cNvPr id="3" name="Content Placeholder 2"/>
+          <p:cNvSpPr>
+            <a:spLocks noGrp="1"/>
+          </p:cNvSpPr>
+          <p:nvPr>
+            <p:ph idx="1"/>
+          </p:nvPr>
+        </p:nvSpPr>
+        <p:spPr/>
+        <p:txBody>
+          <a:bodyPr>
+            <a:normAutofit/>
+          </a:bodyPr>
+          <a:lstStyle/>
+          <a:p>
+            <a:r>
+              <a:rPr dirty="0"/>
+              <a:t>Generate descriptions</a:t>
+            </a:r>
+          </a:p>
+          <a:p>
+            <a:r>
+              <a:rPr dirty="0"/>
+              <a:t>Enable AI search</a:t>
+            </a:r>
+          </a:p>
+          <a:p>
+            <a:r>
+              <a:rPr dirty="0"/>
+              <a:t>Detect PII</a:t>
+            </a:r>
+          </a:p>
+          <a:p>
+            <a:r>
+              <a:rPr dirty="0"/>
+              <a:t>Enhance lineage tracking</a:t>
+            </a:r>
+            <a:endParaRPr lang="en-US" dirty="0"/>
+          </a:p>
+          <a:p>
+            <a:r>
+              <a:rPr lang="en-US" b="1" dirty="0"/>
+              <a:t>AI in </a:t>
+            </a:r>
+            <a:r>
+              <a:rPr lang="en-US" b="1" dirty="0" err="1"/>
+              <a:t>OpenMetadata</a:t>
+            </a:r>
+            <a:endParaRPr lang="en-US" b="1" dirty="0"/>
+          </a:p>
+          <a:p>
+            <a:r>
+              <a:rPr lang="en-US" dirty="0"/>
+              <a:t>Features:</a:t>
+            </a:r>
+          </a:p>
+          <a:p>
+            <a:pPr lvl="1"/>
+            <a:r>
+              <a:rPr lang="en-US" dirty="0"/>
+              <a:t>AI-generated descriptions </a:t>
+            </a:r>
+          </a:p>
+          <a:p>
+            <a:pPr lvl="1"/>
+            <a:r>
+              <a:rPr lang="en-US" dirty="0"/>
+              <a:t>PII detection </a:t>
+            </a:r>
+          </a:p>
+          <a:p>
+            <a:pPr lvl="1"/>
+            <a:r>
+              <a:rPr lang="en-US" dirty="0"/>
+              <a:t>AI search </a:t>
+            </a:r>
+          </a:p>
+          <a:p>
+            <a:pPr lvl="1"/>
+            <a:r>
+              <a:rPr lang="en-US" dirty="0"/>
+              <a:t>Lineage enhancement</a:t>
+            </a:r>
+          </a:p>
+          <a:p>
+            <a:endParaRPr dirty="0"/>
+          </a:p>
+        </p:txBody>
+      </p:sp>
+    </p:spTree>
+  </p:cSld>
+  <p:clrMapOvr>
+    <a:masterClrMapping/>
+  </p:clrMapOvr>
+</p:sld>
+</file>
+
+<file path=ppt/slides/slide47.xml><?xml version="1.0" encoding="utf-8"?>
+<p:sld xmlns:a="http://schemas.openxmlformats.org/drawingml/2006/main" xmlns:r="http://schemas.openxmlformats.org/officeDocument/2006/relationships" xmlns:p="http://schemas.openxmlformats.org/presentationml/2006/main">
+  <p:cSld>
+    <p:bg>
+      <p:bgPr>
+        <a:solidFill>
+          <a:srgbClr val="1B3A4B"/>
+        </a:solidFill>
+        <a:effectLst/>
+      </p:bgPr>
+    </p:bg>
+    <p:spTree>
+      <p:nvGrpSpPr>
+        <p:cNvPr id="1" name=""/>
+        <p:cNvGrpSpPr/>
+        <p:nvPr/>
+      </p:nvGrpSpPr>
+      <p:grpSpPr>
+        <a:xfrm>
+          <a:off x="0" y="0"/>
+          <a:ext cx="0" cy="0"/>
+          <a:chOff x="0" y="0"/>
+          <a:chExt cx="0" cy="0"/>
+        </a:xfrm>
+      </p:grpSpPr>
+      <p:sp>
+        <p:nvSpPr>
+          <p:cNvPr id="10" name="TopBar"/>
+          <p:cNvSpPr/>
+          <p:nvPr/>
+        </p:nvSpPr>
+        <p:spPr>
+          <a:xfrm>
+            <a:off x="914400" y="2148840"/>
+            <a:ext cx="7315200" cy="45720"/>
+          </a:xfrm>
+          <a:prstGeom prst="rect">
+            <a:avLst/>
+          </a:prstGeom>
+          <a:solidFill>
+            <a:srgbClr val="1CADE4"/>
+          </a:solidFill>
+          <a:ln>
+            <a:noFill/>
+          </a:ln>
+        </p:spPr>
+        <p:txBody>
+          <a:bodyPr/>
+          <a:lstStyle/>
+          <a:p>
+            <a:endParaRPr lang="en-IN"/>
+          </a:p>
+        </p:txBody>
+      </p:sp>
+      <p:sp>
+        <p:nvSpPr>
+          <p:cNvPr id="11" name="LabTag"/>
+          <p:cNvSpPr/>
+          <p:nvPr/>
+        </p:nvSpPr>
+        <p:spPr>
+          <a:xfrm>
+            <a:off x="3657600" y="2377440"/>
+            <a:ext cx="1828800" cy="548640"/>
+          </a:xfrm>
+          <a:prstGeom prst="roundRect">
+            <a:avLst>
+              <a:gd name="adj" fmla="val 16667"/>
+            </a:avLst>
+          </a:prstGeom>
+          <a:solidFill>
+            <a:srgbClr val="1CADE4"/>
+          </a:solidFill>
+          <a:ln>
+            <a:noFill/>
+          </a:ln>
+        </p:spPr>
+        <p:txBody>
+          <a:bodyPr wrap="square" lIns="0" tIns="0" rIns="0" bIns="0" anchor="ctr"/>
+          <a:lstStyle/>
+          <a:p>
+            <a:pPr algn="ctr"/>
+            <a:r>
+              <a:rPr lang="en-US" sz="2000" b="1" spc="400">
+                <a:solidFill>
+                  <a:srgbClr val="FFFFFF"/>
+                </a:solidFill>
+                <a:latin typeface="Trebuchet MS"/>
+              </a:rPr>
+              <a:t>LAB 10</a:t>
+            </a:r>
+          </a:p>
+        </p:txBody>
+      </p:sp>
+      <p:sp>
+        <p:nvSpPr>
+          <p:cNvPr id="12" name="MainTitle"/>
+          <p:cNvSpPr/>
+          <p:nvPr/>
+        </p:nvSpPr>
+        <p:spPr>
+          <a:xfrm>
+            <a:off x="914400" y="3148965"/>
+            <a:ext cx="7315200" cy="914400"/>
+          </a:xfrm>
+          <a:prstGeom prst="rect">
+            <a:avLst/>
+          </a:prstGeom>
+          <a:noFill/>
+          <a:ln>
+            <a:noFill/>
+          </a:ln>
+        </p:spPr>
+        <p:txBody>
+          <a:bodyPr wrap="square" lIns="0" tIns="0" rIns="0" bIns="0" anchor="ctr"/>
+          <a:lstStyle/>
+          <a:p>
+            <a:pPr algn="ctr"/>
+            <a:r>
+              <a:rPr lang="en-US" sz="4400" b="1">
+                <a:solidFill>
+                  <a:srgbClr val="FFFFFF"/>
+                </a:solidFill>
+                <a:latin typeface="Trebuchet MS"/>
+              </a:rPr>
+              <a:t>Hands-On Activity</a:t>
+            </a:r>
+          </a:p>
+        </p:txBody>
+      </p:sp>
+      <p:sp>
+        <p:nvSpPr>
+          <p:cNvPr id="13" name="Subtitle"/>
+          <p:cNvSpPr/>
+          <p:nvPr/>
+        </p:nvSpPr>
+        <p:spPr>
+          <a:xfrm>
+            <a:off x="1828800" y="4130040"/>
+            <a:ext cx="5486400" cy="548640"/>
+          </a:xfrm>
+          <a:prstGeom prst="rect">
+            <a:avLst/>
+          </a:prstGeom>
+          <a:noFill/>
+          <a:ln>
+            <a:noFill/>
+          </a:ln>
+        </p:spPr>
+        <p:txBody>
+          <a:bodyPr wrap="square" lIns="0" tIns="0" rIns="0" bIns="0" anchor="t"/>
+          <a:lstStyle/>
+          <a:p>
+            <a:pPr algn="ctr"/>
+            <a:r>
+              <a:rPr lang="en-US" sz="1800">
+                <a:solidFill>
+                  <a:srgbClr val="8BB8D0"/>
+                </a:solidFill>
+                <a:latin typeface="Calibri"/>
+              </a:rPr>
+              <a:t>OpenMetadata Integration</a:t>
+            </a:r>
+          </a:p>
+        </p:txBody>
+      </p:sp>
+      <p:sp>
+        <p:nvSpPr>
+          <p:cNvPr id="14" name="BottomBar"/>
+          <p:cNvSpPr/>
+          <p:nvPr/>
+        </p:nvSpPr>
+        <p:spPr>
+          <a:xfrm>
+            <a:off x="914400" y="4892040"/>
+            <a:ext cx="7315200" cy="45720"/>
+          </a:xfrm>
+          <a:prstGeom prst="rect">
+            <a:avLst/>
+          </a:prstGeom>
+          <a:solidFill>
+            <a:srgbClr val="1CADE4"/>
+          </a:solidFill>
+          <a:ln>
+            <a:noFill/>
+          </a:ln>
+        </p:spPr>
+        <p:txBody>
+          <a:bodyPr/>
+          <a:lstStyle/>
+          <a:p>
+            <a:endParaRPr lang="en-IN"/>
+          </a:p>
+        </p:txBody>
+      </p:sp>
+    </p:spTree>
+    <p:extLst>
+      <p:ext uri="{BB962C8B-B14F-4D97-AF65-F5344CB8AC3E}">
+        <p14:creationId xmlns:p14="http://schemas.microsoft.com/office/powerpoint/2010/main" val="3987553706"/>
+      </p:ext>
+    </p:extLst>
+  </p:cSld>
+  <p:clrMapOvr>
+    <a:masterClrMapping/>
+  </p:clrMapOvr>
+</p:sld>
+</file>
+
+<file path=ppt/slides/slide48.xml><?xml version="1.0" encoding="utf-8"?>
+<p:sld xmlns:a="http://schemas.openxmlformats.org/drawingml/2006/main" xmlns:r="http://schemas.openxmlformats.org/officeDocument/2006/relationships" xmlns:p="http://schemas.openxmlformats.org/presentationml/2006/main">
+  <p:cSld>
+    <p:spTree>
+      <p:nvGrpSpPr>
+        <p:cNvPr id="1" name=""/>
+        <p:cNvGrpSpPr/>
+        <p:nvPr/>
+      </p:nvGrpSpPr>
+      <p:grpSpPr>
+        <a:xfrm>
+          <a:off x="0" y="0"/>
+          <a:ext cx="0" cy="0"/>
+          <a:chOff x="0" y="0"/>
+          <a:chExt cx="0" cy="0"/>
+        </a:xfrm>
+      </p:grpSpPr>
+      <p:sp>
+        <p:nvSpPr>
+          <p:cNvPr id="2" name="Title 1"/>
+          <p:cNvSpPr>
+            <a:spLocks noGrp="1"/>
+          </p:cNvSpPr>
+          <p:nvPr>
+            <p:ph type="title"/>
+          </p:nvPr>
+        </p:nvSpPr>
+        <p:spPr/>
+        <p:txBody>
+          <a:bodyPr/>
+          <a:lstStyle/>
+          <a:p>
+            <a:r>
+              <a:t>Collibra + AI</a:t>
+            </a:r>
+          </a:p>
+        </p:txBody>
+      </p:sp>
+      <p:sp>
+        <p:nvSpPr>
+          <p:cNvPr id="3" name="Content Placeholder 2"/>
+          <p:cNvSpPr>
+            <a:spLocks noGrp="1"/>
+          </p:cNvSpPr>
+          <p:nvPr>
+            <p:ph idx="1"/>
+          </p:nvPr>
+        </p:nvSpPr>
+        <p:spPr/>
+        <p:txBody>
+          <a:bodyPr>
+            <a:normAutofit fontScale="92500" lnSpcReduction="10000"/>
+          </a:bodyPr>
+          <a:lstStyle/>
+          <a:p>
+            <a:r>
+              <a:rPr dirty="0"/>
+              <a:t>Generate glossary terms</a:t>
+            </a:r>
+          </a:p>
+          <a:p>
+            <a:r>
+              <a:rPr dirty="0"/>
+              <a:t>Recommend governance policies</a:t>
+            </a:r>
+          </a:p>
+          <a:p>
+            <a:r>
+              <a:rPr dirty="0"/>
+              <a:t>Classify datasets</a:t>
+            </a:r>
+          </a:p>
+          <a:p>
+            <a:r>
+              <a:rPr dirty="0"/>
+              <a:t>Automate compliance workflows</a:t>
+            </a:r>
+            <a:endParaRPr lang="en-US" dirty="0"/>
+          </a:p>
+          <a:p>
+            <a:r>
+              <a:rPr lang="en-US" b="1" dirty="0"/>
+              <a:t>Enterprise Governance Automation</a:t>
+            </a:r>
+          </a:p>
+          <a:p>
+            <a:r>
+              <a:rPr lang="en-US" dirty="0"/>
+              <a:t>AI can:</a:t>
+            </a:r>
+          </a:p>
+          <a:p>
+            <a:pPr lvl="1"/>
+            <a:r>
+              <a:rPr lang="en-US" dirty="0"/>
+              <a:t>Recommend policies </a:t>
+            </a:r>
+          </a:p>
+          <a:p>
+            <a:pPr lvl="1"/>
+            <a:r>
+              <a:rPr lang="en-US" dirty="0"/>
+              <a:t>Generate glossary terms </a:t>
+            </a:r>
+          </a:p>
+          <a:p>
+            <a:pPr lvl="1"/>
+            <a:r>
+              <a:rPr lang="en-US" dirty="0"/>
+              <a:t>Automate compliance workflows </a:t>
+            </a:r>
+          </a:p>
+          <a:p>
+            <a:r>
+              <a:rPr lang="en-US" b="1" dirty="0"/>
+              <a:t>Enterprise Use</a:t>
+            </a:r>
+          </a:p>
+          <a:p>
+            <a:r>
+              <a:rPr lang="en-US" dirty="0"/>
+              <a:t>Large organizations with strict governance needs.</a:t>
+            </a:r>
+          </a:p>
+          <a:p>
+            <a:endParaRPr dirty="0"/>
+          </a:p>
+        </p:txBody>
+      </p:sp>
+    </p:spTree>
+  </p:cSld>
+  <p:clrMapOvr>
+    <a:masterClrMapping/>
+  </p:clrMapOvr>
+</p:sld>
+</file>
+
+<file path=ppt/slides/slide49.xml><?xml version="1.0" encoding="utf-8"?>
+<p:sld xmlns:a="http://schemas.openxmlformats.org/drawingml/2006/main" xmlns:r="http://schemas.openxmlformats.org/officeDocument/2006/relationships" xmlns:p="http://schemas.openxmlformats.org/presentationml/2006/main">
+  <p:cSld>
+    <p:spTree>
+      <p:nvGrpSpPr>
+        <p:cNvPr id="1" name=""/>
+        <p:cNvGrpSpPr/>
+        <p:nvPr/>
+      </p:nvGrpSpPr>
+      <p:grpSpPr>
+        <a:xfrm>
+          <a:off x="0" y="0"/>
+          <a:ext cx="0" cy="0"/>
+          <a:chOff x="0" y="0"/>
+          <a:chExt cx="0" cy="0"/>
+        </a:xfrm>
+      </p:grpSpPr>
+      <p:sp>
+        <p:nvSpPr>
+          <p:cNvPr id="2" name="Title 1"/>
+          <p:cNvSpPr>
+            <a:spLocks noGrp="1"/>
+          </p:cNvSpPr>
+          <p:nvPr>
+            <p:ph type="title"/>
+          </p:nvPr>
+        </p:nvSpPr>
+        <p:spPr/>
+        <p:txBody>
+          <a:bodyPr/>
+          <a:lstStyle/>
+          <a:p>
+            <a:r>
+              <a:t>LLM Layer Architecture</a:t>
+            </a:r>
+          </a:p>
+        </p:txBody>
+      </p:sp>
+      <p:sp>
+        <p:nvSpPr>
+          <p:cNvPr id="3" name="Content Placeholder 2"/>
+          <p:cNvSpPr>
+            <a:spLocks noGrp="1"/>
+          </p:cNvSpPr>
+          <p:nvPr>
+            <p:ph idx="1"/>
+          </p:nvPr>
+        </p:nvSpPr>
+        <p:spPr/>
+        <p:txBody>
+          <a:bodyPr>
+            <a:normAutofit fontScale="92500" lnSpcReduction="20000"/>
+          </a:bodyPr>
+          <a:lstStyle/>
+          <a:p>
+            <a:r>
+              <a:rPr lang="en-IN" b="1" dirty="0"/>
+              <a:t>Architecture Components</a:t>
+            </a:r>
+          </a:p>
+          <a:p>
+            <a:r>
+              <a:rPr lang="en-IN" b="1" dirty="0"/>
+              <a:t>Metadata Connectors</a:t>
+            </a:r>
+          </a:p>
+          <a:p>
+            <a:pPr lvl="1"/>
+            <a:r>
+              <a:rPr lang="en-IN" dirty="0"/>
+              <a:t>Connect databases/tools.</a:t>
+            </a:r>
+          </a:p>
+          <a:p>
+            <a:r>
+              <a:rPr lang="en-IN" b="1" dirty="0"/>
+              <a:t>Vector Databases</a:t>
+            </a:r>
+          </a:p>
+          <a:p>
+            <a:pPr lvl="1"/>
+            <a:r>
+              <a:rPr lang="en-IN" dirty="0"/>
+              <a:t>Store embeddings for semantic search.</a:t>
+            </a:r>
+          </a:p>
+          <a:p>
+            <a:r>
+              <a:rPr lang="en-IN" b="1" dirty="0"/>
+              <a:t>LLM Reasoning Engine</a:t>
+            </a:r>
+          </a:p>
+          <a:p>
+            <a:pPr lvl="1"/>
+            <a:r>
+              <a:rPr lang="en-IN" dirty="0"/>
+              <a:t>Performs intelligent analysis.</a:t>
+            </a:r>
+          </a:p>
+          <a:p>
+            <a:r>
+              <a:rPr lang="en-IN" b="1" dirty="0"/>
+              <a:t>Governance APIs</a:t>
+            </a:r>
+          </a:p>
+          <a:p>
+            <a:pPr lvl="1"/>
+            <a:r>
+              <a:rPr lang="en-IN" dirty="0"/>
+              <a:t>Expose governance capabilities.</a:t>
+            </a:r>
+          </a:p>
+          <a:p>
+            <a:r>
+              <a:rPr lang="en-IN" b="1" dirty="0"/>
+              <a:t>Overall Flow</a:t>
+            </a:r>
+          </a:p>
+          <a:p>
+            <a:r>
+              <a:rPr lang="en-IN" dirty="0"/>
+              <a:t>Source Systems → Metadata → Vector DB → LLM → Governance Actions</a:t>
             </a:r>
           </a:p>
         </p:txBody>
@@ -18555,7 +22951,8 @@
           <a:lstStyle/>
           <a:p>
             <a:r>
-              <a:t>dbt Lineage Extraction</a:t>
+              <a:rPr dirty="0"/>
+              <a:t>Automated Lineage Extraction</a:t>
             </a:r>
           </a:p>
         </p:txBody>
@@ -18576,22 +22973,638 @@
           <a:lstStyle/>
           <a:p>
             <a:r>
-              <a:t>Analyze dbt DAGs</a:t>
-            </a:r>
-          </a:p>
-          <a:p>
-            <a:r>
-              <a:t>Parse models and sources</a:t>
-            </a:r>
-          </a:p>
-          <a:p>
-            <a:r>
-              <a:t>Track transformations</a:t>
-            </a:r>
-          </a:p>
-          <a:p>
-            <a:r>
-              <a:t>Generate dependency relationships</a:t>
+              <a:t>Extract lineage from SQL and dbt code</a:t>
+            </a:r>
+          </a:p>
+          <a:p>
+            <a:r>
+              <a:t>Track upstream/downstream dependencies</a:t>
+            </a:r>
+          </a:p>
+          <a:p>
+            <a:r>
+              <a:t>Generate lineage graphs automatically</a:t>
+            </a:r>
+          </a:p>
+          <a:p>
+            <a:r>
+              <a:t>Enable impact analysis</a:t>
+            </a:r>
+          </a:p>
+        </p:txBody>
+      </p:sp>
+    </p:spTree>
+  </p:cSld>
+  <p:clrMapOvr>
+    <a:masterClrMapping/>
+  </p:clrMapOvr>
+</p:sld>
+</file>
+
+<file path=ppt/slides/slide50.xml><?xml version="1.0" encoding="utf-8"?>
+<p:sld xmlns:a="http://schemas.openxmlformats.org/drawingml/2006/main" xmlns:r="http://schemas.openxmlformats.org/officeDocument/2006/relationships" xmlns:p="http://schemas.openxmlformats.org/presentationml/2006/main">
+  <p:cSld>
+    <p:spTree>
+      <p:nvGrpSpPr>
+        <p:cNvPr id="1" name=""/>
+        <p:cNvGrpSpPr/>
+        <p:nvPr/>
+      </p:nvGrpSpPr>
+      <p:grpSpPr>
+        <a:xfrm>
+          <a:off x="0" y="0"/>
+          <a:ext cx="0" cy="0"/>
+          <a:chOff x="0" y="0"/>
+          <a:chExt cx="0" cy="0"/>
+        </a:xfrm>
+      </p:grpSpPr>
+      <p:sp>
+        <p:nvSpPr>
+          <p:cNvPr id="2" name="Title 1"/>
+          <p:cNvSpPr>
+            <a:spLocks noGrp="1"/>
+          </p:cNvSpPr>
+          <p:nvPr>
+            <p:ph type="title"/>
+          </p:nvPr>
+        </p:nvSpPr>
+        <p:spPr/>
+        <p:txBody>
+          <a:bodyPr/>
+          <a:lstStyle/>
+          <a:p>
+            <a:r>
+              <a:t>RAG for Governance</a:t>
+            </a:r>
+          </a:p>
+        </p:txBody>
+      </p:sp>
+      <p:sp>
+        <p:nvSpPr>
+          <p:cNvPr id="3" name="Content Placeholder 2"/>
+          <p:cNvSpPr>
+            <a:spLocks noGrp="1"/>
+          </p:cNvSpPr>
+          <p:nvPr>
+            <p:ph idx="1"/>
+          </p:nvPr>
+        </p:nvSpPr>
+        <p:spPr/>
+        <p:txBody>
+          <a:bodyPr>
+            <a:normAutofit/>
+          </a:bodyPr>
+          <a:lstStyle/>
+          <a:p>
+            <a:r>
+              <a:rPr lang="en-IN" b="1" dirty="0"/>
+              <a:t>RAG = Retrieval-Augmented Generation</a:t>
+            </a:r>
+          </a:p>
+          <a:p>
+            <a:r>
+              <a:rPr lang="en-IN" dirty="0"/>
+              <a:t>LLM retrieves governance information before answering.</a:t>
+            </a:r>
+          </a:p>
+          <a:p>
+            <a:r>
+              <a:rPr lang="en-IN" b="1" dirty="0"/>
+              <a:t>Use Cases</a:t>
+            </a:r>
+          </a:p>
+          <a:p>
+            <a:pPr lvl="1"/>
+            <a:r>
+              <a:rPr lang="en-IN" dirty="0"/>
+              <a:t>Compliance Q&amp;A </a:t>
+            </a:r>
+          </a:p>
+          <a:p>
+            <a:pPr lvl="1"/>
+            <a:r>
+              <a:rPr lang="en-IN" dirty="0"/>
+              <a:t>Governance search </a:t>
+            </a:r>
+          </a:p>
+          <a:p>
+            <a:pPr lvl="1"/>
+            <a:r>
+              <a:rPr lang="en-IN" dirty="0"/>
+              <a:t>Policy retrieval </a:t>
+            </a:r>
+          </a:p>
+          <a:p>
+            <a:r>
+              <a:rPr lang="en-IN" b="1" dirty="0"/>
+              <a:t>Example</a:t>
+            </a:r>
+          </a:p>
+          <a:p>
+            <a:r>
+              <a:rPr lang="en-IN" dirty="0"/>
+              <a:t>Question:</a:t>
+            </a:r>
+            <a:br>
+              <a:rPr lang="en-IN" dirty="0"/>
+            </a:br>
+            <a:r>
+              <a:rPr lang="en-IN" dirty="0"/>
+              <a:t>“Which datasets contain customer PII?”</a:t>
+            </a:r>
+          </a:p>
+          <a:p>
+            <a:r>
+              <a:rPr lang="en-IN" dirty="0"/>
+              <a:t>AI retrieves metadata and answers accurately.</a:t>
+            </a:r>
+          </a:p>
+        </p:txBody>
+      </p:sp>
+    </p:spTree>
+  </p:cSld>
+  <p:clrMapOvr>
+    <a:masterClrMapping/>
+  </p:clrMapOvr>
+</p:sld>
+</file>
+
+<file path=ppt/slides/slide51.xml><?xml version="1.0" encoding="utf-8"?>
+<p:sld xmlns:a="http://schemas.openxmlformats.org/drawingml/2006/main" xmlns:r="http://schemas.openxmlformats.org/officeDocument/2006/relationships" xmlns:p="http://schemas.openxmlformats.org/presentationml/2006/main">
+  <p:cSld>
+    <p:spTree>
+      <p:nvGrpSpPr>
+        <p:cNvPr id="1" name=""/>
+        <p:cNvGrpSpPr/>
+        <p:nvPr/>
+      </p:nvGrpSpPr>
+      <p:grpSpPr>
+        <a:xfrm>
+          <a:off x="0" y="0"/>
+          <a:ext cx="0" cy="0"/>
+          <a:chOff x="0" y="0"/>
+          <a:chExt cx="0" cy="0"/>
+        </a:xfrm>
+      </p:grpSpPr>
+      <p:sp>
+        <p:nvSpPr>
+          <p:cNvPr id="2" name="Title 1"/>
+          <p:cNvSpPr>
+            <a:spLocks noGrp="1"/>
+          </p:cNvSpPr>
+          <p:nvPr>
+            <p:ph type="title"/>
+          </p:nvPr>
+        </p:nvSpPr>
+        <p:spPr/>
+        <p:txBody>
+          <a:bodyPr/>
+          <a:lstStyle/>
+          <a:p>
+            <a:r>
+              <a:t>Enterprise Benefits</a:t>
+            </a:r>
+          </a:p>
+        </p:txBody>
+      </p:sp>
+      <p:sp>
+        <p:nvSpPr>
+          <p:cNvPr id="3" name="Content Placeholder 2"/>
+          <p:cNvSpPr>
+            <a:spLocks noGrp="1"/>
+          </p:cNvSpPr>
+          <p:nvPr>
+            <p:ph idx="1"/>
+          </p:nvPr>
+        </p:nvSpPr>
+        <p:spPr/>
+        <p:txBody>
+          <a:bodyPr/>
+          <a:lstStyle/>
+          <a:p>
+            <a:r>
+              <a:rPr lang="en-IN" b="1" dirty="0"/>
+              <a:t>Business Value</a:t>
+            </a:r>
+          </a:p>
+          <a:p>
+            <a:r>
+              <a:rPr lang="en-IN" b="1" dirty="0"/>
+              <a:t>Reduced Manual Effort</a:t>
+            </a:r>
+          </a:p>
+          <a:p>
+            <a:pPr lvl="1"/>
+            <a:r>
+              <a:rPr lang="en-IN" dirty="0"/>
+              <a:t>Automation reduces governance workload.</a:t>
+            </a:r>
+          </a:p>
+          <a:p>
+            <a:r>
+              <a:rPr lang="en-IN" b="1" dirty="0"/>
+              <a:t>Improved Compliance</a:t>
+            </a:r>
+          </a:p>
+          <a:p>
+            <a:pPr lvl="1"/>
+            <a:r>
+              <a:rPr lang="en-IN" dirty="0"/>
+              <a:t>Continuous monitoring.</a:t>
+            </a:r>
+          </a:p>
+          <a:p>
+            <a:r>
+              <a:rPr lang="en-IN" b="1" dirty="0"/>
+              <a:t>Faster Metadata Onboarding</a:t>
+            </a:r>
+          </a:p>
+          <a:p>
+            <a:pPr lvl="1"/>
+            <a:r>
+              <a:rPr lang="en-IN" dirty="0"/>
+              <a:t>Automatic </a:t>
+            </a:r>
+            <a:r>
+              <a:rPr lang="en-IN" dirty="0" err="1"/>
+              <a:t>catalog</a:t>
+            </a:r>
+            <a:r>
+              <a:rPr lang="en-IN" dirty="0"/>
+              <a:t> creation.</a:t>
+            </a:r>
+          </a:p>
+          <a:p>
+            <a:r>
+              <a:rPr lang="en-IN" b="1" dirty="0"/>
+              <a:t>Better Visibility</a:t>
+            </a:r>
+          </a:p>
+          <a:p>
+            <a:pPr lvl="1"/>
+            <a:r>
+              <a:rPr lang="en-IN" dirty="0"/>
+              <a:t>Complete governance insights.</a:t>
+            </a:r>
+          </a:p>
+        </p:txBody>
+      </p:sp>
+    </p:spTree>
+  </p:cSld>
+  <p:clrMapOvr>
+    <a:masterClrMapping/>
+  </p:clrMapOvr>
+</p:sld>
+</file>
+
+<file path=ppt/slides/slide52.xml><?xml version="1.0" encoding="utf-8"?>
+<p:sld xmlns:a="http://schemas.openxmlformats.org/drawingml/2006/main" xmlns:r="http://schemas.openxmlformats.org/officeDocument/2006/relationships" xmlns:p="http://schemas.openxmlformats.org/presentationml/2006/main">
+  <p:cSld>
+    <p:spTree>
+      <p:nvGrpSpPr>
+        <p:cNvPr id="1" name=""/>
+        <p:cNvGrpSpPr/>
+        <p:nvPr/>
+      </p:nvGrpSpPr>
+      <p:grpSpPr>
+        <a:xfrm>
+          <a:off x="0" y="0"/>
+          <a:ext cx="0" cy="0"/>
+          <a:chOff x="0" y="0"/>
+          <a:chExt cx="0" cy="0"/>
+        </a:xfrm>
+      </p:grpSpPr>
+      <p:sp>
+        <p:nvSpPr>
+          <p:cNvPr id="2" name="Title 1"/>
+          <p:cNvSpPr>
+            <a:spLocks noGrp="1"/>
+          </p:cNvSpPr>
+          <p:nvPr>
+            <p:ph type="title"/>
+          </p:nvPr>
+        </p:nvSpPr>
+        <p:spPr/>
+        <p:txBody>
+          <a:bodyPr/>
+          <a:lstStyle/>
+          <a:p>
+            <a:r>
+              <a:t>Challenges &amp; Risks</a:t>
+            </a:r>
+          </a:p>
+        </p:txBody>
+      </p:sp>
+      <p:sp>
+        <p:nvSpPr>
+          <p:cNvPr id="3" name="Content Placeholder 2"/>
+          <p:cNvSpPr>
+            <a:spLocks noGrp="1"/>
+          </p:cNvSpPr>
+          <p:nvPr>
+            <p:ph idx="1"/>
+          </p:nvPr>
+        </p:nvSpPr>
+        <p:spPr/>
+        <p:txBody>
+          <a:bodyPr/>
+          <a:lstStyle/>
+          <a:p>
+            <a:r>
+              <a:rPr lang="en-US" b="1" dirty="0"/>
+              <a:t>Risks of AI Governance</a:t>
+            </a:r>
+          </a:p>
+          <a:p>
+            <a:r>
+              <a:rPr lang="en-US" b="1" dirty="0"/>
+              <a:t>Hallucinated Metadata</a:t>
+            </a:r>
+          </a:p>
+          <a:p>
+            <a:pPr lvl="1"/>
+            <a:r>
+              <a:rPr lang="en-US" dirty="0"/>
+              <a:t>AI may generate incorrect info.</a:t>
+            </a:r>
+          </a:p>
+          <a:p>
+            <a:r>
+              <a:rPr lang="en-US" b="1" dirty="0"/>
+              <a:t>Incorrect Classification</a:t>
+            </a:r>
+          </a:p>
+          <a:p>
+            <a:pPr lvl="1"/>
+            <a:r>
+              <a:rPr lang="en-US" dirty="0"/>
+              <a:t>False positives/negatives.</a:t>
+            </a:r>
+          </a:p>
+          <a:p>
+            <a:r>
+              <a:rPr lang="en-US" b="1" dirty="0"/>
+              <a:t>Compliance Risks</a:t>
+            </a:r>
+          </a:p>
+          <a:p>
+            <a:pPr lvl="1"/>
+            <a:r>
+              <a:rPr lang="en-US" dirty="0"/>
+              <a:t>Wrong governance decisions.</a:t>
+            </a:r>
+          </a:p>
+          <a:p>
+            <a:r>
+              <a:rPr lang="en-US" b="1" dirty="0"/>
+              <a:t>Privacy Concerns</a:t>
+            </a:r>
+          </a:p>
+          <a:p>
+            <a:pPr lvl="1"/>
+            <a:r>
+              <a:rPr lang="en-US" dirty="0"/>
+              <a:t>Sensitive data exposure.</a:t>
+            </a:r>
+          </a:p>
+        </p:txBody>
+      </p:sp>
+    </p:spTree>
+  </p:cSld>
+  <p:clrMapOvr>
+    <a:masterClrMapping/>
+  </p:clrMapOvr>
+</p:sld>
+</file>
+
+<file path=ppt/slides/slide53.xml><?xml version="1.0" encoding="utf-8"?>
+<p:sld xmlns:a="http://schemas.openxmlformats.org/drawingml/2006/main" xmlns:r="http://schemas.openxmlformats.org/officeDocument/2006/relationships" xmlns:p="http://schemas.openxmlformats.org/presentationml/2006/main">
+  <p:cSld>
+    <p:spTree>
+      <p:nvGrpSpPr>
+        <p:cNvPr id="1" name=""/>
+        <p:cNvGrpSpPr/>
+        <p:nvPr/>
+      </p:nvGrpSpPr>
+      <p:grpSpPr>
+        <a:xfrm>
+          <a:off x="0" y="0"/>
+          <a:ext cx="0" cy="0"/>
+          <a:chOff x="0" y="0"/>
+          <a:chExt cx="0" cy="0"/>
+        </a:xfrm>
+      </p:grpSpPr>
+      <p:sp>
+        <p:nvSpPr>
+          <p:cNvPr id="2" name="Title 1"/>
+          <p:cNvSpPr>
+            <a:spLocks noGrp="1"/>
+          </p:cNvSpPr>
+          <p:nvPr>
+            <p:ph type="title"/>
+          </p:nvPr>
+        </p:nvSpPr>
+        <p:spPr/>
+        <p:txBody>
+          <a:bodyPr/>
+          <a:lstStyle/>
+          <a:p>
+            <a:r>
+              <a:t>Best Practices</a:t>
+            </a:r>
+          </a:p>
+        </p:txBody>
+      </p:sp>
+      <p:sp>
+        <p:nvSpPr>
+          <p:cNvPr id="3" name="Content Placeholder 2"/>
+          <p:cNvSpPr>
+            <a:spLocks noGrp="1"/>
+          </p:cNvSpPr>
+          <p:nvPr>
+            <p:ph idx="1"/>
+          </p:nvPr>
+        </p:nvSpPr>
+        <p:spPr/>
+        <p:txBody>
+          <a:bodyPr/>
+          <a:lstStyle/>
+          <a:p>
+            <a:r>
+              <a:rPr lang="en-US" b="1" dirty="0"/>
+              <a:t>Governance Recommendations</a:t>
+            </a:r>
+          </a:p>
+          <a:p>
+            <a:r>
+              <a:rPr lang="en-US" b="1" dirty="0"/>
+              <a:t>Human Approval</a:t>
+            </a:r>
+          </a:p>
+          <a:p>
+            <a:pPr lvl="1"/>
+            <a:r>
+              <a:rPr lang="en-US" dirty="0"/>
+              <a:t>Keep humans in review loop.</a:t>
+            </a:r>
+          </a:p>
+          <a:p>
+            <a:r>
+              <a:rPr lang="en-US" b="1" dirty="0"/>
+              <a:t>Audit Logging</a:t>
+            </a:r>
+          </a:p>
+          <a:p>
+            <a:pPr lvl="1"/>
+            <a:r>
+              <a:rPr lang="en-US" dirty="0"/>
+              <a:t>Track AI decisions.</a:t>
+            </a:r>
+          </a:p>
+          <a:p>
+            <a:r>
+              <a:rPr lang="en-US" b="1" dirty="0"/>
+              <a:t>RBAC Enforcement</a:t>
+            </a:r>
+          </a:p>
+          <a:p>
+            <a:pPr lvl="1"/>
+            <a:r>
+              <a:rPr lang="en-US" dirty="0"/>
+              <a:t>Role-based access control.</a:t>
+            </a:r>
+          </a:p>
+          <a:p>
+            <a:r>
+              <a:rPr lang="en-US" b="1" dirty="0"/>
+              <a:t>Continuous Validation</a:t>
+            </a:r>
+          </a:p>
+          <a:p>
+            <a:pPr lvl="1"/>
+            <a:r>
+              <a:rPr lang="en-US" dirty="0"/>
+              <a:t>Regular quality checks.</a:t>
+            </a:r>
+          </a:p>
+        </p:txBody>
+      </p:sp>
+    </p:spTree>
+  </p:cSld>
+  <p:clrMapOvr>
+    <a:masterClrMapping/>
+  </p:clrMapOvr>
+</p:sld>
+</file>
+
+<file path=ppt/slides/slide54.xml><?xml version="1.0" encoding="utf-8"?>
+<p:sld xmlns:a="http://schemas.openxmlformats.org/drawingml/2006/main" xmlns:r="http://schemas.openxmlformats.org/officeDocument/2006/relationships" xmlns:p="http://schemas.openxmlformats.org/presentationml/2006/main">
+  <p:cSld>
+    <p:spTree>
+      <p:nvGrpSpPr>
+        <p:cNvPr id="1" name=""/>
+        <p:cNvGrpSpPr/>
+        <p:nvPr/>
+      </p:nvGrpSpPr>
+      <p:grpSpPr>
+        <a:xfrm>
+          <a:off x="0" y="0"/>
+          <a:ext cx="0" cy="0"/>
+          <a:chOff x="0" y="0"/>
+          <a:chExt cx="0" cy="0"/>
+        </a:xfrm>
+      </p:grpSpPr>
+      <p:sp>
+        <p:nvSpPr>
+          <p:cNvPr id="2" name="Title 1"/>
+          <p:cNvSpPr>
+            <a:spLocks noGrp="1"/>
+          </p:cNvSpPr>
+          <p:nvPr>
+            <p:ph type="title"/>
+          </p:nvPr>
+        </p:nvSpPr>
+        <p:spPr/>
+        <p:txBody>
+          <a:bodyPr/>
+          <a:lstStyle/>
+          <a:p>
+            <a:r>
+              <a:t>Future of AI Governance</a:t>
+            </a:r>
+          </a:p>
+        </p:txBody>
+      </p:sp>
+      <p:sp>
+        <p:nvSpPr>
+          <p:cNvPr id="3" name="Content Placeholder 2"/>
+          <p:cNvSpPr>
+            <a:spLocks noGrp="1"/>
+          </p:cNvSpPr>
+          <p:nvPr>
+            <p:ph idx="1"/>
+          </p:nvPr>
+        </p:nvSpPr>
+        <p:spPr/>
+        <p:txBody>
+          <a:bodyPr/>
+          <a:lstStyle/>
+          <a:p>
+            <a:r>
+              <a:rPr lang="en-IN" b="1" dirty="0"/>
+              <a:t>Emerging Trends</a:t>
+            </a:r>
+          </a:p>
+          <a:p>
+            <a:r>
+              <a:rPr lang="en-IN" b="1" dirty="0"/>
+              <a:t>Autonomous Governance Agents</a:t>
+            </a:r>
+          </a:p>
+          <a:p>
+            <a:pPr lvl="1"/>
+            <a:r>
+              <a:rPr lang="en-IN" dirty="0"/>
+              <a:t>AI handles governance automatically.</a:t>
+            </a:r>
+          </a:p>
+          <a:p>
+            <a:r>
+              <a:rPr lang="en-IN" b="1" dirty="0"/>
+              <a:t>AI-Native Catalogues</a:t>
+            </a:r>
+          </a:p>
+          <a:p>
+            <a:pPr lvl="1"/>
+            <a:r>
+              <a:rPr lang="en-IN" dirty="0"/>
+              <a:t>Built specifically for LLMs.</a:t>
+            </a:r>
+          </a:p>
+          <a:p>
+            <a:r>
+              <a:rPr lang="en-IN" b="1" dirty="0"/>
+              <a:t>Real-Time Compliance</a:t>
+            </a:r>
+          </a:p>
+          <a:p>
+            <a:pPr lvl="1"/>
+            <a:r>
+              <a:rPr lang="en-IN" dirty="0"/>
+              <a:t>Continuous governance monitoring.</a:t>
+            </a:r>
+          </a:p>
+          <a:p>
+            <a:r>
+              <a:rPr lang="en-IN" b="1" dirty="0"/>
+              <a:t>Intelligent Lineage Graphs</a:t>
+            </a:r>
+          </a:p>
+          <a:p>
+            <a:pPr lvl="1"/>
+            <a:r>
+              <a:rPr lang="en-IN" dirty="0"/>
+              <a:t>Self-updating lineage systems.</a:t>
             </a:r>
           </a:p>
         </p:txBody>
@@ -18637,7 +23650,7 @@
           <a:lstStyle/>
           <a:p>
             <a:r>
-              <a:t>LLM Capabilities in Lineage</a:t>
+              <a:t>SQL-Based Lineage Extraction</a:t>
             </a:r>
           </a:p>
         </p:txBody>
@@ -18658,22 +23671,22 @@
           <a:lstStyle/>
           <a:p>
             <a:r>
-              <a:t>Understand SQL semantics</a:t>
-            </a:r>
-          </a:p>
-          <a:p>
-            <a:r>
-              <a:t>Extract business logic</a:t>
-            </a:r>
-          </a:p>
-          <a:p>
-            <a:r>
-              <a:t>Generate column-level lineage</a:t>
-            </a:r>
-          </a:p>
-          <a:p>
-            <a:r>
-              <a:t>Infer hidden dependencies</a:t>
+              <a:t>Analyze SELECT statements</a:t>
+            </a:r>
+          </a:p>
+          <a:p>
+            <a:r>
+              <a:t>Parse JOIN operations</a:t>
+            </a:r>
+          </a:p>
+          <a:p>
+            <a:r>
+              <a:t>Track CTE dependencies</a:t>
+            </a:r>
+          </a:p>
+          <a:p>
+            <a:r>
+              <a:t>Generate transformation flow maps</a:t>
             </a:r>
           </a:p>
         </p:txBody>
@@ -18705,28 +23718,13 @@
       </p:grpSpPr>
       <p:sp>
         <p:nvSpPr>
-          <p:cNvPr id="2" name="Title 1"/>
-          <p:cNvSpPr>
-            <a:spLocks noGrp="1"/>
-          </p:cNvSpPr>
-          <p:nvPr>
-            <p:ph type="title"/>
-          </p:nvPr>
-        </p:nvSpPr>
-        <p:spPr/>
-        <p:txBody>
-          <a:bodyPr/>
-          <a:lstStyle/>
-          <a:p>
-            <a:r>
-              <a:t>Metadata Management</a:t>
-            </a:r>
-          </a:p>
-        </p:txBody>
-      </p:sp>
-      <p:sp>
-        <p:nvSpPr>
-          <p:cNvPr id="3" name="Content Placeholder 2"/>
+          <p:cNvPr id="3" name="Content Placeholder 2">
+            <a:extLst>
+              <a:ext uri="{FF2B5EF4-FFF2-40B4-BE49-F238E27FC236}">
+                <a16:creationId xmlns:a16="http://schemas.microsoft.com/office/drawing/2014/main" id="{D474D5FE-04B3-F6B4-34F4-A311E9FE6C47}"/>
+              </a:ext>
+            </a:extLst>
+          </p:cNvPr>
           <p:cNvSpPr>
             <a:spLocks noGrp="1"/>
           </p:cNvSpPr>
@@ -18734,33 +23732,175 @@
             <p:ph idx="1"/>
           </p:nvPr>
         </p:nvSpPr>
-        <p:spPr/>
+        <p:spPr>
+          <a:xfrm>
+            <a:off x="768096" y="514350"/>
+            <a:ext cx="7290055" cy="5795010"/>
+          </a:xfrm>
+        </p:spPr>
         <p:txBody>
-          <a:bodyPr/>
+          <a:bodyPr>
+            <a:normAutofit fontScale="85000" lnSpcReduction="20000"/>
+          </a:bodyPr>
           <a:lstStyle/>
           <a:p>
             <a:r>
-              <a:t>Store table descriptions</a:t>
-            </a:r>
-          </a:p>
-          <a:p>
-            <a:r>
-              <a:t>Track dataset ownership</a:t>
-            </a:r>
-          </a:p>
-          <a:p>
-            <a:r>
-              <a:t>Maintain SLA information</a:t>
-            </a:r>
-          </a:p>
-          <a:p>
-            <a:r>
-              <a:t>Apply governance tags</a:t>
-            </a:r>
+              <a:rPr lang="en-IN" b="1" dirty="0"/>
+              <a:t>AI Reads SQL Queries</a:t>
+            </a:r>
+          </a:p>
+          <a:p>
+            <a:r>
+              <a:rPr lang="en-IN" dirty="0"/>
+              <a:t>AI/Parsers </a:t>
+            </a:r>
+            <a:r>
+              <a:rPr lang="en-IN" dirty="0" err="1"/>
+              <a:t>analyze</a:t>
+            </a:r>
+            <a:r>
+              <a:rPr lang="en-IN" dirty="0"/>
+              <a:t>:</a:t>
+            </a:r>
+          </a:p>
+          <a:p>
+            <a:pPr lvl="1"/>
+            <a:r>
+              <a:rPr lang="en-IN" dirty="0"/>
+              <a:t>SELECT </a:t>
+            </a:r>
+          </a:p>
+          <a:p>
+            <a:pPr lvl="1"/>
+            <a:r>
+              <a:rPr lang="en-IN" dirty="0"/>
+              <a:t>JOIN </a:t>
+            </a:r>
+          </a:p>
+          <a:p>
+            <a:pPr lvl="1"/>
+            <a:r>
+              <a:rPr lang="en-IN" dirty="0"/>
+              <a:t>WHERE </a:t>
+            </a:r>
+          </a:p>
+          <a:p>
+            <a:pPr lvl="1"/>
+            <a:r>
+              <a:rPr lang="en-IN" dirty="0"/>
+              <a:t>GROUP BY </a:t>
+            </a:r>
+          </a:p>
+          <a:p>
+            <a:pPr lvl="1"/>
+            <a:r>
+              <a:rPr lang="en-IN" dirty="0"/>
+              <a:t>CTEs </a:t>
+            </a:r>
+          </a:p>
+          <a:p>
+            <a:r>
+              <a:rPr lang="en-IN" dirty="0"/>
+              <a:t>Example:</a:t>
+            </a:r>
+          </a:p>
+          <a:p>
+            <a:r>
+              <a:rPr lang="en-IN" dirty="0"/>
+              <a:t>SELECT </a:t>
+            </a:r>
+            <a:r>
+              <a:rPr lang="en-IN" dirty="0" err="1"/>
+              <a:t>a.customer_id</a:t>
+            </a:r>
+            <a:r>
+              <a:rPr lang="en-IN" dirty="0"/>
+              <a:t>, </a:t>
+            </a:r>
+            <a:r>
+              <a:rPr lang="en-IN" dirty="0" err="1"/>
+              <a:t>b.amount</a:t>
+            </a:r>
+            <a:br>
+              <a:rPr lang="en-IN" dirty="0"/>
+            </a:br>
+            <a:r>
+              <a:rPr lang="en-IN" dirty="0"/>
+              <a:t>FROM customers a</a:t>
+            </a:r>
+            <a:br>
+              <a:rPr lang="en-IN" dirty="0"/>
+            </a:br>
+            <a:r>
+              <a:rPr lang="en-IN" dirty="0"/>
+              <a:t>JOIN sales b</a:t>
+            </a:r>
+            <a:br>
+              <a:rPr lang="en-IN" dirty="0"/>
+            </a:br>
+            <a:r>
+              <a:rPr lang="en-IN" dirty="0"/>
+              <a:t>ON a.id = </a:t>
+            </a:r>
+            <a:r>
+              <a:rPr lang="en-IN" dirty="0" err="1"/>
+              <a:t>b.customer_id</a:t>
+            </a:r>
+            <a:endParaRPr lang="en-IN" dirty="0"/>
+          </a:p>
+          <a:p>
+            <a:r>
+              <a:rPr lang="en-IN" b="1" dirty="0"/>
+              <a:t>AI Can Detect</a:t>
+            </a:r>
+          </a:p>
+          <a:p>
+            <a:r>
+              <a:rPr lang="en-IN" dirty="0"/>
+              <a:t>Source tables </a:t>
+            </a:r>
+          </a:p>
+          <a:p>
+            <a:r>
+              <a:rPr lang="en-IN" dirty="0"/>
+              <a:t>Target tables </a:t>
+            </a:r>
+          </a:p>
+          <a:p>
+            <a:r>
+              <a:rPr lang="en-IN" dirty="0"/>
+              <a:t>Column dependencies </a:t>
+            </a:r>
+          </a:p>
+          <a:p>
+            <a:r>
+              <a:rPr lang="en-IN" dirty="0"/>
+              <a:t>Join relationships </a:t>
+            </a:r>
+          </a:p>
+          <a:p>
+            <a:r>
+              <a:rPr lang="en-IN" b="1" dirty="0"/>
+              <a:t>Use Case</a:t>
+            </a:r>
+          </a:p>
+          <a:p>
+            <a:r>
+              <a:rPr lang="en-IN" dirty="0"/>
+              <a:t>Automatically build lineage maps without manual documentation.</a:t>
+            </a:r>
+          </a:p>
+          <a:p>
+            <a:endParaRPr lang="en-IN" dirty="0"/>
           </a:p>
         </p:txBody>
       </p:sp>
     </p:spTree>
+    <p:extLst>
+      <p:ext uri="{BB962C8B-B14F-4D97-AF65-F5344CB8AC3E}">
+        <p14:creationId xmlns:p14="http://schemas.microsoft.com/office/powerpoint/2010/main" val="2512198554"/>
+      </p:ext>
+    </p:extLst>
   </p:cSld>
   <p:clrMapOvr>
     <a:masterClrMapping/>
@@ -18771,6 +23911,14 @@
 <file path=ppt/slides/slide8.xml><?xml version="1.0" encoding="utf-8"?>
 <p:sld xmlns:a="http://schemas.openxmlformats.org/drawingml/2006/main" xmlns:r="http://schemas.openxmlformats.org/officeDocument/2006/relationships" xmlns:p="http://schemas.openxmlformats.org/presentationml/2006/main">
   <p:cSld>
+    <p:bg>
+      <p:bgPr>
+        <a:solidFill>
+          <a:srgbClr val="1B3A4B"/>
+        </a:solidFill>
+        <a:effectLst/>
+      </p:bgPr>
+    </p:bg>
     <p:spTree>
       <p:nvGrpSpPr>
         <p:cNvPr id="1" name=""/>
@@ -18787,62 +23935,180 @@
       </p:grpSpPr>
       <p:sp>
         <p:nvSpPr>
-          <p:cNvPr id="2" name="Title 1"/>
-          <p:cNvSpPr>
-            <a:spLocks noGrp="1"/>
-          </p:cNvSpPr>
-          <p:nvPr>
-            <p:ph type="title"/>
-          </p:nvPr>
+          <p:cNvPr id="10" name="AccentBar"/>
+          <p:cNvSpPr/>
+          <p:nvPr/>
         </p:nvSpPr>
-        <p:spPr/>
+        <p:spPr>
+          <a:xfrm>
+            <a:off x="914400" y="2148840"/>
+            <a:ext cx="7315200" cy="45720"/>
+          </a:xfrm>
+          <a:prstGeom prst="rect">
+            <a:avLst/>
+          </a:prstGeom>
+          <a:solidFill>
+            <a:srgbClr val="1CADE4"/>
+          </a:solidFill>
+          <a:ln>
+            <a:noFill/>
+          </a:ln>
+        </p:spPr>
         <p:txBody>
           <a:bodyPr/>
           <a:lstStyle/>
           <a:p>
-            <a:r>
-              <a:t>AI-Powered Metadata Tagging</a:t>
-            </a:r>
+            <a:endParaRPr lang="en-IN"/>
           </a:p>
         </p:txBody>
       </p:sp>
       <p:sp>
         <p:nvSpPr>
-          <p:cNvPr id="3" name="Content Placeholder 2"/>
-          <p:cNvSpPr>
-            <a:spLocks noGrp="1"/>
-          </p:cNvSpPr>
-          <p:nvPr>
-            <p:ph idx="1"/>
-          </p:nvPr>
+          <p:cNvPr id="11" name="LabTag"/>
+          <p:cNvSpPr/>
+          <p:nvPr/>
         </p:nvSpPr>
-        <p:spPr/>
+        <p:spPr>
+          <a:xfrm>
+            <a:off x="3657600" y="2377440"/>
+            <a:ext cx="1828800" cy="548640"/>
+          </a:xfrm>
+          <a:prstGeom prst="roundRect">
+            <a:avLst>
+              <a:gd name="adj" fmla="val 16667"/>
+            </a:avLst>
+          </a:prstGeom>
+          <a:solidFill>
+            <a:srgbClr val="1CADE4"/>
+          </a:solidFill>
+          <a:ln>
+            <a:noFill/>
+          </a:ln>
+        </p:spPr>
+        <p:txBody>
+          <a:bodyPr wrap="square" lIns="0" tIns="0" rIns="0" bIns="0" anchor="ctr"/>
+          <a:lstStyle/>
+          <a:p>
+            <a:pPr algn="ctr"/>
+            <a:r>
+              <a:rPr lang="en-US" sz="2000" b="1" spc="400">
+                <a:solidFill>
+                  <a:srgbClr val="FFFFFF"/>
+                </a:solidFill>
+                <a:latin typeface="Trebuchet MS"/>
+              </a:rPr>
+              <a:t>LAB 1</a:t>
+            </a:r>
+          </a:p>
+        </p:txBody>
+      </p:sp>
+      <p:sp>
+        <p:nvSpPr>
+          <p:cNvPr id="12" name="MainTitle"/>
+          <p:cNvSpPr/>
+          <p:nvPr/>
+        </p:nvSpPr>
+        <p:spPr>
+          <a:xfrm>
+            <a:off x="914400" y="3148965"/>
+            <a:ext cx="7315200" cy="914400"/>
+          </a:xfrm>
+          <a:prstGeom prst="rect">
+            <a:avLst/>
+          </a:prstGeom>
+          <a:noFill/>
+          <a:ln>
+            <a:noFill/>
+          </a:ln>
+        </p:spPr>
+        <p:txBody>
+          <a:bodyPr wrap="square" lIns="0" tIns="0" rIns="0" bIns="0" anchor="ctr"/>
+          <a:lstStyle/>
+          <a:p>
+            <a:pPr algn="ctr"/>
+            <a:r>
+              <a:rPr lang="en-US" sz="4400" b="1">
+                <a:solidFill>
+                  <a:srgbClr val="FFFFFF"/>
+                </a:solidFill>
+                <a:latin typeface="Trebuchet MS"/>
+              </a:rPr>
+              <a:t>Hands-On Activity</a:t>
+            </a:r>
+          </a:p>
+        </p:txBody>
+      </p:sp>
+      <p:sp>
+        <p:nvSpPr>
+          <p:cNvPr id="13" name="Subtitle"/>
+          <p:cNvSpPr/>
+          <p:nvPr/>
+        </p:nvSpPr>
+        <p:spPr>
+          <a:xfrm>
+            <a:off x="1828800" y="4130040"/>
+            <a:ext cx="5486400" cy="548640"/>
+          </a:xfrm>
+          <a:prstGeom prst="rect">
+            <a:avLst/>
+          </a:prstGeom>
+          <a:noFill/>
+          <a:ln>
+            <a:noFill/>
+          </a:ln>
+        </p:spPr>
+        <p:txBody>
+          <a:bodyPr wrap="square" lIns="0" tIns="0" rIns="0" bIns="0" anchor="t"/>
+          <a:lstStyle/>
+          <a:p>
+            <a:pPr algn="ctr"/>
+            <a:r>
+              <a:rPr lang="en-US" sz="1800">
+                <a:solidFill>
+                  <a:srgbClr val="8BB8D0"/>
+                </a:solidFill>
+                <a:latin typeface="Calibri"/>
+              </a:rPr>
+              <a:t>Automated Lineage Extraction from SQL</a:t>
+            </a:r>
+          </a:p>
+        </p:txBody>
+      </p:sp>
+      <p:sp>
+        <p:nvSpPr>
+          <p:cNvPr id="14" name="BottomBar"/>
+          <p:cNvSpPr/>
+          <p:nvPr/>
+        </p:nvSpPr>
+        <p:spPr>
+          <a:xfrm>
+            <a:off x="914400" y="4892040"/>
+            <a:ext cx="7315200" cy="45720"/>
+          </a:xfrm>
+          <a:prstGeom prst="rect">
+            <a:avLst/>
+          </a:prstGeom>
+          <a:solidFill>
+            <a:srgbClr val="1CADE4"/>
+          </a:solidFill>
+          <a:ln>
+            <a:noFill/>
+          </a:ln>
+        </p:spPr>
         <p:txBody>
           <a:bodyPr/>
           <a:lstStyle/>
           <a:p>
-            <a:r>
-              <a:t>Generate business tags</a:t>
-            </a:r>
-          </a:p>
-          <a:p>
-            <a:r>
-              <a:t>Apply sensitivity labels</a:t>
-            </a:r>
-          </a:p>
-          <a:p>
-            <a:r>
-              <a:t>Classify datasets automatically</a:t>
-            </a:r>
-          </a:p>
-          <a:p>
-            <a:r>
-              <a:t>Enhance discoverability</a:t>
-            </a:r>
+            <a:endParaRPr lang="en-IN"/>
           </a:p>
         </p:txBody>
       </p:sp>
     </p:spTree>
+    <p:extLst>
+      <p:ext uri="{BB962C8B-B14F-4D97-AF65-F5344CB8AC3E}">
+        <p14:creationId xmlns:p14="http://schemas.microsoft.com/office/powerpoint/2010/main" val="169814845"/>
+      </p:ext>
+    </p:extLst>
   </p:cSld>
   <p:clrMapOvr>
     <a:masterClrMapping/>
@@ -18883,7 +24149,7 @@
           <a:lstStyle/>
           <a:p>
             <a:r>
-              <a:t>Business Glossary Generation</a:t>
+              <a:t>dbt Lineage Extraction</a:t>
             </a:r>
           </a:p>
         </p:txBody>
@@ -18904,22 +24170,22 @@
           <a:lstStyle/>
           <a:p>
             <a:r>
-              <a:t>Generate business definitions</a:t>
-            </a:r>
-          </a:p>
-          <a:p>
-            <a:r>
-              <a:t>Standardize terminology</a:t>
-            </a:r>
-          </a:p>
-          <a:p>
-            <a:r>
-              <a:t>Improve governance consistency</a:t>
-            </a:r>
-          </a:p>
-          <a:p>
-            <a:r>
-              <a:t>Automate glossary updates</a:t>
+              <a:t>Analyze dbt DAGs</a:t>
+            </a:r>
+          </a:p>
+          <a:p>
+            <a:r>
+              <a:t>Parse models and sources</a:t>
+            </a:r>
+          </a:p>
+          <a:p>
+            <a:r>
+              <a:t>Track transformations</a:t>
+            </a:r>
+          </a:p>
+          <a:p>
+            <a:r>
+              <a:t>Generate dependency relationships</a:t>
             </a:r>
           </a:p>
         </p:txBody>
